--- a/system-tailan.pptx
+++ b/system-tailan.pptx
@@ -27,6 +27,8 @@
     <p:sldId id="275" r:id="rId26"/>
     <p:sldId id="276" r:id="rId27"/>
     <p:sldId id="277" r:id="rId28"/>
+    <p:sldId id="278" r:id="rId29"/>
+    <p:sldId id="279" r:id="rId30"/>
   </p:sldIdLst>
   <p:sldSz cx="12191695" cy="6858000" type="screen4x3"/>
   <p:notesSz cx="6858000" cy="9144000"/>
@@ -20300,7 +20302,7 @@
                 </a:solidFill>
                 <a:latin typeface="Arial"/>
               </a:rPr>
-              <a:t>12.2</a:t>
+              <a:t>12.1а</a:t>
             </a:r>
           </a:p>
         </p:txBody>
@@ -20339,7 +20341,23 @@
                 </a:solidFill>
                 <a:latin typeface="Arial"/>
               </a:rPr>
-              <a:t>Хүлээгдэж буй ба төлөвлөгөөнөөс гадуур хийгдсэн ажлууд</a:t>
+              <a:t>ГУС-ийн холболтоор хийгдэх ажлууд — А, Б, В бүлэг (15)</a:t>
+            </a:r>
+          </a:p>
+          <a:p>
+            <a:pPr algn="l">
+              <a:spcAft>
+                <a:spcPts val="400"/>
+              </a:spcAft>
+            </a:pPr>
+            <a:r>
+              <a:rPr sz="1200" b="0">
+                <a:solidFill>
+                  <a:srgbClr val="4A5560"/>
+                </a:solidFill>
+                <a:latin typeface="Arial"/>
+              </a:rPr>
+              <a:t>Ажил тус бүрд ямар мэдээллийг хаанаас холбохыг тодорхойлов</a:t>
             </a:r>
           </a:p>
         </p:txBody>
@@ -20554,697 +20572,1328 @@
           </a:p>
         </p:txBody>
       </p:sp>
-      <p:sp>
-        <p:nvSpPr>
-          <p:cNvPr id="10" name="Rounded Rectangle 9"/>
-          <p:cNvSpPr/>
-          <p:nvPr/>
-        </p:nvSpPr>
-        <p:spPr>
-          <a:xfrm>
-            <a:off x="502920" y="1481328"/>
-            <a:ext cx="6309360" cy="4709160"/>
-          </a:xfrm>
-          <a:prstGeom prst="roundRect">
-            <a:avLst>
-              <a:gd name="adj" fmla="val 4000"/>
-            </a:avLst>
-          </a:prstGeom>
-          <a:solidFill>
-            <a:srgbClr val="FFFFFF"/>
-          </a:solidFill>
-          <a:ln w="9525">
-            <a:solidFill>
-              <a:srgbClr val="DDE3E9"/>
-            </a:solidFill>
-          </a:ln>
-          <a:effectLst/>
-        </p:spPr>
-        <p:style>
-          <a:lnRef idx="1">
-            <a:schemeClr val="accent1"/>
-          </a:lnRef>
-          <a:fillRef idx="3">
-            <a:schemeClr val="accent1"/>
-          </a:fillRef>
-          <a:effectRef idx="2">
-            <a:schemeClr val="accent1"/>
-          </a:effectRef>
-          <a:fontRef idx="minor">
-            <a:schemeClr val="lt1"/>
-          </a:fontRef>
-        </p:style>
-        <p:txBody>
-          <a:bodyPr rtlCol="0" anchor="ctr"/>
-          <a:lstStyle/>
-          <a:p>
-            <a:pPr algn="ctr"/>
-          </a:p>
-        </p:txBody>
-      </p:sp>
-      <p:sp>
-        <p:nvSpPr>
-          <p:cNvPr id="11" name="Rectangle 10"/>
-          <p:cNvSpPr/>
-          <p:nvPr/>
-        </p:nvSpPr>
-        <p:spPr>
-          <a:xfrm>
-            <a:off x="502920" y="1481328"/>
-            <a:ext cx="6309360" cy="50800"/>
-          </a:xfrm>
-          <a:prstGeom prst="rect">
-            <a:avLst/>
-          </a:prstGeom>
-          <a:solidFill>
-            <a:srgbClr val="C4C5BE"/>
-          </a:solidFill>
-          <a:ln>
-            <a:noFill/>
-          </a:ln>
-          <a:effectLst/>
-        </p:spPr>
-        <p:style>
-          <a:lnRef idx="1">
-            <a:schemeClr val="accent1"/>
-          </a:lnRef>
-          <a:fillRef idx="3">
-            <a:schemeClr val="accent1"/>
-          </a:fillRef>
-          <a:effectRef idx="2">
-            <a:schemeClr val="accent1"/>
-          </a:effectRef>
-          <a:fontRef idx="minor">
-            <a:schemeClr val="lt1"/>
-          </a:fontRef>
-        </p:style>
-        <p:txBody>
-          <a:bodyPr rtlCol="0" anchor="ctr"/>
-          <a:lstStyle/>
-          <a:p>
-            <a:pPr algn="ctr"/>
-          </a:p>
-        </p:txBody>
-      </p:sp>
-      <p:sp>
-        <p:nvSpPr>
-          <p:cNvPr id="12" name="TextBox 11"/>
-          <p:cNvSpPr txBox="1"/>
-          <p:nvPr/>
-        </p:nvSpPr>
-        <p:spPr>
-          <a:xfrm>
-            <a:off x="749808" y="1664208"/>
-            <a:ext cx="5852160" cy="4389120"/>
-          </a:xfrm>
-          <a:prstGeom prst="rect">
-            <a:avLst/>
-          </a:prstGeom>
-          <a:noFill/>
-        </p:spPr>
-        <p:txBody>
-          <a:bodyPr wrap="square">
-            <a:spAutoFit/>
-          </a:bodyPr>
-          <a:lstStyle/>
-          <a:p>
-            <a:pPr algn="l">
-              <a:spcAft>
-                <a:spcPts val="1000"/>
-              </a:spcAft>
-            </a:pPr>
-            <a:r>
-              <a:rPr sz="1000" b="1">
-                <a:solidFill>
-                  <a:srgbClr val="4A5560"/>
-                </a:solidFill>
-                <a:latin typeface="Arial"/>
-              </a:rPr>
-              <a:t>ХҮЛЭЭГДЭЖ БАЙГАА 10 АЖИЛ</a:t>
-            </a:r>
-          </a:p>
-          <a:p>
-            <a:pPr algn="l">
-              <a:spcAft>
-                <a:spcPts val="800"/>
-              </a:spcAft>
-            </a:pPr>
-            <a:r>
-              <a:rPr sz="1150" b="1">
-                <a:solidFill>
-                  <a:srgbClr val="C4C5BE"/>
-                </a:solidFill>
-                <a:latin typeface="Arial"/>
-              </a:rPr>
-              <a:t>▪ </a:t>
-            </a:r>
-            <a:r>
-              <a:rPr sz="1150">
-                <a:solidFill>
-                  <a:srgbClr val="4A5560"/>
-                </a:solidFill>
-                <a:latin typeface="Arial"/>
-              </a:rPr>
-              <a:t>Зураг төслийн түүхэн өөрчлөлтийг харуулах (2.2.2.2)</a:t>
-            </a:r>
-          </a:p>
-          <a:p>
-            <a:pPr algn="l">
-              <a:spcAft>
-                <a:spcPts val="800"/>
-              </a:spcAft>
-            </a:pPr>
-            <a:r>
-              <a:rPr sz="1150" b="1">
-                <a:solidFill>
-                  <a:srgbClr val="C4C5BE"/>
-                </a:solidFill>
-                <a:latin typeface="Arial"/>
-              </a:rPr>
-              <a:t>▪ </a:t>
-            </a:r>
-            <a:r>
-              <a:rPr sz="1150">
-                <a:solidFill>
-                  <a:srgbClr val="4A5560"/>
-                </a:solidFill>
-                <a:latin typeface="Arial"/>
-              </a:rPr>
-              <a:t>НЭЗ судалгааг цахимаар авах (2.4.2.1)</a:t>
-            </a:r>
-          </a:p>
-          <a:p>
-            <a:pPr algn="l">
-              <a:spcAft>
-                <a:spcPts val="800"/>
-              </a:spcAft>
-            </a:pPr>
-            <a:r>
-              <a:rPr sz="1150" b="1">
-                <a:solidFill>
-                  <a:srgbClr val="C4C5BE"/>
-                </a:solidFill>
-                <a:latin typeface="Arial"/>
-              </a:rPr>
-              <a:t>▪ </a:t>
-            </a:r>
-            <a:r>
-              <a:rPr sz="1150">
-                <a:solidFill>
-                  <a:srgbClr val="4A5560"/>
-                </a:solidFill>
-                <a:latin typeface="Arial"/>
-              </a:rPr>
-              <a:t>Мэдэгдэх хуудас цахимаар хүргүүлэх (2.4.2.2)</a:t>
-            </a:r>
-          </a:p>
-          <a:p>
-            <a:pPr algn="l">
-              <a:spcAft>
-                <a:spcPts val="800"/>
-              </a:spcAft>
-            </a:pPr>
-            <a:r>
-              <a:rPr sz="1150" b="1">
-                <a:solidFill>
-                  <a:srgbClr val="C4C5BE"/>
-                </a:solidFill>
-                <a:latin typeface="Arial"/>
-              </a:rPr>
-              <a:t>▪ </a:t>
-            </a:r>
-            <a:r>
-              <a:rPr sz="1150">
-                <a:solidFill>
-                  <a:srgbClr val="4A5560"/>
-                </a:solidFill>
-                <a:latin typeface="Arial"/>
-              </a:rPr>
-              <a:t>Албан бичиг хүргүүлэх (2.4.2.3)</a:t>
-            </a:r>
-          </a:p>
-          <a:p>
-            <a:pPr algn="l">
-              <a:spcAft>
-                <a:spcPts val="800"/>
-              </a:spcAft>
-            </a:pPr>
-            <a:r>
-              <a:rPr sz="1150" b="1">
-                <a:solidFill>
-                  <a:srgbClr val="C4C5BE"/>
-                </a:solidFill>
-                <a:latin typeface="Arial"/>
-              </a:rPr>
-              <a:t>▪ </a:t>
-            </a:r>
-            <a:r>
-              <a:rPr sz="1150">
-                <a:solidFill>
-                  <a:srgbClr val="4A5560"/>
-                </a:solidFill>
-                <a:latin typeface="Arial"/>
-              </a:rPr>
-              <a:t>Тооцооллын журам, аргачлал, үнийн бүртгэл (2.4.3.2)</a:t>
-            </a:r>
-          </a:p>
-          <a:p>
-            <a:pPr algn="l">
-              <a:spcAft>
-                <a:spcPts val="800"/>
-              </a:spcAft>
-            </a:pPr>
-            <a:r>
-              <a:rPr sz="1150" b="1">
-                <a:solidFill>
-                  <a:srgbClr val="C4C5BE"/>
-                </a:solidFill>
-                <a:latin typeface="Arial"/>
-              </a:rPr>
-              <a:t>▪ </a:t>
-            </a:r>
-            <a:r>
-              <a:rPr sz="1150">
-                <a:solidFill>
-                  <a:srgbClr val="4A5560"/>
-                </a:solidFill>
-                <a:latin typeface="Arial"/>
-              </a:rPr>
-              <a:t>Гэрээг цахим системээр хэвлэх (2.4.4.2)</a:t>
-            </a:r>
-          </a:p>
-          <a:p>
-            <a:pPr algn="l">
-              <a:spcAft>
-                <a:spcPts val="800"/>
-              </a:spcAft>
-            </a:pPr>
-            <a:r>
-              <a:rPr sz="1150" b="1">
-                <a:solidFill>
-                  <a:srgbClr val="C4C5BE"/>
-                </a:solidFill>
-                <a:latin typeface="Arial"/>
-              </a:rPr>
-              <a:t>▪ </a:t>
-            </a:r>
-            <a:r>
-              <a:rPr sz="1150">
-                <a:solidFill>
-                  <a:srgbClr val="4A5560"/>
-                </a:solidFill>
-                <a:latin typeface="Arial"/>
-              </a:rPr>
-              <a:t>Чөлөөлсөн тухай акт үйлдэх (2.4.4.4)</a:t>
-            </a:r>
-          </a:p>
-          <a:p>
-            <a:pPr algn="l">
-              <a:spcAft>
-                <a:spcPts val="800"/>
-              </a:spcAft>
-            </a:pPr>
-            <a:r>
-              <a:rPr sz="1150" b="1">
-                <a:solidFill>
-                  <a:srgbClr val="C4C5BE"/>
-                </a:solidFill>
-                <a:latin typeface="Arial"/>
-              </a:rPr>
-              <a:t>▪ </a:t>
-            </a:r>
-            <a:r>
-              <a:rPr sz="1150">
-                <a:solidFill>
-                  <a:srgbClr val="4A5560"/>
-                </a:solidFill>
-                <a:latin typeface="Arial"/>
-              </a:rPr>
-              <a:t>Агаар сансрын зураг шинэчлэх (2.6.1) · дроны мэдээлэл (2.6.2)</a:t>
-            </a:r>
-          </a:p>
-          <a:p>
-            <a:pPr algn="l">
-              <a:spcAft>
-                <a:spcPts val="800"/>
-              </a:spcAft>
-            </a:pPr>
-            <a:r>
-              <a:rPr sz="1150" b="1">
-                <a:solidFill>
-                  <a:srgbClr val="C4C5BE"/>
-                </a:solidFill>
-                <a:latin typeface="Arial"/>
-              </a:rPr>
-              <a:t>▪ </a:t>
-            </a:r>
-            <a:r>
-              <a:rPr sz="1150">
-                <a:solidFill>
-                  <a:srgbClr val="4A5560"/>
-                </a:solidFill>
-                <a:latin typeface="Arial"/>
-              </a:rPr>
-              <a:t>2010–2025 оны түүхэн өгөгдөл нөхөж оруулах (2.7.1)</a:t>
-            </a:r>
-          </a:p>
-        </p:txBody>
-      </p:sp>
-      <p:sp>
-        <p:nvSpPr>
-          <p:cNvPr id="13" name="Rounded Rectangle 12"/>
-          <p:cNvSpPr/>
-          <p:nvPr/>
-        </p:nvSpPr>
-        <p:spPr>
-          <a:xfrm>
-            <a:off x="7022592" y="1481328"/>
-            <a:ext cx="4663440" cy="4709160"/>
-          </a:xfrm>
-          <a:prstGeom prst="roundRect">
-            <a:avLst>
-              <a:gd name="adj" fmla="val 4000"/>
-            </a:avLst>
-          </a:prstGeom>
-          <a:solidFill>
-            <a:srgbClr val="FFFFFF"/>
-          </a:solidFill>
-          <a:ln w="9525">
-            <a:solidFill>
-              <a:srgbClr val="DDE3E9"/>
-            </a:solidFill>
-          </a:ln>
-          <a:effectLst/>
-        </p:spPr>
-        <p:style>
-          <a:lnRef idx="1">
-            <a:schemeClr val="accent1"/>
-          </a:lnRef>
-          <a:fillRef idx="3">
-            <a:schemeClr val="accent1"/>
-          </a:fillRef>
-          <a:effectRef idx="2">
-            <a:schemeClr val="accent1"/>
-          </a:effectRef>
-          <a:fontRef idx="minor">
-            <a:schemeClr val="lt1"/>
-          </a:fontRef>
-        </p:style>
-        <p:txBody>
-          <a:bodyPr rtlCol="0" anchor="ctr"/>
-          <a:lstStyle/>
-          <a:p>
-            <a:pPr algn="ctr"/>
-          </a:p>
-        </p:txBody>
-      </p:sp>
-      <p:sp>
-        <p:nvSpPr>
-          <p:cNvPr id="14" name="Rectangle 13"/>
-          <p:cNvSpPr/>
-          <p:nvPr/>
-        </p:nvSpPr>
-        <p:spPr>
-          <a:xfrm>
-            <a:off x="7022592" y="1481328"/>
-            <a:ext cx="4663440" cy="50800"/>
-          </a:xfrm>
-          <a:prstGeom prst="rect">
-            <a:avLst/>
-          </a:prstGeom>
-          <a:solidFill>
-            <a:srgbClr val="0E8345"/>
-          </a:solidFill>
-          <a:ln>
-            <a:noFill/>
-          </a:ln>
-          <a:effectLst/>
-        </p:spPr>
-        <p:style>
-          <a:lnRef idx="1">
-            <a:schemeClr val="accent1"/>
-          </a:lnRef>
-          <a:fillRef idx="3">
-            <a:schemeClr val="accent1"/>
-          </a:fillRef>
-          <a:effectRef idx="2">
-            <a:schemeClr val="accent1"/>
-          </a:effectRef>
-          <a:fontRef idx="minor">
-            <a:schemeClr val="lt1"/>
-          </a:fontRef>
-        </p:style>
-        <p:txBody>
-          <a:bodyPr rtlCol="0" anchor="ctr"/>
-          <a:lstStyle/>
-          <a:p>
-            <a:pPr algn="ctr"/>
-          </a:p>
-        </p:txBody>
-      </p:sp>
-      <p:sp>
-        <p:nvSpPr>
-          <p:cNvPr id="15" name="TextBox 14"/>
-          <p:cNvSpPr txBox="1"/>
-          <p:nvPr/>
-        </p:nvSpPr>
-        <p:spPr>
-          <a:xfrm>
-            <a:off x="7269480" y="1664208"/>
-            <a:ext cx="4206240" cy="4389120"/>
-          </a:xfrm>
-          <a:prstGeom prst="rect">
-            <a:avLst/>
-          </a:prstGeom>
-          <a:noFill/>
-        </p:spPr>
-        <p:txBody>
-          <a:bodyPr wrap="square">
-            <a:spAutoFit/>
-          </a:bodyPr>
-          <a:lstStyle/>
-          <a:p>
-            <a:pPr algn="l">
-              <a:spcAft>
-                <a:spcPts val="1100"/>
-              </a:spcAft>
-            </a:pPr>
-            <a:r>
-              <a:rPr sz="1000" b="1">
-                <a:solidFill>
-                  <a:srgbClr val="0E8345"/>
-                </a:solidFill>
-                <a:latin typeface="Arial"/>
-              </a:rPr>
-              <a:t>ИЖ БҮРДЭЛД ОРООГҮЙ БОЛОВЧ ХЭРЭГЖСЭН 6 АЖИЛ</a:t>
-            </a:r>
-          </a:p>
-          <a:p>
-            <a:pPr algn="l">
-              <a:spcAft>
-                <a:spcPts val="900"/>
-              </a:spcAft>
-            </a:pPr>
-            <a:r>
-              <a:rPr sz="1150" b="1">
-                <a:solidFill>
-                  <a:srgbClr val="0E8345"/>
-                </a:solidFill>
-                <a:latin typeface="Arial"/>
-              </a:rPr>
-              <a:t>▪ </a:t>
-            </a:r>
-            <a:r>
-              <a:rPr sz="1150" b="1">
-                <a:solidFill>
-                  <a:srgbClr val="16202B"/>
-                </a:solidFill>
-                <a:latin typeface="Arial"/>
-              </a:rPr>
-              <a:t>Excel-ээс үнэлгээ импортлох</a:t>
-            </a:r>
-            <a:r>
-              <a:rPr sz="1150">
-                <a:solidFill>
-                  <a:srgbClr val="4A5560"/>
-                </a:solidFill>
-                <a:latin typeface="Arial"/>
-              </a:rPr>
-              <a:t> — SHA-256 давхардлын хамгаалалттай</a:t>
-            </a:r>
-          </a:p>
-          <a:p>
-            <a:pPr algn="l">
-              <a:spcAft>
-                <a:spcPts val="900"/>
-              </a:spcAft>
-            </a:pPr>
-            <a:r>
-              <a:rPr sz="1150" b="1">
-                <a:solidFill>
-                  <a:srgbClr val="0E8345"/>
-                </a:solidFill>
-                <a:latin typeface="Arial"/>
-              </a:rPr>
-              <a:t>▪ </a:t>
-            </a:r>
-            <a:r>
-              <a:rPr sz="1150" b="1">
-                <a:solidFill>
-                  <a:srgbClr val="16202B"/>
-                </a:solidFill>
-                <a:latin typeface="Arial"/>
-              </a:rPr>
-              <a:t>Мэрг. байгууллагын портал</a:t>
-            </a:r>
-            <a:r>
-              <a:rPr sz="1150">
-                <a:solidFill>
-                  <a:srgbClr val="4A5560"/>
-                </a:solidFill>
-                <a:latin typeface="Arial"/>
-              </a:rPr>
-              <a:t> — тусгаарлагдсан 43 endpoint</a:t>
-            </a:r>
-          </a:p>
-          <a:p>
-            <a:pPr algn="l">
-              <a:spcAft>
-                <a:spcPts val="900"/>
-              </a:spcAft>
-            </a:pPr>
-            <a:r>
-              <a:rPr sz="1150" b="1">
-                <a:solidFill>
-                  <a:srgbClr val="0E8345"/>
-                </a:solidFill>
-                <a:latin typeface="Arial"/>
-              </a:rPr>
-              <a:t>▪ </a:t>
-            </a:r>
-            <a:r>
-              <a:rPr sz="1150" b="1">
-                <a:solidFill>
-                  <a:srgbClr val="16202B"/>
-                </a:solidFill>
-                <a:latin typeface="Arial"/>
-              </a:rPr>
-              <a:t>Бүрэн түүхжүүлэлт</a:t>
-            </a:r>
-            <a:r>
-              <a:rPr sz="1150">
-                <a:solidFill>
-                  <a:srgbClr val="4A5560"/>
-                </a:solidFill>
-                <a:latin typeface="Arial"/>
-              </a:rPr>
-              <a:t> — өөрчлөлт бүр түүхтэй</a:t>
-            </a:r>
-          </a:p>
-          <a:p>
-            <a:pPr algn="l">
-              <a:spcAft>
-                <a:spcPts val="900"/>
-              </a:spcAft>
-            </a:pPr>
-            <a:r>
-              <a:rPr sz="1150" b="1">
-                <a:solidFill>
-                  <a:srgbClr val="0E8345"/>
-                </a:solidFill>
-                <a:latin typeface="Arial"/>
-              </a:rPr>
-              <a:t>▪ </a:t>
-            </a:r>
-            <a:r>
-              <a:rPr sz="1150" b="1">
-                <a:solidFill>
-                  <a:srgbClr val="16202B"/>
-                </a:solidFill>
-                <a:latin typeface="Arial"/>
-              </a:rPr>
-              <a:t>Аюулгүй байдлын өргөтгөлүүд</a:t>
-            </a:r>
-            <a:r>
-              <a:rPr sz="1150">
-                <a:solidFill>
-                  <a:srgbClr val="4A5560"/>
-                </a:solidFill>
-                <a:latin typeface="Arial"/>
-              </a:rPr>
-              <a:t> — token хүчингүйжүүлэлт, 4 давхар хамгаалалт</a:t>
-            </a:r>
-          </a:p>
-          <a:p>
-            <a:pPr algn="l">
-              <a:spcAft>
-                <a:spcPts val="900"/>
-              </a:spcAft>
-            </a:pPr>
-            <a:r>
-              <a:rPr sz="1150" b="1">
-                <a:solidFill>
-                  <a:srgbClr val="0E8345"/>
-                </a:solidFill>
-                <a:latin typeface="Arial"/>
-              </a:rPr>
-              <a:t>▪ </a:t>
-            </a:r>
-            <a:r>
-              <a:rPr sz="1150" b="1">
-                <a:solidFill>
-                  <a:srgbClr val="16202B"/>
-                </a:solidFill>
-                <a:latin typeface="Arial"/>
-              </a:rPr>
-              <a:t>Бодит цагийн мэдэгдэл</a:t>
-            </a:r>
-            <a:r>
-              <a:rPr sz="1150">
-                <a:solidFill>
-                  <a:srgbClr val="4A5560"/>
-                </a:solidFill>
-                <a:latin typeface="Arial"/>
-              </a:rPr>
-              <a:t> — SSE стрийм, хонх, toast</a:t>
-            </a:r>
-          </a:p>
-          <a:p>
-            <a:pPr algn="l">
-              <a:spcAft>
-                <a:spcPts val="900"/>
-              </a:spcAft>
-            </a:pPr>
-            <a:r>
-              <a:rPr sz="1150" b="1">
-                <a:solidFill>
-                  <a:srgbClr val="0E8345"/>
-                </a:solidFill>
-                <a:latin typeface="Arial"/>
-              </a:rPr>
-              <a:t>▪ </a:t>
-            </a:r>
-            <a:r>
-              <a:rPr sz="1150" b="1">
-                <a:solidFill>
-                  <a:srgbClr val="16202B"/>
-                </a:solidFill>
-                <a:latin typeface="Arial"/>
-              </a:rPr>
-              <a:t>Аудит лог</a:t>
-            </a:r>
-            <a:r>
-              <a:rPr sz="1150">
-                <a:solidFill>
-                  <a:srgbClr val="4A5560"/>
-                </a:solidFill>
-                <a:latin typeface="Arial"/>
-              </a:rPr>
-              <a:t> — 36 цэг, IP/төхөөрөмжтэй мөрдлөг</a:t>
-            </a:r>
-          </a:p>
-        </p:txBody>
-      </p:sp>
+      <p:graphicFrame>
+        <p:nvGraphicFramePr>
+          <p:cNvPr id="10" name="Table 9"/>
+          <p:cNvGraphicFramePr>
+            <a:graphicFrameLocks noGrp="1"/>
+          </p:cNvGraphicFramePr>
+          <p:nvPr/>
+        </p:nvGraphicFramePr>
+        <p:xfrm>
+          <a:off x="502920" y="1417320"/>
+          <a:ext cx="11183111" cy="4754880"/>
+        </p:xfrm>
+        <a:graphic>
+          <a:graphicData uri="http://schemas.openxmlformats.org/drawingml/2006/table">
+            <a:tbl>
+              <a:tblPr firstRow="1" bandRow="1">
+                <a:tableStyleId>{5C22544A-7EE6-4342-B048-85BDC9FD1C3A}</a:tableStyleId>
+              </a:tblPr>
+              <a:tblGrid>
+                <a:gridCol w="502920"/>
+                <a:gridCol w="3749039"/>
+                <a:gridCol w="6931152"/>
+              </a:tblGrid>
+              <a:tr h="250256">
+                <a:tc>
+                  <a:txBody>
+                    <a:bodyPr/>
+                    <a:lstStyle/>
+                    <a:p>
+                      <a:pPr algn="l"/>
+                      <a:r>
+                        <a:rPr sz="1000" b="1">
+                          <a:solidFill>
+                            <a:srgbClr val="FFFFFF"/>
+                          </a:solidFill>
+                          <a:latin typeface="Arial"/>
+                        </a:rPr>
+                        <a:t>№</a:t>
+                      </a:r>
+                    </a:p>
+                  </a:txBody>
+                  <a:tcPr anchor="ctr">
+                    <a:solidFill>
+                      <a:srgbClr val="0E2440"/>
+                    </a:solidFill>
+                  </a:tcPr>
+                </a:tc>
+                <a:tc>
+                  <a:txBody>
+                    <a:bodyPr/>
+                    <a:lstStyle/>
+                    <a:p>
+                      <a:pPr algn="ctr"/>
+                      <a:r>
+                        <a:rPr sz="1000" b="1">
+                          <a:solidFill>
+                            <a:srgbClr val="FFFFFF"/>
+                          </a:solidFill>
+                          <a:latin typeface="Arial"/>
+                        </a:rPr>
+                        <a:t>Ажил (дугаар)</a:t>
+                      </a:r>
+                    </a:p>
+                  </a:txBody>
+                  <a:tcPr anchor="ctr">
+                    <a:solidFill>
+                      <a:srgbClr val="0E2440"/>
+                    </a:solidFill>
+                  </a:tcPr>
+                </a:tc>
+                <a:tc>
+                  <a:txBody>
+                    <a:bodyPr/>
+                    <a:lstStyle/>
+                    <a:p>
+                      <a:pPr algn="ctr"/>
+                      <a:r>
+                        <a:rPr sz="1000" b="1">
+                          <a:solidFill>
+                            <a:srgbClr val="FFFFFF"/>
+                          </a:solidFill>
+                          <a:latin typeface="Arial"/>
+                        </a:rPr>
+                        <a:t>Холбох мэдээлэл</a:t>
+                      </a:r>
+                    </a:p>
+                  </a:txBody>
+                  <a:tcPr anchor="ctr">
+                    <a:solidFill>
+                      <a:srgbClr val="0E2440"/>
+                    </a:solidFill>
+                  </a:tcPr>
+                </a:tc>
+              </a:tr>
+              <a:tr h="250256">
+                <a:tc gridSpan="3">
+                  <a:txBody>
+                    <a:bodyPr/>
+                    <a:lstStyle/>
+                    <a:p>
+                      <a:pPr algn="l"/>
+                      <a:r>
+                        <a:rPr sz="950" b="1">
+                          <a:solidFill>
+                            <a:srgbClr val="0E2440"/>
+                          </a:solidFill>
+                          <a:latin typeface="Arial"/>
+                        </a:rPr>
+                        <a:t>А. СИСТЕМИЙН УДИРДЛАГА, ҮНДСЭН БҮРТГЭЛ (7)</a:t>
+                      </a:r>
+                    </a:p>
+                  </a:txBody>
+                  <a:tcPr anchor="ctr">
+                    <a:solidFill>
+                      <a:srgbClr val="E0F7F8"/>
+                    </a:solidFill>
+                  </a:tcPr>
+                </a:tc>
+                <a:tc hMerge="1">
+                  <a:txBody>
+                    <a:bodyPr/>
+                    <a:lstStyle/>
+                    <a:p>
+                      <a:pPr algn="ctr"/>
+                    </a:p>
+                  </a:txBody>
+                  <a:tcPr anchor="ctr">
+                    <a:solidFill>
+                      <a:srgbClr val="FFFFFF"/>
+                    </a:solidFill>
+                  </a:tcPr>
+                </a:tc>
+                <a:tc hMerge="1">
+                  <a:txBody>
+                    <a:bodyPr/>
+                    <a:lstStyle/>
+                    <a:p>
+                      <a:pPr algn="ctr"/>
+                    </a:p>
+                  </a:txBody>
+                  <a:tcPr anchor="ctr">
+                    <a:solidFill>
+                      <a:srgbClr val="FFFFFF"/>
+                    </a:solidFill>
+                  </a:tcPr>
+                </a:tc>
+              </a:tr>
+              <a:tr h="250256">
+                <a:tc>
+                  <a:txBody>
+                    <a:bodyPr/>
+                    <a:lstStyle/>
+                    <a:p>
+                      <a:pPr algn="l"/>
+                      <a:r>
+                        <a:rPr sz="850">
+                          <a:solidFill>
+                            <a:srgbClr val="4A5560"/>
+                          </a:solidFill>
+                          <a:latin typeface="Arial"/>
+                        </a:rPr>
+                        <a:t>1</a:t>
+                      </a:r>
+                    </a:p>
+                  </a:txBody>
+                  <a:tcPr anchor="ctr">
+                    <a:solidFill>
+                      <a:srgbClr val="F0F4F8"/>
+                    </a:solidFill>
+                  </a:tcPr>
+                </a:tc>
+                <a:tc>
+                  <a:txBody>
+                    <a:bodyPr/>
+                    <a:lstStyle/>
+                    <a:p>
+                      <a:pPr algn="l"/>
+                      <a:r>
+                        <a:rPr sz="850" b="1">
+                          <a:solidFill>
+                            <a:srgbClr val="16202B"/>
+                          </a:solidFill>
+                          <a:latin typeface="Arial"/>
+                        </a:rPr>
+                        <a:t>Хэрэглэгчийн бүртгэл, жагсаалт (2.2.1)</a:t>
+                      </a:r>
+                    </a:p>
+                  </a:txBody>
+                  <a:tcPr anchor="ctr">
+                    <a:solidFill>
+                      <a:srgbClr val="F0F4F8"/>
+                    </a:solidFill>
+                  </a:tcPr>
+                </a:tc>
+                <a:tc>
+                  <a:txBody>
+                    <a:bodyPr/>
+                    <a:lstStyle/>
+                    <a:p>
+                      <a:pPr algn="l"/>
+                      <a:r>
+                        <a:rPr sz="850">
+                          <a:solidFill>
+                            <a:srgbClr val="4A5560"/>
+                          </a:solidFill>
+                          <a:latin typeface="Arial"/>
+                        </a:rPr>
+                        <a:t>ГУС-ийн хэрэглэгчийн нэгдсэн бүртгэлээс нэр, албан тушаал, байгууллага татах</a:t>
+                      </a:r>
+                    </a:p>
+                  </a:txBody>
+                  <a:tcPr anchor="ctr">
+                    <a:solidFill>
+                      <a:srgbClr val="F0F4F8"/>
+                    </a:solidFill>
+                  </a:tcPr>
+                </a:tc>
+              </a:tr>
+              <a:tr h="250256">
+                <a:tc>
+                  <a:txBody>
+                    <a:bodyPr/>
+                    <a:lstStyle/>
+                    <a:p>
+                      <a:pPr algn="l"/>
+                      <a:r>
+                        <a:rPr sz="850">
+                          <a:solidFill>
+                            <a:srgbClr val="4A5560"/>
+                          </a:solidFill>
+                          <a:latin typeface="Arial"/>
+                        </a:rPr>
+                        <a:t>2</a:t>
+                      </a:r>
+                    </a:p>
+                  </a:txBody>
+                  <a:tcPr anchor="ctr">
+                    <a:solidFill>
+                      <a:srgbClr val="FFFFFF"/>
+                    </a:solidFill>
+                  </a:tcPr>
+                </a:tc>
+                <a:tc>
+                  <a:txBody>
+                    <a:bodyPr/>
+                    <a:lstStyle/>
+                    <a:p>
+                      <a:pPr algn="l"/>
+                      <a:r>
+                        <a:rPr sz="850" b="1">
+                          <a:solidFill>
+                            <a:srgbClr val="16202B"/>
+                          </a:solidFill>
+                          <a:latin typeface="Arial"/>
+                        </a:rPr>
+                        <a:t>Хэрэглэгчийн эрхийн бүртгэл (2.2.2)</a:t>
+                      </a:r>
+                    </a:p>
+                  </a:txBody>
+                  <a:tcPr anchor="ctr">
+                    <a:solidFill>
+                      <a:srgbClr val="FFFFFF"/>
+                    </a:solidFill>
+                  </a:tcPr>
+                </a:tc>
+                <a:tc>
+                  <a:txBody>
+                    <a:bodyPr/>
+                    <a:lstStyle/>
+                    <a:p>
+                      <a:pPr algn="l"/>
+                      <a:r>
+                        <a:rPr sz="850">
+                          <a:solidFill>
+                            <a:srgbClr val="4A5560"/>
+                          </a:solidFill>
+                          <a:latin typeface="Arial"/>
+                        </a:rPr>
+                        <a:t>Эрхийн түвшин, ролийн мэдээллийг татаж системийн эрхтэй уялдуулах</a:t>
+                      </a:r>
+                    </a:p>
+                  </a:txBody>
+                  <a:tcPr anchor="ctr">
+                    <a:solidFill>
+                      <a:srgbClr val="FFFFFF"/>
+                    </a:solidFill>
+                  </a:tcPr>
+                </a:tc>
+              </a:tr>
+              <a:tr h="250256">
+                <a:tc>
+                  <a:txBody>
+                    <a:bodyPr/>
+                    <a:lstStyle/>
+                    <a:p>
+                      <a:pPr algn="l"/>
+                      <a:r>
+                        <a:rPr sz="850">
+                          <a:solidFill>
+                            <a:srgbClr val="4A5560"/>
+                          </a:solidFill>
+                          <a:latin typeface="Arial"/>
+                        </a:rPr>
+                        <a:t>3</a:t>
+                      </a:r>
+                    </a:p>
+                  </a:txBody>
+                  <a:tcPr anchor="ctr">
+                    <a:solidFill>
+                      <a:srgbClr val="F0F4F8"/>
+                    </a:solidFill>
+                  </a:tcPr>
+                </a:tc>
+                <a:tc>
+                  <a:txBody>
+                    <a:bodyPr/>
+                    <a:lstStyle/>
+                    <a:p>
+                      <a:pPr algn="l"/>
+                      <a:r>
+                        <a:rPr sz="850" b="1">
+                          <a:solidFill>
+                            <a:srgbClr val="16202B"/>
+                          </a:solidFill>
+                          <a:latin typeface="Arial"/>
+                        </a:rPr>
+                        <a:t>Эрхийн тохиргоо (2.2.3)</a:t>
+                      </a:r>
+                    </a:p>
+                  </a:txBody>
+                  <a:tcPr anchor="ctr">
+                    <a:solidFill>
+                      <a:srgbClr val="F0F4F8"/>
+                    </a:solidFill>
+                  </a:tcPr>
+                </a:tc>
+                <a:tc>
+                  <a:txBody>
+                    <a:bodyPr/>
+                    <a:lstStyle/>
+                    <a:p>
+                      <a:pPr algn="l"/>
+                      <a:r>
+                        <a:rPr sz="850">
+                          <a:solidFill>
+                            <a:srgbClr val="4A5560"/>
+                          </a:solidFill>
+                          <a:latin typeface="Arial"/>
+                        </a:rPr>
+                        <a:t>Чиг үүргийн ангилал ↔ системийн 6 роль, зөвшөөрлийн харгалзаа</a:t>
+                      </a:r>
+                    </a:p>
+                  </a:txBody>
+                  <a:tcPr anchor="ctr">
+                    <a:solidFill>
+                      <a:srgbClr val="F0F4F8"/>
+                    </a:solidFill>
+                  </a:tcPr>
+                </a:tc>
+              </a:tr>
+              <a:tr h="250256">
+                <a:tc>
+                  <a:txBody>
+                    <a:bodyPr/>
+                    <a:lstStyle/>
+                    <a:p>
+                      <a:pPr algn="l"/>
+                      <a:r>
+                        <a:rPr sz="850">
+                          <a:solidFill>
+                            <a:srgbClr val="4A5560"/>
+                          </a:solidFill>
+                          <a:latin typeface="Arial"/>
+                        </a:rPr>
+                        <a:t>4</a:t>
+                      </a:r>
+                    </a:p>
+                  </a:txBody>
+                  <a:tcPr anchor="ctr">
+                    <a:solidFill>
+                      <a:srgbClr val="FFFFFF"/>
+                    </a:solidFill>
+                  </a:tcPr>
+                </a:tc>
+                <a:tc>
+                  <a:txBody>
+                    <a:bodyPr/>
+                    <a:lstStyle/>
+                    <a:p>
+                      <a:pPr algn="l"/>
+                      <a:r>
+                        <a:rPr sz="850" b="1">
+                          <a:solidFill>
+                            <a:srgbClr val="16202B"/>
+                          </a:solidFill>
+                          <a:latin typeface="Arial"/>
+                        </a:rPr>
+                        <a:t>Ажилтны бүртгэл (2.3.1)</a:t>
+                      </a:r>
+                    </a:p>
+                  </a:txBody>
+                  <a:tcPr anchor="ctr">
+                    <a:solidFill>
+                      <a:srgbClr val="FFFFFF"/>
+                    </a:solidFill>
+                  </a:tcPr>
+                </a:tc>
+                <a:tc>
+                  <a:txBody>
+                    <a:bodyPr/>
+                    <a:lstStyle/>
+                    <a:p>
+                      <a:pPr algn="l"/>
+                      <a:r>
+                        <a:rPr sz="850">
+                          <a:solidFill>
+                            <a:srgbClr val="4A5560"/>
+                          </a:solidFill>
+                          <a:latin typeface="Arial"/>
+                        </a:rPr>
+                        <a:t>Албан хаагчийн мэдээлэл — хариуцагч оноох жагсаалтын эх сурвалж</a:t>
+                      </a:r>
+                    </a:p>
+                  </a:txBody>
+                  <a:tcPr anchor="ctr">
+                    <a:solidFill>
+                      <a:srgbClr val="FFFFFF"/>
+                    </a:solidFill>
+                  </a:tcPr>
+                </a:tc>
+              </a:tr>
+              <a:tr h="250256">
+                <a:tc>
+                  <a:txBody>
+                    <a:bodyPr/>
+                    <a:lstStyle/>
+                    <a:p>
+                      <a:pPr algn="l"/>
+                      <a:r>
+                        <a:rPr sz="850">
+                          <a:solidFill>
+                            <a:srgbClr val="4A5560"/>
+                          </a:solidFill>
+                          <a:latin typeface="Arial"/>
+                        </a:rPr>
+                        <a:t>5</a:t>
+                      </a:r>
+                    </a:p>
+                  </a:txBody>
+                  <a:tcPr anchor="ctr">
+                    <a:solidFill>
+                      <a:srgbClr val="F0F4F8"/>
+                    </a:solidFill>
+                  </a:tcPr>
+                </a:tc>
+                <a:tc>
+                  <a:txBody>
+                    <a:bodyPr/>
+                    <a:lstStyle/>
+                    <a:p>
+                      <a:pPr algn="l"/>
+                      <a:r>
+                        <a:rPr sz="850" b="1">
+                          <a:solidFill>
+                            <a:srgbClr val="16202B"/>
+                          </a:solidFill>
+                          <a:latin typeface="Arial"/>
+                        </a:rPr>
+                        <a:t>Ажилтны лавлахууд (2.3.2)</a:t>
+                      </a:r>
+                    </a:p>
+                  </a:txBody>
+                  <a:tcPr anchor="ctr">
+                    <a:solidFill>
+                      <a:srgbClr val="F0F4F8"/>
+                    </a:solidFill>
+                  </a:tcPr>
+                </a:tc>
+                <a:tc>
+                  <a:txBody>
+                    <a:bodyPr/>
+                    <a:lstStyle/>
+                    <a:p>
+                      <a:pPr algn="l"/>
+                      <a:r>
+                        <a:rPr sz="850">
+                          <a:solidFill>
+                            <a:srgbClr val="4A5560"/>
+                          </a:solidFill>
+                          <a:latin typeface="Arial"/>
+                        </a:rPr>
+                        <a:t>Албан тушаал, нэгж/хэлтсийн лавлахыг синхрончлох</a:t>
+                      </a:r>
+                    </a:p>
+                  </a:txBody>
+                  <a:tcPr anchor="ctr">
+                    <a:solidFill>
+                      <a:srgbClr val="F0F4F8"/>
+                    </a:solidFill>
+                  </a:tcPr>
+                </a:tc>
+              </a:tr>
+              <a:tr h="250256">
+                <a:tc>
+                  <a:txBody>
+                    <a:bodyPr/>
+                    <a:lstStyle/>
+                    <a:p>
+                      <a:pPr algn="l"/>
+                      <a:r>
+                        <a:rPr sz="850">
+                          <a:solidFill>
+                            <a:srgbClr val="4A5560"/>
+                          </a:solidFill>
+                          <a:latin typeface="Arial"/>
+                        </a:rPr>
+                        <a:t>6</a:t>
+                      </a:r>
+                    </a:p>
+                  </a:txBody>
+                  <a:tcPr anchor="ctr">
+                    <a:solidFill>
+                      <a:srgbClr val="FFFFFF"/>
+                    </a:solidFill>
+                  </a:tcPr>
+                </a:tc>
+                <a:tc>
+                  <a:txBody>
+                    <a:bodyPr/>
+                    <a:lstStyle/>
+                    <a:p>
+                      <a:pPr algn="l"/>
+                      <a:r>
+                        <a:rPr sz="850" b="1">
+                          <a:solidFill>
+                            <a:srgbClr val="16202B"/>
+                          </a:solidFill>
+                          <a:latin typeface="Arial"/>
+                        </a:rPr>
+                        <a:t>Хуулийн этгээдийн бүртгэл (2.3.3)</a:t>
+                      </a:r>
+                    </a:p>
+                  </a:txBody>
+                  <a:tcPr anchor="ctr">
+                    <a:solidFill>
+                      <a:srgbClr val="FFFFFF"/>
+                    </a:solidFill>
+                  </a:tcPr>
+                </a:tc>
+                <a:tc>
+                  <a:txBody>
+                    <a:bodyPr/>
+                    <a:lstStyle/>
+                    <a:p>
+                      <a:pPr algn="l"/>
+                      <a:r>
+                        <a:rPr sz="850">
+                          <a:solidFill>
+                            <a:srgbClr val="4A5560"/>
+                          </a:solidFill>
+                          <a:latin typeface="Arial"/>
+                        </a:rPr>
+                        <a:t>Регистр, нэр, хаяг — эзэмшигч, төлөөлөгчийг баталгаажуулах</a:t>
+                      </a:r>
+                    </a:p>
+                  </a:txBody>
+                  <a:tcPr anchor="ctr">
+                    <a:solidFill>
+                      <a:srgbClr val="FFFFFF"/>
+                    </a:solidFill>
+                  </a:tcPr>
+                </a:tc>
+              </a:tr>
+              <a:tr h="250256">
+                <a:tc>
+                  <a:txBody>
+                    <a:bodyPr/>
+                    <a:lstStyle/>
+                    <a:p>
+                      <a:pPr algn="l"/>
+                      <a:r>
+                        <a:rPr sz="850">
+                          <a:solidFill>
+                            <a:srgbClr val="4A5560"/>
+                          </a:solidFill>
+                          <a:latin typeface="Arial"/>
+                        </a:rPr>
+                        <a:t>7</a:t>
+                      </a:r>
+                    </a:p>
+                  </a:txBody>
+                  <a:tcPr anchor="ctr">
+                    <a:solidFill>
+                      <a:srgbClr val="F0F4F8"/>
+                    </a:solidFill>
+                  </a:tcPr>
+                </a:tc>
+                <a:tc>
+                  <a:txBody>
+                    <a:bodyPr/>
+                    <a:lstStyle/>
+                    <a:p>
+                      <a:pPr algn="l"/>
+                      <a:r>
+                        <a:rPr sz="850" b="1">
+                          <a:solidFill>
+                            <a:srgbClr val="16202B"/>
+                          </a:solidFill>
+                          <a:latin typeface="Arial"/>
+                        </a:rPr>
+                        <a:t>Үнэлгээний байгууллага (2.3.4)</a:t>
+                      </a:r>
+                    </a:p>
+                  </a:txBody>
+                  <a:tcPr anchor="ctr">
+                    <a:solidFill>
+                      <a:srgbClr val="F0F4F8"/>
+                    </a:solidFill>
+                  </a:tcPr>
+                </a:tc>
+                <a:tc>
+                  <a:txBody>
+                    <a:bodyPr/>
+                    <a:lstStyle/>
+                    <a:p>
+                      <a:pPr algn="l"/>
+                      <a:r>
+                        <a:rPr sz="850">
+                          <a:solidFill>
+                            <a:srgbClr val="4A5560"/>
+                          </a:solidFill>
+                          <a:latin typeface="Arial"/>
+                        </a:rPr>
+                        <a:t>Тусгай зөвшөөрөлтэй байгууллагын жагсаалт, лицензийн хугацаа</a:t>
+                      </a:r>
+                    </a:p>
+                  </a:txBody>
+                  <a:tcPr anchor="ctr">
+                    <a:solidFill>
+                      <a:srgbClr val="F0F4F8"/>
+                    </a:solidFill>
+                  </a:tcPr>
+                </a:tc>
+              </a:tr>
+              <a:tr h="250256">
+                <a:tc gridSpan="3">
+                  <a:txBody>
+                    <a:bodyPr/>
+                    <a:lstStyle/>
+                    <a:p>
+                      <a:pPr algn="l"/>
+                      <a:r>
+                        <a:rPr sz="950" b="1">
+                          <a:solidFill>
+                            <a:srgbClr val="0E2440"/>
+                          </a:solidFill>
+                          <a:latin typeface="Arial"/>
+                        </a:rPr>
+                        <a:t>Б. ЖИЛИЙН ТӨЛӨВЛӨГӨӨНИЙ ДАВХАРГААС ТАТАХ (3)</a:t>
+                      </a:r>
+                    </a:p>
+                  </a:txBody>
+                  <a:tcPr anchor="ctr">
+                    <a:solidFill>
+                      <a:srgbClr val="E0F7F8"/>
+                    </a:solidFill>
+                  </a:tcPr>
+                </a:tc>
+                <a:tc hMerge="1">
+                  <a:txBody>
+                    <a:bodyPr/>
+                    <a:lstStyle/>
+                    <a:p>
+                      <a:pPr algn="ctr"/>
+                    </a:p>
+                  </a:txBody>
+                  <a:tcPr anchor="ctr">
+                    <a:solidFill>
+                      <a:srgbClr val="FFFFFF"/>
+                    </a:solidFill>
+                  </a:tcPr>
+                </a:tc>
+                <a:tc hMerge="1">
+                  <a:txBody>
+                    <a:bodyPr/>
+                    <a:lstStyle/>
+                    <a:p>
+                      <a:pPr algn="ctr"/>
+                    </a:p>
+                  </a:txBody>
+                  <a:tcPr anchor="ctr">
+                    <a:solidFill>
+                      <a:srgbClr val="FFFFFF"/>
+                    </a:solidFill>
+                  </a:tcPr>
+                </a:tc>
+              </a:tr>
+              <a:tr h="250256">
+                <a:tc>
+                  <a:txBody>
+                    <a:bodyPr/>
+                    <a:lstStyle/>
+                    <a:p>
+                      <a:pPr algn="l"/>
+                      <a:r>
+                        <a:rPr sz="850">
+                          <a:solidFill>
+                            <a:srgbClr val="4A5560"/>
+                          </a:solidFill>
+                          <a:latin typeface="Arial"/>
+                        </a:rPr>
+                        <a:t>8</a:t>
+                      </a:r>
+                    </a:p>
+                  </a:txBody>
+                  <a:tcPr anchor="ctr">
+                    <a:solidFill>
+                      <a:srgbClr val="F0F4F8"/>
+                    </a:solidFill>
+                  </a:tcPr>
+                </a:tc>
+                <a:tc>
+                  <a:txBody>
+                    <a:bodyPr/>
+                    <a:lstStyle/>
+                    <a:p>
+                      <a:pPr algn="l"/>
+                      <a:r>
+                        <a:rPr sz="850" b="1">
+                          <a:solidFill>
+                            <a:srgbClr val="16202B"/>
+                          </a:solidFill>
+                          <a:latin typeface="Arial"/>
+                        </a:rPr>
+                        <a:t>Гэр хорооллын чөлөөлөлт (2.2.1.1)</a:t>
+                      </a:r>
+                    </a:p>
+                  </a:txBody>
+                  <a:tcPr anchor="ctr">
+                    <a:solidFill>
+                      <a:srgbClr val="F0F4F8"/>
+                    </a:solidFill>
+                  </a:tcPr>
+                </a:tc>
+                <a:tc>
+                  <a:txBody>
+                    <a:bodyPr/>
+                    <a:lstStyle/>
+                    <a:p>
+                      <a:pPr algn="l"/>
+                      <a:r>
+                        <a:rPr sz="850">
+                          <a:solidFill>
+                            <a:srgbClr val="4A5560"/>
+                          </a:solidFill>
+                          <a:latin typeface="Arial"/>
+                        </a:rPr>
+                        <a:t>Зөвшилцсөн давхаргаас ангиллын хил, талбай татаж чөлөөлөлт автоматаар үүсгэх</a:t>
+                      </a:r>
+                    </a:p>
+                  </a:txBody>
+                  <a:tcPr anchor="ctr">
+                    <a:solidFill>
+                      <a:srgbClr val="F0F4F8"/>
+                    </a:solidFill>
+                  </a:tcPr>
+                </a:tc>
+              </a:tr>
+              <a:tr h="250256">
+                <a:tc>
+                  <a:txBody>
+                    <a:bodyPr/>
+                    <a:lstStyle/>
+                    <a:p>
+                      <a:pPr algn="l"/>
+                      <a:r>
+                        <a:rPr sz="850">
+                          <a:solidFill>
+                            <a:srgbClr val="4A5560"/>
+                          </a:solidFill>
+                          <a:latin typeface="Arial"/>
+                        </a:rPr>
+                        <a:t>9</a:t>
+                      </a:r>
+                    </a:p>
+                  </a:txBody>
+                  <a:tcPr anchor="ctr">
+                    <a:solidFill>
+                      <a:srgbClr val="FFFFFF"/>
+                    </a:solidFill>
+                  </a:tcPr>
+                </a:tc>
+                <a:tc>
+                  <a:txBody>
+                    <a:bodyPr/>
+                    <a:lstStyle/>
+                    <a:p>
+                      <a:pPr algn="l"/>
+                      <a:r>
+                        <a:rPr sz="850" b="1">
+                          <a:solidFill>
+                            <a:srgbClr val="16202B"/>
+                          </a:solidFill>
+                          <a:latin typeface="Arial"/>
+                        </a:rPr>
+                        <a:t>Авто зам, шугам сүлжээ (2.2.1.2)</a:t>
+                      </a:r>
+                    </a:p>
+                  </a:txBody>
+                  <a:tcPr anchor="ctr">
+                    <a:solidFill>
+                      <a:srgbClr val="FFFFFF"/>
+                    </a:solidFill>
+                  </a:tcPr>
+                </a:tc>
+                <a:tc>
+                  <a:txBody>
+                    <a:bodyPr/>
+                    <a:lstStyle/>
+                    <a:p>
+                      <a:pPr algn="l"/>
+                      <a:r>
+                        <a:rPr sz="850">
+                          <a:solidFill>
+                            <a:srgbClr val="4A5560"/>
+                          </a:solidFill>
+                          <a:latin typeface="Arial"/>
+                        </a:rPr>
+                        <a:t>Мөн давхаргаас зам, трассын ангиллын хилийг татах</a:t>
+                      </a:r>
+                    </a:p>
+                  </a:txBody>
+                  <a:tcPr anchor="ctr">
+                    <a:solidFill>
+                      <a:srgbClr val="FFFFFF"/>
+                    </a:solidFill>
+                  </a:tcPr>
+                </a:tc>
+              </a:tr>
+              <a:tr h="250256">
+                <a:tc>
+                  <a:txBody>
+                    <a:bodyPr/>
+                    <a:lstStyle/>
+                    <a:p>
+                      <a:pPr algn="l"/>
+                      <a:r>
+                        <a:rPr sz="850">
+                          <a:solidFill>
+                            <a:srgbClr val="4A5560"/>
+                          </a:solidFill>
+                          <a:latin typeface="Arial"/>
+                        </a:rPr>
+                        <a:t>10</a:t>
+                      </a:r>
+                    </a:p>
+                  </a:txBody>
+                  <a:tcPr anchor="ctr">
+                    <a:solidFill>
+                      <a:srgbClr val="F0F4F8"/>
+                    </a:solidFill>
+                  </a:tcPr>
+                </a:tc>
+                <a:tc>
+                  <a:txBody>
+                    <a:bodyPr/>
+                    <a:lstStyle/>
+                    <a:p>
+                      <a:pPr algn="l"/>
+                      <a:r>
+                        <a:rPr sz="850" b="1">
+                          <a:solidFill>
+                            <a:srgbClr val="16202B"/>
+                          </a:solidFill>
+                          <a:latin typeface="Arial"/>
+                        </a:rPr>
+                        <a:t>Нийгмийн дэд бүтэц (2.2.1.3)</a:t>
+                      </a:r>
+                    </a:p>
+                  </a:txBody>
+                  <a:tcPr anchor="ctr">
+                    <a:solidFill>
+                      <a:srgbClr val="F0F4F8"/>
+                    </a:solidFill>
+                  </a:tcPr>
+                </a:tc>
+                <a:tc>
+                  <a:txBody>
+                    <a:bodyPr/>
+                    <a:lstStyle/>
+                    <a:p>
+                      <a:pPr algn="l"/>
+                      <a:r>
+                        <a:rPr sz="850">
+                          <a:solidFill>
+                            <a:srgbClr val="4A5560"/>
+                          </a:solidFill>
+                          <a:latin typeface="Arial"/>
+                        </a:rPr>
+                        <a:t>Сургууль, эмнэлэг зэрэг ангиллын хилийг татах</a:t>
+                      </a:r>
+                    </a:p>
+                  </a:txBody>
+                  <a:tcPr anchor="ctr">
+                    <a:solidFill>
+                      <a:srgbClr val="F0F4F8"/>
+                    </a:solidFill>
+                  </a:tcPr>
+                </a:tc>
+              </a:tr>
+              <a:tr h="250256">
+                <a:tc gridSpan="3">
+                  <a:txBody>
+                    <a:bodyPr/>
+                    <a:lstStyle/>
+                    <a:p>
+                      <a:pPr algn="l"/>
+                      <a:r>
+                        <a:rPr sz="950" b="1">
+                          <a:solidFill>
+                            <a:srgbClr val="0E2440"/>
+                          </a:solidFill>
+                          <a:latin typeface="Arial"/>
+                        </a:rPr>
+                        <a:t>В. ГУС-ИЙН БҮРЭЛДЭХҮҮН СИСТЕМҮҮД (5)</a:t>
+                      </a:r>
+                    </a:p>
+                  </a:txBody>
+                  <a:tcPr anchor="ctr">
+                    <a:solidFill>
+                      <a:srgbClr val="E0F7F8"/>
+                    </a:solidFill>
+                  </a:tcPr>
+                </a:tc>
+                <a:tc hMerge="1">
+                  <a:txBody>
+                    <a:bodyPr/>
+                    <a:lstStyle/>
+                    <a:p>
+                      <a:pPr algn="ctr"/>
+                    </a:p>
+                  </a:txBody>
+                  <a:tcPr anchor="ctr">
+                    <a:solidFill>
+                      <a:srgbClr val="FFFFFF"/>
+                    </a:solidFill>
+                  </a:tcPr>
+                </a:tc>
+                <a:tc hMerge="1">
+                  <a:txBody>
+                    <a:bodyPr/>
+                    <a:lstStyle/>
+                    <a:p>
+                      <a:pPr algn="ctr"/>
+                    </a:p>
+                  </a:txBody>
+                  <a:tcPr anchor="ctr">
+                    <a:solidFill>
+                      <a:srgbClr val="FFFFFF"/>
+                    </a:solidFill>
+                  </a:tcPr>
+                </a:tc>
+              </a:tr>
+              <a:tr h="250256">
+                <a:tc>
+                  <a:txBody>
+                    <a:bodyPr/>
+                    <a:lstStyle/>
+                    <a:p>
+                      <a:pPr algn="l"/>
+                      <a:r>
+                        <a:rPr sz="850">
+                          <a:solidFill>
+                            <a:srgbClr val="4A5560"/>
+                          </a:solidFill>
+                          <a:latin typeface="Arial"/>
+                        </a:rPr>
+                        <a:t>11</a:t>
+                      </a:r>
+                    </a:p>
+                  </a:txBody>
+                  <a:tcPr anchor="ctr">
+                    <a:solidFill>
+                      <a:srgbClr val="F0F4F8"/>
+                    </a:solidFill>
+                  </a:tcPr>
+                </a:tc>
+                <a:tc>
+                  <a:txBody>
+                    <a:bodyPr/>
+                    <a:lstStyle/>
+                    <a:p>
+                      <a:pPr algn="l"/>
+                      <a:r>
+                        <a:rPr sz="850" b="1">
+                          <a:solidFill>
+                            <a:srgbClr val="16202B"/>
+                          </a:solidFill>
+                          <a:latin typeface="Arial"/>
+                        </a:rPr>
+                        <a:t>ГЗБ, хот төлөвлөлтийн цахим (2.3.1)</a:t>
+                      </a:r>
+                    </a:p>
+                  </a:txBody>
+                  <a:tcPr anchor="ctr">
+                    <a:solidFill>
+                      <a:srgbClr val="F0F4F8"/>
+                    </a:solidFill>
+                  </a:tcPr>
+                </a:tc>
+                <a:tc>
+                  <a:txBody>
+                    <a:bodyPr/>
+                    <a:lstStyle/>
+                    <a:p>
+                      <a:pPr algn="l"/>
+                      <a:r>
+                        <a:rPr sz="850">
+                          <a:solidFill>
+                            <a:srgbClr val="4A5560"/>
+                          </a:solidFill>
+                          <a:latin typeface="Arial"/>
+                        </a:rPr>
+                        <a:t>Бүсчлэл, хориглолт-хязгаарлалт — талбарын өөрчлөлтийг ЕТ-тэй хянах</a:t>
+                      </a:r>
+                    </a:p>
+                  </a:txBody>
+                  <a:tcPr anchor="ctr">
+                    <a:solidFill>
+                      <a:srgbClr val="F0F4F8"/>
+                    </a:solidFill>
+                  </a:tcPr>
+                </a:tc>
+              </a:tr>
+              <a:tr h="250256">
+                <a:tc>
+                  <a:txBody>
+                    <a:bodyPr/>
+                    <a:lstStyle/>
+                    <a:p>
+                      <a:pPr algn="l"/>
+                      <a:r>
+                        <a:rPr sz="850">
+                          <a:solidFill>
+                            <a:srgbClr val="4A5560"/>
+                          </a:solidFill>
+                          <a:latin typeface="Arial"/>
+                        </a:rPr>
+                        <a:t>12</a:t>
+                      </a:r>
+                    </a:p>
+                  </a:txBody>
+                  <a:tcPr anchor="ctr">
+                    <a:solidFill>
+                      <a:srgbClr val="FFFFFF"/>
+                    </a:solidFill>
+                  </a:tcPr>
+                </a:tc>
+                <a:tc>
+                  <a:txBody>
+                    <a:bodyPr/>
+                    <a:lstStyle/>
+                    <a:p>
+                      <a:pPr algn="l"/>
+                      <a:r>
+                        <a:rPr sz="850" b="1">
+                          <a:solidFill>
+                            <a:srgbClr val="16202B"/>
+                          </a:solidFill>
+                          <a:latin typeface="Arial"/>
+                        </a:rPr>
+                        <a:t>Газрын кадастр (2.3.2)</a:t>
+                      </a:r>
+                    </a:p>
+                  </a:txBody>
+                  <a:tcPr anchor="ctr">
+                    <a:solidFill>
+                      <a:srgbClr val="FFFFFF"/>
+                    </a:solidFill>
+                  </a:tcPr>
+                </a:tc>
+                <a:tc>
+                  <a:txBody>
+                    <a:bodyPr/>
+                    <a:lstStyle/>
+                    <a:p>
+                      <a:pPr algn="l"/>
+                      <a:r>
+                        <a:rPr sz="850">
+                          <a:solidFill>
+                            <a:srgbClr val="4A5560"/>
+                          </a:solidFill>
+                          <a:latin typeface="Arial"/>
+                        </a:rPr>
+                        <a:t>Хил, эзэмшигч, гэрчилгээ — «Мэдээлэл дуудах» синхрончлолын эх сурвалж</a:t>
+                      </a:r>
+                    </a:p>
+                  </a:txBody>
+                  <a:tcPr anchor="ctr">
+                    <a:solidFill>
+                      <a:srgbClr val="FFFFFF"/>
+                    </a:solidFill>
+                  </a:tcPr>
+                </a:tc>
+              </a:tr>
+              <a:tr h="250256">
+                <a:tc>
+                  <a:txBody>
+                    <a:bodyPr/>
+                    <a:lstStyle/>
+                    <a:p>
+                      <a:pPr algn="l"/>
+                      <a:r>
+                        <a:rPr sz="850">
+                          <a:solidFill>
+                            <a:srgbClr val="4A5560"/>
+                          </a:solidFill>
+                          <a:latin typeface="Arial"/>
+                        </a:rPr>
+                        <a:t>13</a:t>
+                      </a:r>
+                    </a:p>
+                  </a:txBody>
+                  <a:tcPr anchor="ctr">
+                    <a:solidFill>
+                      <a:srgbClr val="F0F4F8"/>
+                    </a:solidFill>
+                  </a:tcPr>
+                </a:tc>
+                <a:tc>
+                  <a:txBody>
+                    <a:bodyPr/>
+                    <a:lstStyle/>
+                    <a:p>
+                      <a:pPr algn="l"/>
+                      <a:r>
+                        <a:rPr sz="850" b="1">
+                          <a:solidFill>
+                            <a:srgbClr val="16202B"/>
+                          </a:solidFill>
+                          <a:latin typeface="Arial"/>
+                        </a:rPr>
+                        <a:t>Газрын үнэлгээ (2.3.3)</a:t>
+                      </a:r>
+                    </a:p>
+                  </a:txBody>
+                  <a:tcPr anchor="ctr">
+                    <a:solidFill>
+                      <a:srgbClr val="F0F4F8"/>
+                    </a:solidFill>
+                  </a:tcPr>
+                </a:tc>
+                <a:tc>
+                  <a:txBody>
+                    <a:bodyPr/>
+                    <a:lstStyle/>
+                    <a:p>
+                      <a:pPr algn="l"/>
+                      <a:r>
+                        <a:rPr sz="850">
+                          <a:solidFill>
+                            <a:srgbClr val="4A5560"/>
+                          </a:solidFill>
+                          <a:latin typeface="Arial"/>
+                        </a:rPr>
+                        <a:t>Үнэлгээний бүс, суурь үнэ, итгэлцүүр — олговрын тооцооллын суурь</a:t>
+                      </a:r>
+                    </a:p>
+                  </a:txBody>
+                  <a:tcPr anchor="ctr">
+                    <a:solidFill>
+                      <a:srgbClr val="F0F4F8"/>
+                    </a:solidFill>
+                  </a:tcPr>
+                </a:tc>
+              </a:tr>
+              <a:tr h="250256">
+                <a:tc>
+                  <a:txBody>
+                    <a:bodyPr/>
+                    <a:lstStyle/>
+                    <a:p>
+                      <a:pPr algn="l"/>
+                      <a:r>
+                        <a:rPr sz="850">
+                          <a:solidFill>
+                            <a:srgbClr val="4A5560"/>
+                          </a:solidFill>
+                          <a:latin typeface="Arial"/>
+                        </a:rPr>
+                        <a:t>14</a:t>
+                      </a:r>
+                    </a:p>
+                  </a:txBody>
+                  <a:tcPr anchor="ctr">
+                    <a:solidFill>
+                      <a:srgbClr val="FFFFFF"/>
+                    </a:solidFill>
+                  </a:tcPr>
+                </a:tc>
+                <a:tc>
+                  <a:txBody>
+                    <a:bodyPr/>
+                    <a:lstStyle/>
+                    <a:p>
+                      <a:pPr algn="l"/>
+                      <a:r>
+                        <a:rPr sz="850" b="1">
+                          <a:solidFill>
+                            <a:srgbClr val="16202B"/>
+                          </a:solidFill>
+                          <a:latin typeface="Arial"/>
+                        </a:rPr>
+                        <a:t>Хот байгуулалтын кадастр (2.3.4)</a:t>
+                      </a:r>
+                    </a:p>
+                  </a:txBody>
+                  <a:tcPr anchor="ctr">
+                    <a:solidFill>
+                      <a:srgbClr val="FFFFFF"/>
+                    </a:solidFill>
+                  </a:tcPr>
+                </a:tc>
+                <a:tc>
+                  <a:txBody>
+                    <a:bodyPr/>
+                    <a:lstStyle/>
+                    <a:p>
+                      <a:pPr algn="l"/>
+                      <a:r>
+                        <a:rPr sz="850">
+                          <a:solidFill>
+                            <a:srgbClr val="4A5560"/>
+                          </a:solidFill>
+                          <a:latin typeface="Arial"/>
+                        </a:rPr>
+                        <a:t>Барилга байгууламжийн бүртгэл, хил, зориулалт</a:t>
+                      </a:r>
+                    </a:p>
+                  </a:txBody>
+                  <a:tcPr anchor="ctr">
+                    <a:solidFill>
+                      <a:srgbClr val="FFFFFF"/>
+                    </a:solidFill>
+                  </a:tcPr>
+                </a:tc>
+              </a:tr>
+              <a:tr h="250272">
+                <a:tc>
+                  <a:txBody>
+                    <a:bodyPr/>
+                    <a:lstStyle/>
+                    <a:p>
+                      <a:pPr algn="l"/>
+                      <a:r>
+                        <a:rPr sz="850">
+                          <a:solidFill>
+                            <a:srgbClr val="4A5560"/>
+                          </a:solidFill>
+                          <a:latin typeface="Arial"/>
+                        </a:rPr>
+                        <a:t>15</a:t>
+                      </a:r>
+                    </a:p>
+                  </a:txBody>
+                  <a:tcPr anchor="ctr">
+                    <a:solidFill>
+                      <a:srgbClr val="F0F4F8"/>
+                    </a:solidFill>
+                  </a:tcPr>
+                </a:tc>
+                <a:tc>
+                  <a:txBody>
+                    <a:bodyPr/>
+                    <a:lstStyle/>
+                    <a:p>
+                      <a:pPr algn="l"/>
+                      <a:r>
+                        <a:rPr sz="850" b="1">
+                          <a:solidFill>
+                            <a:srgbClr val="16202B"/>
+                          </a:solidFill>
+                          <a:latin typeface="Arial"/>
+                        </a:rPr>
+                        <a:t>Газрын мониторинг (2.3.5)</a:t>
+                      </a:r>
+                    </a:p>
+                  </a:txBody>
+                  <a:tcPr anchor="ctr">
+                    <a:solidFill>
+                      <a:srgbClr val="F0F4F8"/>
+                    </a:solidFill>
+                  </a:tcPr>
+                </a:tc>
+                <a:tc>
+                  <a:txBody>
+                    <a:bodyPr/>
+                    <a:lstStyle/>
+                    <a:p>
+                      <a:pPr algn="l"/>
+                      <a:r>
+                        <a:rPr sz="850">
+                          <a:solidFill>
+                            <a:srgbClr val="4A5560"/>
+                          </a:solidFill>
+                          <a:latin typeface="Arial"/>
+                        </a:rPr>
+                        <a:t>Газрын төлөв байдал, ашиглалтын хяналтын дүн</a:t>
+                      </a:r>
+                    </a:p>
+                  </a:txBody>
+                  <a:tcPr anchor="ctr">
+                    <a:solidFill>
+                      <a:srgbClr val="F0F4F8"/>
+                    </a:solidFill>
+                  </a:tcPr>
+                </a:tc>
+              </a:tr>
+            </a:tbl>
+          </a:graphicData>
+        </a:graphic>
+      </p:graphicFrame>
     </p:spTree>
   </p:cSld>
   <p:clrMapOvr>
@@ -23103,7 +23752,7 @@
                 </a:solidFill>
                 <a:latin typeface="Arial"/>
               </a:rPr>
-              <a:t>13</a:t>
+              <a:t>12.1б</a:t>
             </a:r>
           </a:p>
         </p:txBody>
@@ -23142,7 +23791,23 @@
                 </a:solidFill>
                 <a:latin typeface="Arial"/>
               </a:rPr>
-              <a:t>Нэгдсэн дүгнэлт — үр дүн ба давуу тал</a:t>
+              <a:t>ГУС-ийн холболтоор хийгдэх ажлууд — Г, Д, Е, Ж бүлэг (12)</a:t>
+            </a:r>
+          </a:p>
+          <a:p>
+            <a:pPr algn="l">
+              <a:spcAft>
+                <a:spcPts val="400"/>
+              </a:spcAft>
+            </a:pPr>
+            <a:r>
+              <a:rPr sz="1200" b="0">
+                <a:solidFill>
+                  <a:srgbClr val="4A5560"/>
+                </a:solidFill>
+                <a:latin typeface="Arial"/>
+              </a:rPr>
+              <a:t>Ажил тус бүрд ямар мэдээллийг хаанаас холбохыг тодорхойлов</a:t>
             </a:r>
           </a:p>
         </p:txBody>
@@ -23357,518 +24022,1168 @@
           </a:p>
         </p:txBody>
       </p:sp>
-      <p:sp>
-        <p:nvSpPr>
-          <p:cNvPr id="10" name="Rounded Rectangle 9"/>
-          <p:cNvSpPr/>
-          <p:nvPr/>
-        </p:nvSpPr>
-        <p:spPr>
-          <a:xfrm>
-            <a:off x="502920" y="1481328"/>
-            <a:ext cx="5486400" cy="4709160"/>
-          </a:xfrm>
-          <a:prstGeom prst="roundRect">
-            <a:avLst>
-              <a:gd name="adj" fmla="val 4000"/>
-            </a:avLst>
-          </a:prstGeom>
-          <a:solidFill>
-            <a:srgbClr val="FFFFFF"/>
-          </a:solidFill>
-          <a:ln w="9525">
-            <a:solidFill>
-              <a:srgbClr val="DDE3E9"/>
-            </a:solidFill>
-          </a:ln>
-          <a:effectLst/>
-        </p:spPr>
-        <p:style>
-          <a:lnRef idx="1">
-            <a:schemeClr val="accent1"/>
-          </a:lnRef>
-          <a:fillRef idx="3">
-            <a:schemeClr val="accent1"/>
-          </a:fillRef>
-          <a:effectRef idx="2">
-            <a:schemeClr val="accent1"/>
-          </a:effectRef>
-          <a:fontRef idx="minor">
-            <a:schemeClr val="lt1"/>
-          </a:fontRef>
-        </p:style>
-        <p:txBody>
-          <a:bodyPr rtlCol="0" anchor="ctr"/>
-          <a:lstStyle/>
-          <a:p>
-            <a:pPr algn="ctr"/>
-          </a:p>
-        </p:txBody>
-      </p:sp>
-      <p:sp>
-        <p:nvSpPr>
-          <p:cNvPr id="11" name="Rectangle 10"/>
-          <p:cNvSpPr/>
-          <p:nvPr/>
-        </p:nvSpPr>
-        <p:spPr>
-          <a:xfrm>
-            <a:off x="502920" y="1481328"/>
-            <a:ext cx="5486400" cy="50800"/>
-          </a:xfrm>
-          <a:prstGeom prst="rect">
-            <a:avLst/>
-          </a:prstGeom>
-          <a:solidFill>
-            <a:srgbClr val="2A78D6"/>
-          </a:solidFill>
-          <a:ln>
-            <a:noFill/>
-          </a:ln>
-          <a:effectLst/>
-        </p:spPr>
-        <p:style>
-          <a:lnRef idx="1">
-            <a:schemeClr val="accent1"/>
-          </a:lnRef>
-          <a:fillRef idx="3">
-            <a:schemeClr val="accent1"/>
-          </a:fillRef>
-          <a:effectRef idx="2">
-            <a:schemeClr val="accent1"/>
-          </a:effectRef>
-          <a:fontRef idx="minor">
-            <a:schemeClr val="lt1"/>
-          </a:fontRef>
-        </p:style>
-        <p:txBody>
-          <a:bodyPr rtlCol="0" anchor="ctr"/>
-          <a:lstStyle/>
-          <a:p>
-            <a:pPr algn="ctr"/>
-          </a:p>
-        </p:txBody>
-      </p:sp>
-      <p:sp>
-        <p:nvSpPr>
-          <p:cNvPr id="12" name="TextBox 11"/>
-          <p:cNvSpPr txBox="1"/>
-          <p:nvPr/>
-        </p:nvSpPr>
-        <p:spPr>
-          <a:xfrm>
-            <a:off x="749808" y="1664208"/>
-            <a:ext cx="5029200" cy="4389120"/>
-          </a:xfrm>
-          <a:prstGeom prst="rect">
-            <a:avLst/>
-          </a:prstGeom>
-          <a:noFill/>
-        </p:spPr>
-        <p:txBody>
-          <a:bodyPr wrap="square">
-            <a:spAutoFit/>
-          </a:bodyPr>
-          <a:lstStyle/>
-          <a:p>
-            <a:pPr algn="l">
-              <a:spcAft>
-                <a:spcPts val="1500"/>
-              </a:spcAft>
-            </a:pPr>
-            <a:r>
-              <a:rPr sz="1150" b="1">
-                <a:solidFill>
-                  <a:srgbClr val="2A78D6"/>
-                </a:solidFill>
-                <a:latin typeface="Arial"/>
-              </a:rPr>
-              <a:t>СИСТЕМ ХИЙГДСЭНЭЭР ГАРСАН ҮР ДҮН</a:t>
-            </a:r>
-          </a:p>
-          <a:p>
-            <a:pPr algn="l">
-              <a:spcAft>
-                <a:spcPts val="1300"/>
-              </a:spcAft>
-            </a:pPr>
-            <a:r>
-              <a:rPr sz="1300" b="1">
-                <a:solidFill>
-                  <a:srgbClr val="2A78D6"/>
-                </a:solidFill>
-                <a:latin typeface="Arial"/>
-              </a:rPr>
-              <a:t>▪ </a:t>
-            </a:r>
-            <a:r>
-              <a:rPr sz="1300">
-                <a:solidFill>
-                  <a:srgbClr val="4A5560"/>
-                </a:solidFill>
-                <a:latin typeface="Arial"/>
-              </a:rPr>
-              <a:t>Бүх үе шат цаасан бус, нэгдсэн цахим урсгалд шилжсэн</a:t>
-            </a:r>
-          </a:p>
-          <a:p>
-            <a:pPr algn="l">
-              <a:spcAft>
-                <a:spcPts val="1300"/>
-              </a:spcAft>
-            </a:pPr>
-            <a:r>
-              <a:rPr sz="1300" b="1">
-                <a:solidFill>
-                  <a:srgbClr val="2A78D6"/>
-                </a:solidFill>
-                <a:latin typeface="Arial"/>
-              </a:rPr>
-              <a:t>▪ </a:t>
-            </a:r>
-            <a:r>
-              <a:rPr sz="1300">
-                <a:solidFill>
-                  <a:srgbClr val="4A5560"/>
-                </a:solidFill>
-                <a:latin typeface="Arial"/>
-              </a:rPr>
-              <a:t>3 бие даасан үнэлгээ зэрэгцээ, workflow-оор баталгааждаг</a:t>
-            </a:r>
-          </a:p>
-          <a:p>
-            <a:pPr algn="l">
-              <a:spcAft>
-                <a:spcPts val="1300"/>
-              </a:spcAft>
-            </a:pPr>
-            <a:r>
-              <a:rPr sz="1300" b="1">
-                <a:solidFill>
-                  <a:srgbClr val="2A78D6"/>
-                </a:solidFill>
-                <a:latin typeface="Arial"/>
-              </a:rPr>
-              <a:t>▪ </a:t>
-            </a:r>
-            <a:r>
-              <a:rPr sz="1300">
-                <a:solidFill>
-                  <a:srgbClr val="4A5560"/>
-                </a:solidFill>
-                <a:latin typeface="Arial"/>
-              </a:rPr>
-              <a:t>Орон зайн тооцоолол автоматжиж, зурган дээр бодит хугацаанд харагдана</a:t>
-            </a:r>
-          </a:p>
-          <a:p>
-            <a:pPr algn="l">
-              <a:spcAft>
-                <a:spcPts val="1300"/>
-              </a:spcAft>
-            </a:pPr>
-            <a:r>
-              <a:rPr sz="1300" b="1">
-                <a:solidFill>
-                  <a:srgbClr val="2A78D6"/>
-                </a:solidFill>
-                <a:latin typeface="Arial"/>
-              </a:rPr>
-              <a:t>▪ </a:t>
-            </a:r>
-            <a:r>
-              <a:rPr sz="1300">
-                <a:solidFill>
-                  <a:srgbClr val="4A5560"/>
-                </a:solidFill>
-                <a:latin typeface="Arial"/>
-              </a:rPr>
-              <a:t>Гадны байгууллагууд тусгаарлагдсан порталтай</a:t>
-            </a:r>
-          </a:p>
-          <a:p>
-            <a:pPr algn="l">
-              <a:spcAft>
-                <a:spcPts val="1300"/>
-              </a:spcAft>
-            </a:pPr>
-            <a:r>
-              <a:rPr sz="1300" b="1">
-                <a:solidFill>
-                  <a:srgbClr val="2A78D6"/>
-                </a:solidFill>
-                <a:latin typeface="Arial"/>
-              </a:rPr>
-              <a:t>▪ </a:t>
-            </a:r>
-            <a:r>
-              <a:rPr sz="1300">
-                <a:solidFill>
-                  <a:srgbClr val="4A5560"/>
-                </a:solidFill>
-                <a:latin typeface="Arial"/>
-              </a:rPr>
-              <a:t>9 төрлийн албан баримт, Excel тайлан автоматаар үүсдэг</a:t>
-            </a:r>
-          </a:p>
-        </p:txBody>
-      </p:sp>
-      <p:sp>
-        <p:nvSpPr>
-          <p:cNvPr id="13" name="Rounded Rectangle 12"/>
-          <p:cNvSpPr/>
-          <p:nvPr/>
-        </p:nvSpPr>
-        <p:spPr>
-          <a:xfrm>
-            <a:off x="6199632" y="1481328"/>
-            <a:ext cx="5486400" cy="4709160"/>
-          </a:xfrm>
-          <a:prstGeom prst="roundRect">
-            <a:avLst>
-              <a:gd name="adj" fmla="val 4000"/>
-            </a:avLst>
-          </a:prstGeom>
-          <a:solidFill>
-            <a:srgbClr val="FFFFFF"/>
-          </a:solidFill>
-          <a:ln w="9525">
-            <a:solidFill>
-              <a:srgbClr val="DDE3E9"/>
-            </a:solidFill>
-          </a:ln>
-          <a:effectLst/>
-        </p:spPr>
-        <p:style>
-          <a:lnRef idx="1">
-            <a:schemeClr val="accent1"/>
-          </a:lnRef>
-          <a:fillRef idx="3">
-            <a:schemeClr val="accent1"/>
-          </a:fillRef>
-          <a:effectRef idx="2">
-            <a:schemeClr val="accent1"/>
-          </a:effectRef>
-          <a:fontRef idx="minor">
-            <a:schemeClr val="lt1"/>
-          </a:fontRef>
-        </p:style>
-        <p:txBody>
-          <a:bodyPr rtlCol="0" anchor="ctr"/>
-          <a:lstStyle/>
-          <a:p>
-            <a:pPr algn="ctr"/>
-          </a:p>
-        </p:txBody>
-      </p:sp>
-      <p:sp>
-        <p:nvSpPr>
-          <p:cNvPr id="14" name="Rectangle 13"/>
-          <p:cNvSpPr/>
-          <p:nvPr/>
-        </p:nvSpPr>
-        <p:spPr>
-          <a:xfrm>
-            <a:off x="6199632" y="1481328"/>
-            <a:ext cx="5486400" cy="50800"/>
-          </a:xfrm>
-          <a:prstGeom prst="rect">
-            <a:avLst/>
-          </a:prstGeom>
-          <a:solidFill>
-            <a:srgbClr val="0E8345"/>
-          </a:solidFill>
-          <a:ln>
-            <a:noFill/>
-          </a:ln>
-          <a:effectLst/>
-        </p:spPr>
-        <p:style>
-          <a:lnRef idx="1">
-            <a:schemeClr val="accent1"/>
-          </a:lnRef>
-          <a:fillRef idx="3">
-            <a:schemeClr val="accent1"/>
-          </a:fillRef>
-          <a:effectRef idx="2">
-            <a:schemeClr val="accent1"/>
-          </a:effectRef>
-          <a:fontRef idx="minor">
-            <a:schemeClr val="lt1"/>
-          </a:fontRef>
-        </p:style>
-        <p:txBody>
-          <a:bodyPr rtlCol="0" anchor="ctr"/>
-          <a:lstStyle/>
-          <a:p>
-            <a:pPr algn="ctr"/>
-          </a:p>
-        </p:txBody>
-      </p:sp>
-      <p:sp>
-        <p:nvSpPr>
-          <p:cNvPr id="15" name="TextBox 14"/>
-          <p:cNvSpPr txBox="1"/>
-          <p:nvPr/>
-        </p:nvSpPr>
-        <p:spPr>
-          <a:xfrm>
-            <a:off x="6446520" y="1664208"/>
-            <a:ext cx="5029200" cy="4389120"/>
-          </a:xfrm>
-          <a:prstGeom prst="rect">
-            <a:avLst/>
-          </a:prstGeom>
-          <a:noFill/>
-        </p:spPr>
-        <p:txBody>
-          <a:bodyPr wrap="square">
-            <a:spAutoFit/>
-          </a:bodyPr>
-          <a:lstStyle/>
-          <a:p>
-            <a:pPr algn="l">
-              <a:spcAft>
-                <a:spcPts val="1500"/>
-              </a:spcAft>
-            </a:pPr>
-            <a:r>
-              <a:rPr sz="1150" b="1">
-                <a:solidFill>
-                  <a:srgbClr val="0E8345"/>
-                </a:solidFill>
-                <a:latin typeface="Arial"/>
-              </a:rPr>
-              <a:t>ДАВУУ ТАЛУУД</a:t>
-            </a:r>
-          </a:p>
-          <a:p>
-            <a:pPr algn="l">
-              <a:spcAft>
-                <a:spcPts val="1300"/>
-              </a:spcAft>
-            </a:pPr>
-            <a:r>
-              <a:rPr sz="1300" b="1">
-                <a:solidFill>
-                  <a:srgbClr val="0E8345"/>
-                </a:solidFill>
-                <a:latin typeface="Arial"/>
-              </a:rPr>
-              <a:t>▪ </a:t>
-            </a:r>
-            <a:r>
-              <a:rPr sz="1300">
-                <a:solidFill>
-                  <a:srgbClr val="4A5560"/>
-                </a:solidFill>
-                <a:latin typeface="Arial"/>
-              </a:rPr>
-              <a:t>Цэвэр давхаргажилт — өргөтгөлд тэсвэртэй, тестлэгдэхүйц</a:t>
-            </a:r>
-          </a:p>
-          <a:p>
-            <a:pPr algn="l">
-              <a:spcAft>
-                <a:spcPts val="1300"/>
-              </a:spcAft>
-            </a:pPr>
-            <a:r>
-              <a:rPr sz="1300" b="1">
-                <a:solidFill>
-                  <a:srgbClr val="0E8345"/>
-                </a:solidFill>
-                <a:latin typeface="Arial"/>
-              </a:rPr>
-              <a:t>▪ </a:t>
-            </a:r>
-            <a:r>
-              <a:rPr sz="1300">
-                <a:solidFill>
-                  <a:srgbClr val="4A5560"/>
-                </a:solidFill>
-                <a:latin typeface="Arial"/>
-              </a:rPr>
-              <a:t>Гүн хамгаалалт — 4 давхар эрхийн шалгалт</a:t>
-            </a:r>
-          </a:p>
-          <a:p>
-            <a:pPr algn="l">
-              <a:spcAft>
-                <a:spcPts val="1300"/>
-              </a:spcAft>
-            </a:pPr>
-            <a:r>
-              <a:rPr sz="1300" b="1">
-                <a:solidFill>
-                  <a:srgbClr val="0E8345"/>
-                </a:solidFill>
-                <a:latin typeface="Arial"/>
-              </a:rPr>
-              <a:t>▪ </a:t>
-            </a:r>
-            <a:r>
-              <a:rPr sz="1300">
-                <a:solidFill>
-                  <a:srgbClr val="4A5560"/>
-                </a:solidFill>
-                <a:latin typeface="Arial"/>
-              </a:rPr>
-              <a:t>Workflow тохиргоогоор — процесс өөрчлөгдөхөд код засалтгүй</a:t>
-            </a:r>
-          </a:p>
-          <a:p>
-            <a:pPr algn="l">
-              <a:spcAft>
-                <a:spcPts val="1300"/>
-              </a:spcAft>
-            </a:pPr>
-            <a:r>
-              <a:rPr sz="1300" b="1">
-                <a:solidFill>
-                  <a:srgbClr val="0E8345"/>
-                </a:solidFill>
-                <a:latin typeface="Arial"/>
-              </a:rPr>
-              <a:t>▪ </a:t>
-            </a:r>
-            <a:r>
-              <a:rPr sz="1300">
-                <a:solidFill>
-                  <a:srgbClr val="4A5560"/>
-                </a:solidFill>
-                <a:latin typeface="Arial"/>
-              </a:rPr>
-              <a:t>Бүрэн аудитын мөр — өөрчлөлт бүр түүхтэй</a:t>
-            </a:r>
-          </a:p>
-          <a:p>
-            <a:pPr algn="l">
-              <a:spcAft>
-                <a:spcPts val="1300"/>
-              </a:spcAft>
-            </a:pPr>
-            <a:r>
-              <a:rPr sz="1300" b="1">
-                <a:solidFill>
-                  <a:srgbClr val="0E8345"/>
-                </a:solidFill>
-                <a:latin typeface="Arial"/>
-              </a:rPr>
-              <a:t>▪ </a:t>
-            </a:r>
-            <a:r>
-              <a:rPr sz="1300">
-                <a:solidFill>
-                  <a:srgbClr val="4A5560"/>
-                </a:solidFill>
-                <a:latin typeface="Arial"/>
-              </a:rPr>
-              <a:t>Нээлттэй эхийн стек — лицензийн зардалгүй</a:t>
-            </a:r>
-          </a:p>
-        </p:txBody>
-      </p:sp>
+      <p:graphicFrame>
+        <p:nvGraphicFramePr>
+          <p:cNvPr id="10" name="Table 9"/>
+          <p:cNvGraphicFramePr>
+            <a:graphicFrameLocks noGrp="1"/>
+          </p:cNvGraphicFramePr>
+          <p:nvPr/>
+        </p:nvGraphicFramePr>
+        <p:xfrm>
+          <a:off x="502920" y="1417320"/>
+          <a:ext cx="11183111" cy="4754880"/>
+        </p:xfrm>
+        <a:graphic>
+          <a:graphicData uri="http://schemas.openxmlformats.org/drawingml/2006/table">
+            <a:tbl>
+              <a:tblPr firstRow="1" bandRow="1">
+                <a:tableStyleId>{5C22544A-7EE6-4342-B048-85BDC9FD1C3A}</a:tableStyleId>
+              </a:tblPr>
+              <a:tblGrid>
+                <a:gridCol w="502920"/>
+                <a:gridCol w="3749039"/>
+                <a:gridCol w="6931152"/>
+              </a:tblGrid>
+              <a:tr h="279698">
+                <a:tc>
+                  <a:txBody>
+                    <a:bodyPr/>
+                    <a:lstStyle/>
+                    <a:p>
+                      <a:pPr algn="l"/>
+                      <a:r>
+                        <a:rPr sz="1000" b="1">
+                          <a:solidFill>
+                            <a:srgbClr val="FFFFFF"/>
+                          </a:solidFill>
+                          <a:latin typeface="Arial"/>
+                        </a:rPr>
+                        <a:t>№</a:t>
+                      </a:r>
+                    </a:p>
+                  </a:txBody>
+                  <a:tcPr anchor="ctr">
+                    <a:solidFill>
+                      <a:srgbClr val="0E2440"/>
+                    </a:solidFill>
+                  </a:tcPr>
+                </a:tc>
+                <a:tc>
+                  <a:txBody>
+                    <a:bodyPr/>
+                    <a:lstStyle/>
+                    <a:p>
+                      <a:pPr algn="ctr"/>
+                      <a:r>
+                        <a:rPr sz="1000" b="1">
+                          <a:solidFill>
+                            <a:srgbClr val="FFFFFF"/>
+                          </a:solidFill>
+                          <a:latin typeface="Arial"/>
+                        </a:rPr>
+                        <a:t>Ажил (дугаар)</a:t>
+                      </a:r>
+                    </a:p>
+                  </a:txBody>
+                  <a:tcPr anchor="ctr">
+                    <a:solidFill>
+                      <a:srgbClr val="0E2440"/>
+                    </a:solidFill>
+                  </a:tcPr>
+                </a:tc>
+                <a:tc>
+                  <a:txBody>
+                    <a:bodyPr/>
+                    <a:lstStyle/>
+                    <a:p>
+                      <a:pPr algn="ctr"/>
+                      <a:r>
+                        <a:rPr sz="1000" b="1">
+                          <a:solidFill>
+                            <a:srgbClr val="FFFFFF"/>
+                          </a:solidFill>
+                          <a:latin typeface="Arial"/>
+                        </a:rPr>
+                        <a:t>Холбох мэдээлэл</a:t>
+                      </a:r>
+                    </a:p>
+                  </a:txBody>
+                  <a:tcPr anchor="ctr">
+                    <a:solidFill>
+                      <a:srgbClr val="0E2440"/>
+                    </a:solidFill>
+                  </a:tcPr>
+                </a:tc>
+              </a:tr>
+              <a:tr h="279698">
+                <a:tc gridSpan="3">
+                  <a:txBody>
+                    <a:bodyPr/>
+                    <a:lstStyle/>
+                    <a:p>
+                      <a:pPr algn="l"/>
+                      <a:r>
+                        <a:rPr sz="950" b="1">
+                          <a:solidFill>
+                            <a:srgbClr val="0E2440"/>
+                          </a:solidFill>
+                          <a:latin typeface="Arial"/>
+                        </a:rPr>
+                        <a:t>Г. КАДАСТРЫН ДАВХЦАЛ, ЗӨРЧЛИЙН ДАВХАРГА (3)</a:t>
+                      </a:r>
+                    </a:p>
+                  </a:txBody>
+                  <a:tcPr anchor="ctr">
+                    <a:solidFill>
+                      <a:srgbClr val="E0F7F8"/>
+                    </a:solidFill>
+                  </a:tcPr>
+                </a:tc>
+                <a:tc hMerge="1">
+                  <a:txBody>
+                    <a:bodyPr/>
+                    <a:lstStyle/>
+                    <a:p>
+                      <a:pPr algn="ctr"/>
+                    </a:p>
+                  </a:txBody>
+                  <a:tcPr anchor="ctr">
+                    <a:solidFill>
+                      <a:srgbClr val="FFFFFF"/>
+                    </a:solidFill>
+                  </a:tcPr>
+                </a:tc>
+                <a:tc hMerge="1">
+                  <a:txBody>
+                    <a:bodyPr/>
+                    <a:lstStyle/>
+                    <a:p>
+                      <a:pPr algn="ctr"/>
+                    </a:p>
+                  </a:txBody>
+                  <a:tcPr anchor="ctr">
+                    <a:solidFill>
+                      <a:srgbClr val="FFFFFF"/>
+                    </a:solidFill>
+                  </a:tcPr>
+                </a:tc>
+              </a:tr>
+              <a:tr h="279698">
+                <a:tc>
+                  <a:txBody>
+                    <a:bodyPr/>
+                    <a:lstStyle/>
+                    <a:p>
+                      <a:pPr algn="l"/>
+                      <a:r>
+                        <a:rPr sz="850">
+                          <a:solidFill>
+                            <a:srgbClr val="4A5560"/>
+                          </a:solidFill>
+                          <a:latin typeface="Arial"/>
+                        </a:rPr>
+                        <a:t>16</a:t>
+                      </a:r>
+                    </a:p>
+                  </a:txBody>
+                  <a:tcPr anchor="ctr">
+                    <a:solidFill>
+                      <a:srgbClr val="F0F4F8"/>
+                    </a:solidFill>
+                  </a:tcPr>
+                </a:tc>
+                <a:tc>
+                  <a:txBody>
+                    <a:bodyPr/>
+                    <a:lstStyle/>
+                    <a:p>
+                      <a:pPr algn="l"/>
+                      <a:r>
+                        <a:rPr sz="850" b="1">
+                          <a:solidFill>
+                            <a:srgbClr val="16202B"/>
+                          </a:solidFill>
+                          <a:latin typeface="Arial"/>
+                        </a:rPr>
+                        <a:t>Зөрчлийн давхарга үүсгэх (2.4.1.1)</a:t>
+                      </a:r>
+                    </a:p>
+                  </a:txBody>
+                  <a:tcPr anchor="ctr">
+                    <a:solidFill>
+                      <a:srgbClr val="F0F4F8"/>
+                    </a:solidFill>
+                  </a:tcPr>
+                </a:tc>
+                <a:tc>
+                  <a:txBody>
+                    <a:bodyPr/>
+                    <a:lstStyle/>
+                    <a:p>
+                      <a:pPr algn="l"/>
+                      <a:r>
+                        <a:rPr sz="850">
+                          <a:solidFill>
+                            <a:srgbClr val="4A5560"/>
+                          </a:solidFill>
+                          <a:latin typeface="Arial"/>
+                        </a:rPr>
+                        <a:t>Кадастрын зургийг чөлөөлөлтийн хилтэй харьцуулж зөрчилтэй талбарыг зурагт харуулах</a:t>
+                      </a:r>
+                    </a:p>
+                  </a:txBody>
+                  <a:tcPr anchor="ctr">
+                    <a:solidFill>
+                      <a:srgbClr val="F0F4F8"/>
+                    </a:solidFill>
+                  </a:tcPr>
+                </a:tc>
+              </a:tr>
+              <a:tr h="279698">
+                <a:tc>
+                  <a:txBody>
+                    <a:bodyPr/>
+                    <a:lstStyle/>
+                    <a:p>
+                      <a:pPr algn="l"/>
+                      <a:r>
+                        <a:rPr sz="850">
+                          <a:solidFill>
+                            <a:srgbClr val="4A5560"/>
+                          </a:solidFill>
+                          <a:latin typeface="Arial"/>
+                        </a:rPr>
+                        <a:t>17</a:t>
+                      </a:r>
+                    </a:p>
+                  </a:txBody>
+                  <a:tcPr anchor="ctr">
+                    <a:solidFill>
+                      <a:srgbClr val="FFFFFF"/>
+                    </a:solidFill>
+                  </a:tcPr>
+                </a:tc>
+                <a:tc>
+                  <a:txBody>
+                    <a:bodyPr/>
+                    <a:lstStyle/>
+                    <a:p>
+                      <a:pPr algn="l"/>
+                      <a:r>
+                        <a:rPr sz="850" b="1">
+                          <a:solidFill>
+                            <a:srgbClr val="16202B"/>
+                          </a:solidFill>
+                          <a:latin typeface="Arial"/>
+                        </a:rPr>
+                        <a:t>Зөрчлийг системд холбох (2.4.1.2)</a:t>
+                      </a:r>
+                    </a:p>
+                  </a:txBody>
+                  <a:tcPr anchor="ctr">
+                    <a:solidFill>
+                      <a:srgbClr val="FFFFFF"/>
+                    </a:solidFill>
+                  </a:tcPr>
+                </a:tc>
+                <a:tc>
+                  <a:txBody>
+                    <a:bodyPr/>
+                    <a:lstStyle/>
+                    <a:p>
+                      <a:pPr algn="l"/>
+                      <a:r>
+                        <a:rPr sz="850">
+                          <a:solidFill>
+                            <a:srgbClr val="4A5560"/>
+                          </a:solidFill>
+                          <a:latin typeface="Arial"/>
+                        </a:rPr>
+                        <a:t>Зөрчил бүрийг нэгж талбарын дэлгэрэнгүйтэй холбох</a:t>
+                      </a:r>
+                    </a:p>
+                  </a:txBody>
+                  <a:tcPr anchor="ctr">
+                    <a:solidFill>
+                      <a:srgbClr val="FFFFFF"/>
+                    </a:solidFill>
+                  </a:tcPr>
+                </a:tc>
+              </a:tr>
+              <a:tr h="279698">
+                <a:tc>
+                  <a:txBody>
+                    <a:bodyPr/>
+                    <a:lstStyle/>
+                    <a:p>
+                      <a:pPr algn="l"/>
+                      <a:r>
+                        <a:rPr sz="850">
+                          <a:solidFill>
+                            <a:srgbClr val="4A5560"/>
+                          </a:solidFill>
+                          <a:latin typeface="Arial"/>
+                        </a:rPr>
+                        <a:t>18</a:t>
+                      </a:r>
+                    </a:p>
+                  </a:txBody>
+                  <a:tcPr anchor="ctr">
+                    <a:solidFill>
+                      <a:srgbClr val="F0F4F8"/>
+                    </a:solidFill>
+                  </a:tcPr>
+                </a:tc>
+                <a:tc>
+                  <a:txBody>
+                    <a:bodyPr/>
+                    <a:lstStyle/>
+                    <a:p>
+                      <a:pPr algn="l"/>
+                      <a:r>
+                        <a:rPr sz="850" b="1">
+                          <a:solidFill>
+                            <a:srgbClr val="16202B"/>
+                          </a:solidFill>
+                          <a:latin typeface="Arial"/>
+                        </a:rPr>
+                        <a:t>Давхцал шалгах хөгжүүлэлт (2.9.1)</a:t>
+                      </a:r>
+                    </a:p>
+                  </a:txBody>
+                  <a:tcPr anchor="ctr">
+                    <a:solidFill>
+                      <a:srgbClr val="F0F4F8"/>
+                    </a:solidFill>
+                  </a:tcPr>
+                </a:tc>
+                <a:tc>
+                  <a:txBody>
+                    <a:bodyPr/>
+                    <a:lstStyle/>
+                    <a:p>
+                      <a:pPr algn="l"/>
+                      <a:r>
+                        <a:rPr sz="850">
+                          <a:solidFill>
+                            <a:srgbClr val="4A5560"/>
+                          </a:solidFill>
+                          <a:latin typeface="Arial"/>
+                        </a:rPr>
+                        <a:t>Кадастрын API + системийн PostGIS тооцооллыг тулгах</a:t>
+                      </a:r>
+                    </a:p>
+                  </a:txBody>
+                  <a:tcPr anchor="ctr">
+                    <a:solidFill>
+                      <a:srgbClr val="F0F4F8"/>
+                    </a:solidFill>
+                  </a:tcPr>
+                </a:tc>
+              </a:tr>
+              <a:tr h="279698">
+                <a:tc gridSpan="3">
+                  <a:txBody>
+                    <a:bodyPr/>
+                    <a:lstStyle/>
+                    <a:p>
+                      <a:pPr algn="l"/>
+                      <a:r>
+                        <a:rPr sz="950" b="1">
+                          <a:solidFill>
+                            <a:srgbClr val="0E2440"/>
+                          </a:solidFill>
+                          <a:latin typeface="Arial"/>
+                        </a:rPr>
+                        <a:t>Д. ЭРХ, ЗАХИРАМЖИЙН УРСГАЛ (2)</a:t>
+                      </a:r>
+                    </a:p>
+                  </a:txBody>
+                  <a:tcPr anchor="ctr">
+                    <a:solidFill>
+                      <a:srgbClr val="E0F7F8"/>
+                    </a:solidFill>
+                  </a:tcPr>
+                </a:tc>
+                <a:tc hMerge="1">
+                  <a:txBody>
+                    <a:bodyPr/>
+                    <a:lstStyle/>
+                    <a:p>
+                      <a:pPr algn="ctr"/>
+                    </a:p>
+                  </a:txBody>
+                  <a:tcPr anchor="ctr">
+                    <a:solidFill>
+                      <a:srgbClr val="FFFFFF"/>
+                    </a:solidFill>
+                  </a:tcPr>
+                </a:tc>
+                <a:tc hMerge="1">
+                  <a:txBody>
+                    <a:bodyPr/>
+                    <a:lstStyle/>
+                    <a:p>
+                      <a:pPr algn="ctr"/>
+                    </a:p>
+                  </a:txBody>
+                  <a:tcPr anchor="ctr">
+                    <a:solidFill>
+                      <a:srgbClr val="FFFFFF"/>
+                    </a:solidFill>
+                  </a:tcPr>
+                </a:tc>
+              </a:tr>
+              <a:tr h="279698">
+                <a:tc>
+                  <a:txBody>
+                    <a:bodyPr/>
+                    <a:lstStyle/>
+                    <a:p>
+                      <a:pPr algn="l"/>
+                      <a:r>
+                        <a:rPr sz="850">
+                          <a:solidFill>
+                            <a:srgbClr val="4A5560"/>
+                          </a:solidFill>
+                          <a:latin typeface="Arial"/>
+                        </a:rPr>
+                        <a:t>19</a:t>
+                      </a:r>
+                    </a:p>
+                  </a:txBody>
+                  <a:tcPr anchor="ctr">
+                    <a:solidFill>
+                      <a:srgbClr val="F0F4F8"/>
+                    </a:solidFill>
+                  </a:tcPr>
+                </a:tc>
+                <a:tc>
+                  <a:txBody>
+                    <a:bodyPr/>
+                    <a:lstStyle/>
+                    <a:p>
+                      <a:pPr algn="l"/>
+                      <a:r>
+                        <a:rPr sz="850" b="1">
+                          <a:solidFill>
+                            <a:srgbClr val="16202B"/>
+                          </a:solidFill>
+                          <a:latin typeface="Arial"/>
+                        </a:rPr>
+                        <a:t>Чиг үүргээр эрх тохируулах (2.4.3.1)</a:t>
+                      </a:r>
+                    </a:p>
+                  </a:txBody>
+                  <a:tcPr anchor="ctr">
+                    <a:solidFill>
+                      <a:srgbClr val="F0F4F8"/>
+                    </a:solidFill>
+                  </a:tcPr>
+                </a:tc>
+                <a:tc>
+                  <a:txBody>
+                    <a:bodyPr/>
+                    <a:lstStyle/>
+                    <a:p>
+                      <a:pPr algn="l"/>
+                      <a:r>
+                        <a:rPr sz="850">
+                          <a:solidFill>
+                            <a:srgbClr val="4A5560"/>
+                          </a:solidFill>
+                          <a:latin typeface="Arial"/>
+                        </a:rPr>
+                        <a:t>ГУС-ийн чиг үүргээс системийн роль/зөвшөөрөлд автоматаар буулгах</a:t>
+                      </a:r>
+                    </a:p>
+                  </a:txBody>
+                  <a:tcPr anchor="ctr">
+                    <a:solidFill>
+                      <a:srgbClr val="F0F4F8"/>
+                    </a:solidFill>
+                  </a:tcPr>
+                </a:tc>
+              </a:tr>
+              <a:tr h="279698">
+                <a:tc>
+                  <a:txBody>
+                    <a:bodyPr/>
+                    <a:lstStyle/>
+                    <a:p>
+                      <a:pPr algn="l"/>
+                      <a:r>
+                        <a:rPr sz="850">
+                          <a:solidFill>
+                            <a:srgbClr val="4A5560"/>
+                          </a:solidFill>
+                          <a:latin typeface="Arial"/>
+                        </a:rPr>
+                        <a:t>20</a:t>
+                      </a:r>
+                    </a:p>
+                  </a:txBody>
+                  <a:tcPr anchor="ctr">
+                    <a:solidFill>
+                      <a:srgbClr val="FFFFFF"/>
+                    </a:solidFill>
+                  </a:tcPr>
+                </a:tc>
+                <a:tc>
+                  <a:txBody>
+                    <a:bodyPr/>
+                    <a:lstStyle/>
+                    <a:p>
+                      <a:pPr algn="l"/>
+                      <a:r>
+                        <a:rPr sz="850" b="1">
+                          <a:solidFill>
+                            <a:srgbClr val="16202B"/>
+                          </a:solidFill>
+                          <a:latin typeface="Arial"/>
+                        </a:rPr>
+                        <a:t>Захирамжийн төсөл (2.4.4.3)</a:t>
+                      </a:r>
+                    </a:p>
+                  </a:txBody>
+                  <a:tcPr anchor="ctr">
+                    <a:solidFill>
+                      <a:srgbClr val="FFFFFF"/>
+                    </a:solidFill>
+                  </a:tcPr>
+                </a:tc>
+                <a:tc>
+                  <a:txBody>
+                    <a:bodyPr/>
+                    <a:lstStyle/>
+                    <a:p>
+                      <a:pPr algn="l"/>
+                      <a:r>
+                        <a:rPr sz="850">
+                          <a:solidFill>
+                            <a:srgbClr val="4A5560"/>
+                          </a:solidFill>
+                          <a:latin typeface="Arial"/>
+                        </a:rPr>
+                        <a:t>Талбар, эзэмшигч, олговрын дүнг загварт бөглөж захирамжийн бүртгэлтэй уях</a:t>
+                      </a:r>
+                    </a:p>
+                  </a:txBody>
+                  <a:tcPr anchor="ctr">
+                    <a:solidFill>
+                      <a:srgbClr val="FFFFFF"/>
+                    </a:solidFill>
+                  </a:tcPr>
+                </a:tc>
+              </a:tr>
+              <a:tr h="279698">
+                <a:tc gridSpan="3">
+                  <a:txBody>
+                    <a:bodyPr/>
+                    <a:lstStyle/>
+                    <a:p>
+                      <a:pPr algn="l"/>
+                      <a:r>
+                        <a:rPr sz="950" b="1">
+                          <a:solidFill>
+                            <a:srgbClr val="0E2440"/>
+                          </a:solidFill>
+                          <a:latin typeface="Arial"/>
+                        </a:rPr>
+                        <a:t>Е. ДУНДЫН МЭДЭЭЛЛИЙН САН (6)</a:t>
+                      </a:r>
+                    </a:p>
+                  </a:txBody>
+                  <a:tcPr anchor="ctr">
+                    <a:solidFill>
+                      <a:srgbClr val="E0F7F8"/>
+                    </a:solidFill>
+                  </a:tcPr>
+                </a:tc>
+                <a:tc hMerge="1">
+                  <a:txBody>
+                    <a:bodyPr/>
+                    <a:lstStyle/>
+                    <a:p>
+                      <a:pPr algn="ctr"/>
+                    </a:p>
+                  </a:txBody>
+                  <a:tcPr anchor="ctr">
+                    <a:solidFill>
+                      <a:srgbClr val="F0F4F8"/>
+                    </a:solidFill>
+                  </a:tcPr>
+                </a:tc>
+                <a:tc hMerge="1">
+                  <a:txBody>
+                    <a:bodyPr/>
+                    <a:lstStyle/>
+                    <a:p>
+                      <a:pPr algn="ctr"/>
+                    </a:p>
+                  </a:txBody>
+                  <a:tcPr anchor="ctr">
+                    <a:solidFill>
+                      <a:srgbClr val="F0F4F8"/>
+                    </a:solidFill>
+                  </a:tcPr>
+                </a:tc>
+              </a:tr>
+              <a:tr h="279698">
+                <a:tc>
+                  <a:txBody>
+                    <a:bodyPr/>
+                    <a:lstStyle/>
+                    <a:p>
+                      <a:pPr algn="l"/>
+                      <a:r>
+                        <a:rPr sz="850">
+                          <a:solidFill>
+                            <a:srgbClr val="4A5560"/>
+                          </a:solidFill>
+                          <a:latin typeface="Arial"/>
+                        </a:rPr>
+                        <a:t>21</a:t>
+                      </a:r>
+                    </a:p>
+                  </a:txBody>
+                  <a:tcPr anchor="ctr">
+                    <a:solidFill>
+                      <a:srgbClr val="FFFFFF"/>
+                    </a:solidFill>
+                  </a:tcPr>
+                </a:tc>
+                <a:tc>
+                  <a:txBody>
+                    <a:bodyPr/>
+                    <a:lstStyle/>
+                    <a:p>
+                      <a:pPr algn="l"/>
+                      <a:r>
+                        <a:rPr sz="850" b="1">
+                          <a:solidFill>
+                            <a:srgbClr val="16202B"/>
+                          </a:solidFill>
+                          <a:latin typeface="Arial"/>
+                        </a:rPr>
+                        <a:t>УБЕГ (2.8.1)</a:t>
+                      </a:r>
+                    </a:p>
+                  </a:txBody>
+                  <a:tcPr anchor="ctr">
+                    <a:solidFill>
+                      <a:srgbClr val="FFFFFF"/>
+                    </a:solidFill>
+                  </a:tcPr>
+                </a:tc>
+                <a:tc>
+                  <a:txBody>
+                    <a:bodyPr/>
+                    <a:lstStyle/>
+                    <a:p>
+                      <a:pPr algn="l"/>
+                      <a:r>
+                        <a:rPr sz="850">
+                          <a:solidFill>
+                            <a:srgbClr val="4A5560"/>
+                          </a:solidFill>
+                          <a:latin typeface="Arial"/>
+                        </a:rPr>
+                        <a:t>Регистрээр үл хөдлөхийн гэрчилгээ, өмчлөл, барьцааны лавлагаа</a:t>
+                      </a:r>
+                    </a:p>
+                  </a:txBody>
+                  <a:tcPr anchor="ctr">
+                    <a:solidFill>
+                      <a:srgbClr val="FFFFFF"/>
+                    </a:solidFill>
+                  </a:tcPr>
+                </a:tc>
+              </a:tr>
+              <a:tr h="279698">
+                <a:tc>
+                  <a:txBody>
+                    <a:bodyPr/>
+                    <a:lstStyle/>
+                    <a:p>
+                      <a:pPr algn="l"/>
+                      <a:r>
+                        <a:rPr sz="850">
+                          <a:solidFill>
+                            <a:srgbClr val="4A5560"/>
+                          </a:solidFill>
+                          <a:latin typeface="Arial"/>
+                        </a:rPr>
+                        <a:t>22</a:t>
+                      </a:r>
+                    </a:p>
+                  </a:txBody>
+                  <a:tcPr anchor="ctr">
+                    <a:solidFill>
+                      <a:srgbClr val="F0F4F8"/>
+                    </a:solidFill>
+                  </a:tcPr>
+                </a:tc>
+                <a:tc>
+                  <a:txBody>
+                    <a:bodyPr/>
+                    <a:lstStyle/>
+                    <a:p>
+                      <a:pPr algn="l"/>
+                      <a:r>
+                        <a:rPr sz="850" b="1">
+                          <a:solidFill>
+                            <a:srgbClr val="16202B"/>
+                          </a:solidFill>
+                          <a:latin typeface="Arial"/>
+                        </a:rPr>
+                        <a:t>Татварын ерөнхий газар (2.8.2)</a:t>
+                      </a:r>
+                    </a:p>
+                  </a:txBody>
+                  <a:tcPr anchor="ctr">
+                    <a:solidFill>
+                      <a:srgbClr val="F0F4F8"/>
+                    </a:solidFill>
+                  </a:tcPr>
+                </a:tc>
+                <a:tc>
+                  <a:txBody>
+                    <a:bodyPr/>
+                    <a:lstStyle/>
+                    <a:p>
+                      <a:pPr algn="l"/>
+                      <a:r>
+                        <a:rPr sz="850">
+                          <a:solidFill>
+                            <a:srgbClr val="4A5560"/>
+                          </a:solidFill>
+                          <a:latin typeface="Arial"/>
+                        </a:rPr>
+                        <a:t>Татварын өр, төлөлтийн лавлагаа — олговор олгохын өмнөх шалгалт</a:t>
+                      </a:r>
+                    </a:p>
+                  </a:txBody>
+                  <a:tcPr anchor="ctr">
+                    <a:solidFill>
+                      <a:srgbClr val="F0F4F8"/>
+                    </a:solidFill>
+                  </a:tcPr>
+                </a:tc>
+              </a:tr>
+              <a:tr h="279698">
+                <a:tc>
+                  <a:txBody>
+                    <a:bodyPr/>
+                    <a:lstStyle/>
+                    <a:p>
+                      <a:pPr algn="l"/>
+                      <a:r>
+                        <a:rPr sz="850">
+                          <a:solidFill>
+                            <a:srgbClr val="4A5560"/>
+                          </a:solidFill>
+                          <a:latin typeface="Arial"/>
+                        </a:rPr>
+                        <a:t>23</a:t>
+                      </a:r>
+                    </a:p>
+                  </a:txBody>
+                  <a:tcPr anchor="ctr">
+                    <a:solidFill>
+                      <a:srgbClr val="FFFFFF"/>
+                    </a:solidFill>
+                  </a:tcPr>
+                </a:tc>
+                <a:tc>
+                  <a:txBody>
+                    <a:bodyPr/>
+                    <a:lstStyle/>
+                    <a:p>
+                      <a:pPr algn="l"/>
+                      <a:r>
+                        <a:rPr sz="850" b="1">
+                          <a:solidFill>
+                            <a:srgbClr val="16202B"/>
+                          </a:solidFill>
+                          <a:latin typeface="Arial"/>
+                        </a:rPr>
+                        <a:t>ШШГЕГ (2.8.3)</a:t>
+                      </a:r>
+                    </a:p>
+                  </a:txBody>
+                  <a:tcPr anchor="ctr">
+                    <a:solidFill>
+                      <a:srgbClr val="FFFFFF"/>
+                    </a:solidFill>
+                  </a:tcPr>
+                </a:tc>
+                <a:tc>
+                  <a:txBody>
+                    <a:bodyPr/>
+                    <a:lstStyle/>
+                    <a:p>
+                      <a:pPr algn="l"/>
+                      <a:r>
+                        <a:rPr sz="850">
+                          <a:solidFill>
+                            <a:srgbClr val="4A5560"/>
+                          </a:solidFill>
+                          <a:latin typeface="Arial"/>
+                        </a:rPr>
+                        <a:t>Шүүхийн маргаан, эрх түдгэлзүүлэлтийн лавлагаа</a:t>
+                      </a:r>
+                    </a:p>
+                  </a:txBody>
+                  <a:tcPr anchor="ctr">
+                    <a:solidFill>
+                      <a:srgbClr val="FFFFFF"/>
+                    </a:solidFill>
+                  </a:tcPr>
+                </a:tc>
+              </a:tr>
+              <a:tr h="279698">
+                <a:tc>
+                  <a:txBody>
+                    <a:bodyPr/>
+                    <a:lstStyle/>
+                    <a:p>
+                      <a:pPr algn="l"/>
+                      <a:r>
+                        <a:rPr sz="850">
+                          <a:solidFill>
+                            <a:srgbClr val="4A5560"/>
+                          </a:solidFill>
+                          <a:latin typeface="Arial"/>
+                        </a:rPr>
+                        <a:t>24</a:t>
+                      </a:r>
+                    </a:p>
+                  </a:txBody>
+                  <a:tcPr anchor="ctr">
+                    <a:solidFill>
+                      <a:srgbClr val="F0F4F8"/>
+                    </a:solidFill>
+                  </a:tcPr>
+                </a:tc>
+                <a:tc>
+                  <a:txBody>
+                    <a:bodyPr/>
+                    <a:lstStyle/>
+                    <a:p>
+                      <a:pPr algn="l"/>
+                      <a:r>
+                        <a:rPr sz="850" b="1">
+                          <a:solidFill>
+                            <a:srgbClr val="16202B"/>
+                          </a:solidFill>
+                          <a:latin typeface="Arial"/>
+                        </a:rPr>
+                        <a:t>Үнийн мэдээний сан (2.8.4)</a:t>
+                      </a:r>
+                    </a:p>
+                  </a:txBody>
+                  <a:tcPr anchor="ctr">
+                    <a:solidFill>
+                      <a:srgbClr val="F0F4F8"/>
+                    </a:solidFill>
+                  </a:tcPr>
+                </a:tc>
+                <a:tc>
+                  <a:txBody>
+                    <a:bodyPr/>
+                    <a:lstStyle/>
+                    <a:p>
+                      <a:pPr algn="l"/>
+                      <a:r>
+                        <a:rPr sz="850">
+                          <a:solidFill>
+                            <a:srgbClr val="4A5560"/>
+                          </a:solidFill>
+                          <a:latin typeface="Arial"/>
+                        </a:rPr>
+                        <a:t>Батлагдсан олговруудаас үнийн сан бүрдүүлж ГУС-т лавлагаа болгон өгөх</a:t>
+                      </a:r>
+                    </a:p>
+                  </a:txBody>
+                  <a:tcPr anchor="ctr">
+                    <a:solidFill>
+                      <a:srgbClr val="F0F4F8"/>
+                    </a:solidFill>
+                  </a:tcPr>
+                </a:tc>
+              </a:tr>
+              <a:tr h="279698">
+                <a:tc>
+                  <a:txBody>
+                    <a:bodyPr/>
+                    <a:lstStyle/>
+                    <a:p>
+                      <a:pPr algn="l"/>
+                      <a:r>
+                        <a:rPr sz="850">
+                          <a:solidFill>
+                            <a:srgbClr val="4A5560"/>
+                          </a:solidFill>
+                          <a:latin typeface="Arial"/>
+                        </a:rPr>
+                        <a:t>25</a:t>
+                      </a:r>
+                    </a:p>
+                  </a:txBody>
+                  <a:tcPr anchor="ctr">
+                    <a:solidFill>
+                      <a:srgbClr val="FFFFFF"/>
+                    </a:solidFill>
+                  </a:tcPr>
+                </a:tc>
+                <a:tc>
+                  <a:txBody>
+                    <a:bodyPr/>
+                    <a:lstStyle/>
+                    <a:p>
+                      <a:pPr algn="l"/>
+                      <a:r>
+                        <a:rPr sz="850" b="1">
+                          <a:solidFill>
+                            <a:srgbClr val="16202B"/>
+                          </a:solidFill>
+                          <a:latin typeface="Arial"/>
+                        </a:rPr>
+                        <a:t>E-Mongolia (2.8.5)</a:t>
+                      </a:r>
+                    </a:p>
+                  </a:txBody>
+                  <a:tcPr anchor="ctr">
+                    <a:solidFill>
+                      <a:srgbClr val="FFFFFF"/>
+                    </a:solidFill>
+                  </a:tcPr>
+                </a:tc>
+                <a:tc>
+                  <a:txBody>
+                    <a:bodyPr/>
+                    <a:lstStyle/>
+                    <a:p>
+                      <a:pPr algn="l"/>
+                      <a:r>
+                        <a:rPr sz="850">
+                          <a:solidFill>
+                            <a:srgbClr val="4A5560"/>
+                          </a:solidFill>
+                          <a:latin typeface="Arial"/>
+                        </a:rPr>
+                        <a:t>Иргэнд мэдэгдэл хүргүүлж, НЭЗ судалгааны хариуг хүлээн авах</a:t>
+                      </a:r>
+                    </a:p>
+                  </a:txBody>
+                  <a:tcPr anchor="ctr">
+                    <a:solidFill>
+                      <a:srgbClr val="FFFFFF"/>
+                    </a:solidFill>
+                  </a:tcPr>
+                </a:tc>
+              </a:tr>
+              <a:tr h="279698">
+                <a:tc>
+                  <a:txBody>
+                    <a:bodyPr/>
+                    <a:lstStyle/>
+                    <a:p>
+                      <a:pPr algn="l"/>
+                      <a:r>
+                        <a:rPr sz="850">
+                          <a:solidFill>
+                            <a:srgbClr val="4A5560"/>
+                          </a:solidFill>
+                          <a:latin typeface="Arial"/>
+                        </a:rPr>
+                        <a:t>26</a:t>
+                      </a:r>
+                    </a:p>
+                  </a:txBody>
+                  <a:tcPr anchor="ctr">
+                    <a:solidFill>
+                      <a:srgbClr val="F0F4F8"/>
+                    </a:solidFill>
+                  </a:tcPr>
+                </a:tc>
+                <a:tc>
+                  <a:txBody>
+                    <a:bodyPr/>
+                    <a:lstStyle/>
+                    <a:p>
+                      <a:pPr algn="l"/>
+                      <a:r>
+                        <a:rPr sz="850" b="1">
+                          <a:solidFill>
+                            <a:srgbClr val="16202B"/>
+                          </a:solidFill>
+                          <a:latin typeface="Arial"/>
+                        </a:rPr>
+                        <a:t>Динамик давхарга (2.8.6)</a:t>
+                      </a:r>
+                    </a:p>
+                  </a:txBody>
+                  <a:tcPr anchor="ctr">
+                    <a:solidFill>
+                      <a:srgbClr val="F0F4F8"/>
+                    </a:solidFill>
+                  </a:tcPr>
+                </a:tc>
+                <a:tc>
+                  <a:txBody>
+                    <a:bodyPr/>
+                    <a:lstStyle/>
+                    <a:p>
+                      <a:pPr algn="l"/>
+                      <a:r>
+                        <a:rPr sz="850">
+                          <a:solidFill>
+                            <a:srgbClr val="4A5560"/>
+                          </a:solidFill>
+                          <a:latin typeface="Arial"/>
+                        </a:rPr>
+                        <a:t>ГУС-ийн каталогоос давхаргыг кодгүйгээр зурагт нэмэх</a:t>
+                      </a:r>
+                    </a:p>
+                  </a:txBody>
+                  <a:tcPr anchor="ctr">
+                    <a:solidFill>
+                      <a:srgbClr val="F0F4F8"/>
+                    </a:solidFill>
+                  </a:tcPr>
+                </a:tc>
+              </a:tr>
+              <a:tr h="279698">
+                <a:tc gridSpan="3">
+                  <a:txBody>
+                    <a:bodyPr/>
+                    <a:lstStyle/>
+                    <a:p>
+                      <a:pPr algn="l"/>
+                      <a:r>
+                        <a:rPr sz="950" b="1">
+                          <a:solidFill>
+                            <a:srgbClr val="0E2440"/>
+                          </a:solidFill>
+                          <a:latin typeface="Arial"/>
+                        </a:rPr>
+                        <a:t>Ж. БУСАД (1)</a:t>
+                      </a:r>
+                    </a:p>
+                  </a:txBody>
+                  <a:tcPr anchor="ctr">
+                    <a:solidFill>
+                      <a:srgbClr val="E0F7F8"/>
+                    </a:solidFill>
+                  </a:tcPr>
+                </a:tc>
+                <a:tc hMerge="1">
+                  <a:txBody>
+                    <a:bodyPr/>
+                    <a:lstStyle/>
+                    <a:p>
+                      <a:pPr algn="ctr"/>
+                    </a:p>
+                  </a:txBody>
+                  <a:tcPr anchor="ctr">
+                    <a:solidFill>
+                      <a:srgbClr val="FFFFFF"/>
+                    </a:solidFill>
+                  </a:tcPr>
+                </a:tc>
+                <a:tc hMerge="1">
+                  <a:txBody>
+                    <a:bodyPr/>
+                    <a:lstStyle/>
+                    <a:p>
+                      <a:pPr algn="ctr"/>
+                    </a:p>
+                  </a:txBody>
+                  <a:tcPr anchor="ctr">
+                    <a:solidFill>
+                      <a:srgbClr val="FFFFFF"/>
+                    </a:solidFill>
+                  </a:tcPr>
+                </a:tc>
+              </a:tr>
+              <a:tr h="279712">
+                <a:tc>
+                  <a:txBody>
+                    <a:bodyPr/>
+                    <a:lstStyle/>
+                    <a:p>
+                      <a:pPr algn="l"/>
+                      <a:r>
+                        <a:rPr sz="850">
+                          <a:solidFill>
+                            <a:srgbClr val="4A5560"/>
+                          </a:solidFill>
+                          <a:latin typeface="Arial"/>
+                        </a:rPr>
+                        <a:t>27</a:t>
+                      </a:r>
+                    </a:p>
+                  </a:txBody>
+                  <a:tcPr anchor="ctr">
+                    <a:solidFill>
+                      <a:srgbClr val="F0F4F8"/>
+                    </a:solidFill>
+                  </a:tcPr>
+                </a:tc>
+                <a:tc>
+                  <a:txBody>
+                    <a:bodyPr/>
+                    <a:lstStyle/>
+                    <a:p>
+                      <a:pPr algn="l"/>
+                      <a:r>
+                        <a:rPr sz="850" b="1">
+                          <a:solidFill>
+                            <a:srgbClr val="16202B"/>
+                          </a:solidFill>
+                          <a:latin typeface="Arial"/>
+                        </a:rPr>
+                        <a:t>Бусад системд өгөгдөл өгөх (2.9.2)</a:t>
+                      </a:r>
+                    </a:p>
+                  </a:txBody>
+                  <a:tcPr anchor="ctr">
+                    <a:solidFill>
+                      <a:srgbClr val="F0F4F8"/>
+                    </a:solidFill>
+                  </a:tcPr>
+                </a:tc>
+                <a:tc>
+                  <a:txBody>
+                    <a:bodyPr/>
+                    <a:lstStyle/>
+                    <a:p>
+                      <a:pPr algn="l"/>
+                      <a:r>
+                        <a:rPr sz="850">
+                          <a:solidFill>
+                            <a:srgbClr val="4A5560"/>
+                          </a:solidFill>
+                          <a:latin typeface="Arial"/>
+                        </a:rPr>
+                        <a:t>Чөлөөлөлт, талбар, олговрын мэдээллийг REST/WFS-ээр гаргах</a:t>
+                      </a:r>
+                    </a:p>
+                  </a:txBody>
+                  <a:tcPr anchor="ctr">
+                    <a:solidFill>
+                      <a:srgbClr val="F0F4F8"/>
+                    </a:solidFill>
+                  </a:tcPr>
+                </a:tc>
+              </a:tr>
+            </a:tbl>
+          </a:graphicData>
+        </a:graphic>
+      </p:graphicFrame>
     </p:spTree>
   </p:cSld>
   <p:clrMapOvr>
@@ -23985,7 +25300,7 @@
                 </a:solidFill>
                 <a:latin typeface="Arial"/>
               </a:rPr>
-              <a:t>14</a:t>
+              <a:t>12.2</a:t>
             </a:r>
           </a:p>
         </p:txBody>
@@ -24024,7 +25339,7 @@
                 </a:solidFill>
                 <a:latin typeface="Arial"/>
               </a:rPr>
-              <a:t>Нэмэгдэх боломжууд — эрэмбэлсэн санал</a:t>
+              <a:t>Хүлээгдэж буй ба төлөвлөгөөнөөс гадуур хийгдсэн ажлууд</a:t>
             </a:r>
           </a:p>
         </p:txBody>
@@ -24235,6 +25550,1915 @@
                 <a:latin typeface="Arial"/>
               </a:rPr>
               <a:t>20</a:t>
+            </a:r>
+          </a:p>
+        </p:txBody>
+      </p:sp>
+      <p:sp>
+        <p:nvSpPr>
+          <p:cNvPr id="10" name="Rounded Rectangle 9"/>
+          <p:cNvSpPr/>
+          <p:nvPr/>
+        </p:nvSpPr>
+        <p:spPr>
+          <a:xfrm>
+            <a:off x="502920" y="1481328"/>
+            <a:ext cx="6309360" cy="4709160"/>
+          </a:xfrm>
+          <a:prstGeom prst="roundRect">
+            <a:avLst>
+              <a:gd name="adj" fmla="val 4000"/>
+            </a:avLst>
+          </a:prstGeom>
+          <a:solidFill>
+            <a:srgbClr val="FFFFFF"/>
+          </a:solidFill>
+          <a:ln w="9525">
+            <a:solidFill>
+              <a:srgbClr val="DDE3E9"/>
+            </a:solidFill>
+          </a:ln>
+          <a:effectLst/>
+        </p:spPr>
+        <p:style>
+          <a:lnRef idx="1">
+            <a:schemeClr val="accent1"/>
+          </a:lnRef>
+          <a:fillRef idx="3">
+            <a:schemeClr val="accent1"/>
+          </a:fillRef>
+          <a:effectRef idx="2">
+            <a:schemeClr val="accent1"/>
+          </a:effectRef>
+          <a:fontRef idx="minor">
+            <a:schemeClr val="lt1"/>
+          </a:fontRef>
+        </p:style>
+        <p:txBody>
+          <a:bodyPr rtlCol="0" anchor="ctr"/>
+          <a:lstStyle/>
+          <a:p>
+            <a:pPr algn="ctr"/>
+          </a:p>
+        </p:txBody>
+      </p:sp>
+      <p:sp>
+        <p:nvSpPr>
+          <p:cNvPr id="11" name="Rectangle 10"/>
+          <p:cNvSpPr/>
+          <p:nvPr/>
+        </p:nvSpPr>
+        <p:spPr>
+          <a:xfrm>
+            <a:off x="502920" y="1481328"/>
+            <a:ext cx="6309360" cy="50800"/>
+          </a:xfrm>
+          <a:prstGeom prst="rect">
+            <a:avLst/>
+          </a:prstGeom>
+          <a:solidFill>
+            <a:srgbClr val="C4C5BE"/>
+          </a:solidFill>
+          <a:ln>
+            <a:noFill/>
+          </a:ln>
+          <a:effectLst/>
+        </p:spPr>
+        <p:style>
+          <a:lnRef idx="1">
+            <a:schemeClr val="accent1"/>
+          </a:lnRef>
+          <a:fillRef idx="3">
+            <a:schemeClr val="accent1"/>
+          </a:fillRef>
+          <a:effectRef idx="2">
+            <a:schemeClr val="accent1"/>
+          </a:effectRef>
+          <a:fontRef idx="minor">
+            <a:schemeClr val="lt1"/>
+          </a:fontRef>
+        </p:style>
+        <p:txBody>
+          <a:bodyPr rtlCol="0" anchor="ctr"/>
+          <a:lstStyle/>
+          <a:p>
+            <a:pPr algn="ctr"/>
+          </a:p>
+        </p:txBody>
+      </p:sp>
+      <p:sp>
+        <p:nvSpPr>
+          <p:cNvPr id="12" name="TextBox 11"/>
+          <p:cNvSpPr txBox="1"/>
+          <p:nvPr/>
+        </p:nvSpPr>
+        <p:spPr>
+          <a:xfrm>
+            <a:off x="749808" y="1664208"/>
+            <a:ext cx="5852160" cy="4389120"/>
+          </a:xfrm>
+          <a:prstGeom prst="rect">
+            <a:avLst/>
+          </a:prstGeom>
+          <a:noFill/>
+        </p:spPr>
+        <p:txBody>
+          <a:bodyPr wrap="square">
+            <a:spAutoFit/>
+          </a:bodyPr>
+          <a:lstStyle/>
+          <a:p>
+            <a:pPr algn="l">
+              <a:spcAft>
+                <a:spcPts val="1000"/>
+              </a:spcAft>
+            </a:pPr>
+            <a:r>
+              <a:rPr sz="1000" b="1">
+                <a:solidFill>
+                  <a:srgbClr val="4A5560"/>
+                </a:solidFill>
+                <a:latin typeface="Arial"/>
+              </a:rPr>
+              <a:t>ХҮЛЭЭГДЭЖ БАЙГАА 10 АЖИЛ</a:t>
+            </a:r>
+          </a:p>
+          <a:p>
+            <a:pPr algn="l">
+              <a:spcAft>
+                <a:spcPts val="800"/>
+              </a:spcAft>
+            </a:pPr>
+            <a:r>
+              <a:rPr sz="1150" b="1">
+                <a:solidFill>
+                  <a:srgbClr val="C4C5BE"/>
+                </a:solidFill>
+                <a:latin typeface="Arial"/>
+              </a:rPr>
+              <a:t>▪ </a:t>
+            </a:r>
+            <a:r>
+              <a:rPr sz="1150">
+                <a:solidFill>
+                  <a:srgbClr val="4A5560"/>
+                </a:solidFill>
+                <a:latin typeface="Arial"/>
+              </a:rPr>
+              <a:t>Зураг төслийн түүхэн өөрчлөлтийг харуулах (2.2.2.2)</a:t>
+            </a:r>
+          </a:p>
+          <a:p>
+            <a:pPr algn="l">
+              <a:spcAft>
+                <a:spcPts val="800"/>
+              </a:spcAft>
+            </a:pPr>
+            <a:r>
+              <a:rPr sz="1150" b="1">
+                <a:solidFill>
+                  <a:srgbClr val="C4C5BE"/>
+                </a:solidFill>
+                <a:latin typeface="Arial"/>
+              </a:rPr>
+              <a:t>▪ </a:t>
+            </a:r>
+            <a:r>
+              <a:rPr sz="1150">
+                <a:solidFill>
+                  <a:srgbClr val="4A5560"/>
+                </a:solidFill>
+                <a:latin typeface="Arial"/>
+              </a:rPr>
+              <a:t>НЭЗ судалгааг цахимаар авах (2.4.2.1)</a:t>
+            </a:r>
+          </a:p>
+          <a:p>
+            <a:pPr algn="l">
+              <a:spcAft>
+                <a:spcPts val="800"/>
+              </a:spcAft>
+            </a:pPr>
+            <a:r>
+              <a:rPr sz="1150" b="1">
+                <a:solidFill>
+                  <a:srgbClr val="C4C5BE"/>
+                </a:solidFill>
+                <a:latin typeface="Arial"/>
+              </a:rPr>
+              <a:t>▪ </a:t>
+            </a:r>
+            <a:r>
+              <a:rPr sz="1150">
+                <a:solidFill>
+                  <a:srgbClr val="4A5560"/>
+                </a:solidFill>
+                <a:latin typeface="Arial"/>
+              </a:rPr>
+              <a:t>Мэдэгдэх хуудас цахимаар хүргүүлэх (2.4.2.2)</a:t>
+            </a:r>
+          </a:p>
+          <a:p>
+            <a:pPr algn="l">
+              <a:spcAft>
+                <a:spcPts val="800"/>
+              </a:spcAft>
+            </a:pPr>
+            <a:r>
+              <a:rPr sz="1150" b="1">
+                <a:solidFill>
+                  <a:srgbClr val="C4C5BE"/>
+                </a:solidFill>
+                <a:latin typeface="Arial"/>
+              </a:rPr>
+              <a:t>▪ </a:t>
+            </a:r>
+            <a:r>
+              <a:rPr sz="1150">
+                <a:solidFill>
+                  <a:srgbClr val="4A5560"/>
+                </a:solidFill>
+                <a:latin typeface="Arial"/>
+              </a:rPr>
+              <a:t>Албан бичиг хүргүүлэх (2.4.2.3)</a:t>
+            </a:r>
+          </a:p>
+          <a:p>
+            <a:pPr algn="l">
+              <a:spcAft>
+                <a:spcPts val="800"/>
+              </a:spcAft>
+            </a:pPr>
+            <a:r>
+              <a:rPr sz="1150" b="1">
+                <a:solidFill>
+                  <a:srgbClr val="C4C5BE"/>
+                </a:solidFill>
+                <a:latin typeface="Arial"/>
+              </a:rPr>
+              <a:t>▪ </a:t>
+            </a:r>
+            <a:r>
+              <a:rPr sz="1150">
+                <a:solidFill>
+                  <a:srgbClr val="4A5560"/>
+                </a:solidFill>
+                <a:latin typeface="Arial"/>
+              </a:rPr>
+              <a:t>Тооцооллын журам, аргачлал, үнийн бүртгэл (2.4.3.2)</a:t>
+            </a:r>
+          </a:p>
+          <a:p>
+            <a:pPr algn="l">
+              <a:spcAft>
+                <a:spcPts val="800"/>
+              </a:spcAft>
+            </a:pPr>
+            <a:r>
+              <a:rPr sz="1150" b="1">
+                <a:solidFill>
+                  <a:srgbClr val="C4C5BE"/>
+                </a:solidFill>
+                <a:latin typeface="Arial"/>
+              </a:rPr>
+              <a:t>▪ </a:t>
+            </a:r>
+            <a:r>
+              <a:rPr sz="1150">
+                <a:solidFill>
+                  <a:srgbClr val="4A5560"/>
+                </a:solidFill>
+                <a:latin typeface="Arial"/>
+              </a:rPr>
+              <a:t>Гэрээг цахим системээр хэвлэх (2.4.4.2)</a:t>
+            </a:r>
+          </a:p>
+          <a:p>
+            <a:pPr algn="l">
+              <a:spcAft>
+                <a:spcPts val="800"/>
+              </a:spcAft>
+            </a:pPr>
+            <a:r>
+              <a:rPr sz="1150" b="1">
+                <a:solidFill>
+                  <a:srgbClr val="C4C5BE"/>
+                </a:solidFill>
+                <a:latin typeface="Arial"/>
+              </a:rPr>
+              <a:t>▪ </a:t>
+            </a:r>
+            <a:r>
+              <a:rPr sz="1150">
+                <a:solidFill>
+                  <a:srgbClr val="4A5560"/>
+                </a:solidFill>
+                <a:latin typeface="Arial"/>
+              </a:rPr>
+              <a:t>Чөлөөлсөн тухай акт үйлдэх (2.4.4.4)</a:t>
+            </a:r>
+          </a:p>
+          <a:p>
+            <a:pPr algn="l">
+              <a:spcAft>
+                <a:spcPts val="800"/>
+              </a:spcAft>
+            </a:pPr>
+            <a:r>
+              <a:rPr sz="1150" b="1">
+                <a:solidFill>
+                  <a:srgbClr val="C4C5BE"/>
+                </a:solidFill>
+                <a:latin typeface="Arial"/>
+              </a:rPr>
+              <a:t>▪ </a:t>
+            </a:r>
+            <a:r>
+              <a:rPr sz="1150">
+                <a:solidFill>
+                  <a:srgbClr val="4A5560"/>
+                </a:solidFill>
+                <a:latin typeface="Arial"/>
+              </a:rPr>
+              <a:t>Агаар сансрын зураг шинэчлэх (2.6.1) · дроны мэдээлэл (2.6.2)</a:t>
+            </a:r>
+          </a:p>
+          <a:p>
+            <a:pPr algn="l">
+              <a:spcAft>
+                <a:spcPts val="800"/>
+              </a:spcAft>
+            </a:pPr>
+            <a:r>
+              <a:rPr sz="1150" b="1">
+                <a:solidFill>
+                  <a:srgbClr val="C4C5BE"/>
+                </a:solidFill>
+                <a:latin typeface="Arial"/>
+              </a:rPr>
+              <a:t>▪ </a:t>
+            </a:r>
+            <a:r>
+              <a:rPr sz="1150">
+                <a:solidFill>
+                  <a:srgbClr val="4A5560"/>
+                </a:solidFill>
+                <a:latin typeface="Arial"/>
+              </a:rPr>
+              <a:t>2010–2025 оны түүхэн өгөгдөл нөхөж оруулах (2.7.1)</a:t>
+            </a:r>
+          </a:p>
+        </p:txBody>
+      </p:sp>
+      <p:sp>
+        <p:nvSpPr>
+          <p:cNvPr id="13" name="Rounded Rectangle 12"/>
+          <p:cNvSpPr/>
+          <p:nvPr/>
+        </p:nvSpPr>
+        <p:spPr>
+          <a:xfrm>
+            <a:off x="7022592" y="1481328"/>
+            <a:ext cx="4663440" cy="4709160"/>
+          </a:xfrm>
+          <a:prstGeom prst="roundRect">
+            <a:avLst>
+              <a:gd name="adj" fmla="val 4000"/>
+            </a:avLst>
+          </a:prstGeom>
+          <a:solidFill>
+            <a:srgbClr val="FFFFFF"/>
+          </a:solidFill>
+          <a:ln w="9525">
+            <a:solidFill>
+              <a:srgbClr val="DDE3E9"/>
+            </a:solidFill>
+          </a:ln>
+          <a:effectLst/>
+        </p:spPr>
+        <p:style>
+          <a:lnRef idx="1">
+            <a:schemeClr val="accent1"/>
+          </a:lnRef>
+          <a:fillRef idx="3">
+            <a:schemeClr val="accent1"/>
+          </a:fillRef>
+          <a:effectRef idx="2">
+            <a:schemeClr val="accent1"/>
+          </a:effectRef>
+          <a:fontRef idx="minor">
+            <a:schemeClr val="lt1"/>
+          </a:fontRef>
+        </p:style>
+        <p:txBody>
+          <a:bodyPr rtlCol="0" anchor="ctr"/>
+          <a:lstStyle/>
+          <a:p>
+            <a:pPr algn="ctr"/>
+          </a:p>
+        </p:txBody>
+      </p:sp>
+      <p:sp>
+        <p:nvSpPr>
+          <p:cNvPr id="14" name="Rectangle 13"/>
+          <p:cNvSpPr/>
+          <p:nvPr/>
+        </p:nvSpPr>
+        <p:spPr>
+          <a:xfrm>
+            <a:off x="7022592" y="1481328"/>
+            <a:ext cx="4663440" cy="50800"/>
+          </a:xfrm>
+          <a:prstGeom prst="rect">
+            <a:avLst/>
+          </a:prstGeom>
+          <a:solidFill>
+            <a:srgbClr val="0E8345"/>
+          </a:solidFill>
+          <a:ln>
+            <a:noFill/>
+          </a:ln>
+          <a:effectLst/>
+        </p:spPr>
+        <p:style>
+          <a:lnRef idx="1">
+            <a:schemeClr val="accent1"/>
+          </a:lnRef>
+          <a:fillRef idx="3">
+            <a:schemeClr val="accent1"/>
+          </a:fillRef>
+          <a:effectRef idx="2">
+            <a:schemeClr val="accent1"/>
+          </a:effectRef>
+          <a:fontRef idx="minor">
+            <a:schemeClr val="lt1"/>
+          </a:fontRef>
+        </p:style>
+        <p:txBody>
+          <a:bodyPr rtlCol="0" anchor="ctr"/>
+          <a:lstStyle/>
+          <a:p>
+            <a:pPr algn="ctr"/>
+          </a:p>
+        </p:txBody>
+      </p:sp>
+      <p:sp>
+        <p:nvSpPr>
+          <p:cNvPr id="15" name="TextBox 14"/>
+          <p:cNvSpPr txBox="1"/>
+          <p:nvPr/>
+        </p:nvSpPr>
+        <p:spPr>
+          <a:xfrm>
+            <a:off x="7269480" y="1664208"/>
+            <a:ext cx="4206240" cy="4389120"/>
+          </a:xfrm>
+          <a:prstGeom prst="rect">
+            <a:avLst/>
+          </a:prstGeom>
+          <a:noFill/>
+        </p:spPr>
+        <p:txBody>
+          <a:bodyPr wrap="square">
+            <a:spAutoFit/>
+          </a:bodyPr>
+          <a:lstStyle/>
+          <a:p>
+            <a:pPr algn="l">
+              <a:spcAft>
+                <a:spcPts val="1200"/>
+              </a:spcAft>
+            </a:pPr>
+            <a:r>
+              <a:rPr sz="1000" b="1">
+                <a:solidFill>
+                  <a:srgbClr val="0E8345"/>
+                </a:solidFill>
+                <a:latin typeface="Arial"/>
+              </a:rPr>
+              <a:t>ИЖ БҮРДЭЛД ОРООГҮЙ БОЛОВЧ ХЭРЭГЖСЭН 5 АЖИЛ</a:t>
+            </a:r>
+          </a:p>
+          <a:p>
+            <a:pPr algn="l">
+              <a:spcAft>
+                <a:spcPts val="1000"/>
+              </a:spcAft>
+            </a:pPr>
+            <a:r>
+              <a:rPr sz="1150" b="1">
+                <a:solidFill>
+                  <a:srgbClr val="0E8345"/>
+                </a:solidFill>
+                <a:latin typeface="Arial"/>
+              </a:rPr>
+              <a:t>▪ </a:t>
+            </a:r>
+            <a:r>
+              <a:rPr sz="1150" b="1">
+                <a:solidFill>
+                  <a:srgbClr val="16202B"/>
+                </a:solidFill>
+                <a:latin typeface="Arial"/>
+              </a:rPr>
+              <a:t>Excel-ээс үнэлгээ импортлох</a:t>
+            </a:r>
+            <a:r>
+              <a:rPr sz="1150">
+                <a:solidFill>
+                  <a:srgbClr val="4A5560"/>
+                </a:solidFill>
+                <a:latin typeface="Arial"/>
+              </a:rPr>
+              <a:t> — SHA-256 давхардлын хамгаалалттай</a:t>
+            </a:r>
+          </a:p>
+          <a:p>
+            <a:pPr algn="l">
+              <a:spcAft>
+                <a:spcPts val="1000"/>
+              </a:spcAft>
+            </a:pPr>
+            <a:r>
+              <a:rPr sz="1150" b="1">
+                <a:solidFill>
+                  <a:srgbClr val="0E8345"/>
+                </a:solidFill>
+                <a:latin typeface="Arial"/>
+              </a:rPr>
+              <a:t>▪ </a:t>
+            </a:r>
+            <a:r>
+              <a:rPr sz="1150" b="1">
+                <a:solidFill>
+                  <a:srgbClr val="16202B"/>
+                </a:solidFill>
+                <a:latin typeface="Arial"/>
+              </a:rPr>
+              <a:t>Мэрг. байгууллагын портал</a:t>
+            </a:r>
+            <a:r>
+              <a:rPr sz="1150">
+                <a:solidFill>
+                  <a:srgbClr val="4A5560"/>
+                </a:solidFill>
+                <a:latin typeface="Arial"/>
+              </a:rPr>
+              <a:t> — тусгаарлагдсан 43 endpoint</a:t>
+            </a:r>
+          </a:p>
+          <a:p>
+            <a:pPr algn="l">
+              <a:spcAft>
+                <a:spcPts val="1000"/>
+              </a:spcAft>
+            </a:pPr>
+            <a:r>
+              <a:rPr sz="1150" b="1">
+                <a:solidFill>
+                  <a:srgbClr val="0E8345"/>
+                </a:solidFill>
+                <a:latin typeface="Arial"/>
+              </a:rPr>
+              <a:t>▪ </a:t>
+            </a:r>
+            <a:r>
+              <a:rPr sz="1150" b="1">
+                <a:solidFill>
+                  <a:srgbClr val="16202B"/>
+                </a:solidFill>
+                <a:latin typeface="Arial"/>
+              </a:rPr>
+              <a:t>Бүрэн түүхжүүлэлт</a:t>
+            </a:r>
+            <a:r>
+              <a:rPr sz="1150">
+                <a:solidFill>
+                  <a:srgbClr val="4A5560"/>
+                </a:solidFill>
+                <a:latin typeface="Arial"/>
+              </a:rPr>
+              <a:t> — өөрчлөлт бүр түүхтэй</a:t>
+            </a:r>
+          </a:p>
+          <a:p>
+            <a:pPr algn="l">
+              <a:spcAft>
+                <a:spcPts val="1000"/>
+              </a:spcAft>
+            </a:pPr>
+            <a:r>
+              <a:rPr sz="1150" b="1">
+                <a:solidFill>
+                  <a:srgbClr val="0E8345"/>
+                </a:solidFill>
+                <a:latin typeface="Arial"/>
+              </a:rPr>
+              <a:t>▪ </a:t>
+            </a:r>
+            <a:r>
+              <a:rPr sz="1150" b="1">
+                <a:solidFill>
+                  <a:srgbClr val="16202B"/>
+                </a:solidFill>
+                <a:latin typeface="Arial"/>
+              </a:rPr>
+              <a:t>Аюулгүй байдлын өргөтгөлүүд</a:t>
+            </a:r>
+            <a:r>
+              <a:rPr sz="1150">
+                <a:solidFill>
+                  <a:srgbClr val="4A5560"/>
+                </a:solidFill>
+                <a:latin typeface="Arial"/>
+              </a:rPr>
+              <a:t> — token хүчингүйжүүлэлт, 4 давхар хамгаалалт</a:t>
+            </a:r>
+          </a:p>
+          <a:p>
+            <a:pPr algn="l">
+              <a:spcAft>
+                <a:spcPts val="1000"/>
+              </a:spcAft>
+            </a:pPr>
+            <a:r>
+              <a:rPr sz="1150" b="1">
+                <a:solidFill>
+                  <a:srgbClr val="0E8345"/>
+                </a:solidFill>
+                <a:latin typeface="Arial"/>
+              </a:rPr>
+              <a:t>▪ </a:t>
+            </a:r>
+            <a:r>
+              <a:rPr sz="1150" b="1">
+                <a:solidFill>
+                  <a:srgbClr val="16202B"/>
+                </a:solidFill>
+                <a:latin typeface="Arial"/>
+              </a:rPr>
+              <a:t>Бодит цагийн мэдэгдэл</a:t>
+            </a:r>
+            <a:r>
+              <a:rPr sz="1150">
+                <a:solidFill>
+                  <a:srgbClr val="4A5560"/>
+                </a:solidFill>
+                <a:latin typeface="Arial"/>
+              </a:rPr>
+              <a:t> — SSE стрийм, хонх, toast</a:t>
+            </a:r>
+          </a:p>
+        </p:txBody>
+      </p:sp>
+    </p:spTree>
+  </p:cSld>
+  <p:clrMapOvr>
+    <a:masterClrMapping/>
+  </p:clrMapOvr>
+</p:sld>
+</file>
+
+<file path=ppt/slides/slide22.xml><?xml version="1.0" encoding="utf-8"?>
+<p:sld xmlns:a="http://schemas.openxmlformats.org/drawingml/2006/main" xmlns:p="http://schemas.openxmlformats.org/presentationml/2006/main" xmlns:r="http://schemas.openxmlformats.org/officeDocument/2006/relationships">
+  <p:cSld>
+    <p:spTree>
+      <p:nvGrpSpPr>
+        <p:cNvPr id="1" name=""/>
+        <p:cNvGrpSpPr/>
+        <p:nvPr/>
+      </p:nvGrpSpPr>
+      <p:grpSpPr/>
+      <p:sp>
+        <p:nvSpPr>
+          <p:cNvPr id="2" name="Rectangle 1"/>
+          <p:cNvSpPr/>
+          <p:nvPr/>
+        </p:nvSpPr>
+        <p:spPr>
+          <a:xfrm>
+            <a:off x="0" y="0"/>
+            <a:ext cx="12191695" cy="6858000"/>
+          </a:xfrm>
+          <a:prstGeom prst="rect">
+            <a:avLst/>
+          </a:prstGeom>
+          <a:solidFill>
+            <a:srgbClr val="F7F9FB"/>
+          </a:solidFill>
+          <a:ln>
+            <a:noFill/>
+          </a:ln>
+          <a:effectLst/>
+        </p:spPr>
+        <p:style>
+          <a:lnRef idx="1">
+            <a:schemeClr val="accent1"/>
+          </a:lnRef>
+          <a:fillRef idx="3">
+            <a:schemeClr val="accent1"/>
+          </a:fillRef>
+          <a:effectRef idx="2">
+            <a:schemeClr val="accent1"/>
+          </a:effectRef>
+          <a:fontRef idx="minor">
+            <a:schemeClr val="lt1"/>
+          </a:fontRef>
+        </p:style>
+        <p:txBody>
+          <a:bodyPr rtlCol="0" anchor="ctr"/>
+          <a:lstStyle/>
+          <a:p>
+            <a:pPr algn="ctr"/>
+          </a:p>
+        </p:txBody>
+      </p:sp>
+      <p:sp>
+        <p:nvSpPr>
+          <p:cNvPr id="3" name="Rounded Rectangle 2"/>
+          <p:cNvSpPr/>
+          <p:nvPr/>
+        </p:nvSpPr>
+        <p:spPr>
+          <a:xfrm>
+            <a:off x="502920" y="384048"/>
+            <a:ext cx="658368" cy="658368"/>
+          </a:xfrm>
+          <a:prstGeom prst="roundRect">
+            <a:avLst>
+              <a:gd name="adj" fmla="val 18000"/>
+            </a:avLst>
+          </a:prstGeom>
+          <a:solidFill>
+            <a:srgbClr val="0E2440"/>
+          </a:solidFill>
+          <a:ln>
+            <a:noFill/>
+          </a:ln>
+          <a:effectLst/>
+        </p:spPr>
+        <p:style>
+          <a:lnRef idx="1">
+            <a:schemeClr val="accent1"/>
+          </a:lnRef>
+          <a:fillRef idx="3">
+            <a:schemeClr val="accent1"/>
+          </a:fillRef>
+          <a:effectRef idx="2">
+            <a:schemeClr val="accent1"/>
+          </a:effectRef>
+          <a:fontRef idx="minor">
+            <a:schemeClr val="lt1"/>
+          </a:fontRef>
+        </p:style>
+        <p:txBody>
+          <a:bodyPr rtlCol="0" anchor="ctr" lIns="0" rIns="0" tIns="0" bIns="0"/>
+          <a:lstStyle/>
+          <a:p>
+            <a:pPr algn="ctr">
+              <a:spcAft>
+                <a:spcPts val="400"/>
+              </a:spcAft>
+            </a:pPr>
+            <a:r>
+              <a:rPr sz="1500" b="1">
+                <a:solidFill>
+                  <a:srgbClr val="FFFFFF"/>
+                </a:solidFill>
+                <a:latin typeface="Arial"/>
+              </a:rPr>
+              <a:t>13</a:t>
+            </a:r>
+          </a:p>
+        </p:txBody>
+      </p:sp>
+      <p:sp>
+        <p:nvSpPr>
+          <p:cNvPr id="4" name="TextBox 3"/>
+          <p:cNvSpPr txBox="1"/>
+          <p:nvPr/>
+        </p:nvSpPr>
+        <p:spPr>
+          <a:xfrm>
+            <a:off x="1353312" y="310896"/>
+            <a:ext cx="10332720" cy="1005840"/>
+          </a:xfrm>
+          <a:prstGeom prst="rect">
+            <a:avLst/>
+          </a:prstGeom>
+          <a:noFill/>
+        </p:spPr>
+        <p:txBody>
+          <a:bodyPr wrap="square">
+            <a:spAutoFit/>
+          </a:bodyPr>
+          <a:lstStyle/>
+          <a:p>
+            <a:pPr algn="l">
+              <a:spcAft>
+                <a:spcPts val="200"/>
+              </a:spcAft>
+            </a:pPr>
+            <a:r>
+              <a:rPr sz="2400" b="1">
+                <a:solidFill>
+                  <a:srgbClr val="0E2440"/>
+                </a:solidFill>
+                <a:latin typeface="Arial"/>
+              </a:rPr>
+              <a:t>Нэгдсэн дүгнэлт — үр дүн ба давуу тал</a:t>
+            </a:r>
+          </a:p>
+        </p:txBody>
+      </p:sp>
+      <p:sp>
+        <p:nvSpPr>
+          <p:cNvPr id="5" name="Rectangle 4"/>
+          <p:cNvSpPr/>
+          <p:nvPr/>
+        </p:nvSpPr>
+        <p:spPr>
+          <a:xfrm>
+            <a:off x="502920" y="1261872"/>
+            <a:ext cx="11183112" cy="20320"/>
+          </a:xfrm>
+          <a:prstGeom prst="rect">
+            <a:avLst/>
+          </a:prstGeom>
+          <a:solidFill>
+            <a:srgbClr val="DDE3E9"/>
+          </a:solidFill>
+          <a:ln>
+            <a:noFill/>
+          </a:ln>
+          <a:effectLst/>
+        </p:spPr>
+        <p:style>
+          <a:lnRef idx="1">
+            <a:schemeClr val="accent1"/>
+          </a:lnRef>
+          <a:fillRef idx="3">
+            <a:schemeClr val="accent1"/>
+          </a:fillRef>
+          <a:effectRef idx="2">
+            <a:schemeClr val="accent1"/>
+          </a:effectRef>
+          <a:fontRef idx="minor">
+            <a:schemeClr val="lt1"/>
+          </a:fontRef>
+        </p:style>
+        <p:txBody>
+          <a:bodyPr rtlCol="0" anchor="ctr"/>
+          <a:lstStyle/>
+          <a:p>
+            <a:pPr algn="ctr"/>
+          </a:p>
+        </p:txBody>
+      </p:sp>
+      <p:sp>
+        <p:nvSpPr>
+          <p:cNvPr id="6" name="Rectangle 5"/>
+          <p:cNvSpPr/>
+          <p:nvPr/>
+        </p:nvSpPr>
+        <p:spPr>
+          <a:xfrm>
+            <a:off x="502920" y="1243584"/>
+            <a:ext cx="822960" cy="35560"/>
+          </a:xfrm>
+          <a:prstGeom prst="rect">
+            <a:avLst/>
+          </a:prstGeom>
+          <a:solidFill>
+            <a:srgbClr val="02C0CE"/>
+          </a:solidFill>
+          <a:ln>
+            <a:noFill/>
+          </a:ln>
+          <a:effectLst/>
+        </p:spPr>
+        <p:style>
+          <a:lnRef idx="1">
+            <a:schemeClr val="accent1"/>
+          </a:lnRef>
+          <a:fillRef idx="3">
+            <a:schemeClr val="accent1"/>
+          </a:fillRef>
+          <a:effectRef idx="2">
+            <a:schemeClr val="accent1"/>
+          </a:effectRef>
+          <a:fontRef idx="minor">
+            <a:schemeClr val="lt1"/>
+          </a:fontRef>
+        </p:style>
+        <p:txBody>
+          <a:bodyPr rtlCol="0" anchor="ctr"/>
+          <a:lstStyle/>
+          <a:p>
+            <a:pPr algn="ctr"/>
+          </a:p>
+        </p:txBody>
+      </p:sp>
+      <p:sp>
+        <p:nvSpPr>
+          <p:cNvPr id="7" name="Rectangle 6"/>
+          <p:cNvSpPr/>
+          <p:nvPr/>
+        </p:nvSpPr>
+        <p:spPr>
+          <a:xfrm>
+            <a:off x="502920" y="6455664"/>
+            <a:ext cx="11183112" cy="12700"/>
+          </a:xfrm>
+          <a:prstGeom prst="rect">
+            <a:avLst/>
+          </a:prstGeom>
+          <a:solidFill>
+            <a:srgbClr val="DDE3E9"/>
+          </a:solidFill>
+          <a:ln>
+            <a:noFill/>
+          </a:ln>
+          <a:effectLst/>
+        </p:spPr>
+        <p:style>
+          <a:lnRef idx="1">
+            <a:schemeClr val="accent1"/>
+          </a:lnRef>
+          <a:fillRef idx="3">
+            <a:schemeClr val="accent1"/>
+          </a:fillRef>
+          <a:effectRef idx="2">
+            <a:schemeClr val="accent1"/>
+          </a:effectRef>
+          <a:fontRef idx="minor">
+            <a:schemeClr val="lt1"/>
+          </a:fontRef>
+        </p:style>
+        <p:txBody>
+          <a:bodyPr rtlCol="0" anchor="ctr"/>
+          <a:lstStyle/>
+          <a:p>
+            <a:pPr algn="ctr"/>
+          </a:p>
+        </p:txBody>
+      </p:sp>
+      <p:sp>
+        <p:nvSpPr>
+          <p:cNvPr id="8" name="TextBox 7"/>
+          <p:cNvSpPr txBox="1"/>
+          <p:nvPr/>
+        </p:nvSpPr>
+        <p:spPr>
+          <a:xfrm>
+            <a:off x="502920" y="6492240"/>
+            <a:ext cx="8229600" cy="320040"/>
+          </a:xfrm>
+          <a:prstGeom prst="rect">
+            <a:avLst/>
+          </a:prstGeom>
+          <a:noFill/>
+        </p:spPr>
+        <p:txBody>
+          <a:bodyPr wrap="square">
+            <a:spAutoFit/>
+          </a:bodyPr>
+          <a:lstStyle/>
+          <a:p>
+            <a:pPr algn="l">
+              <a:spcAft>
+                <a:spcPts val="400"/>
+              </a:spcAft>
+            </a:pPr>
+            <a:r>
+              <a:rPr sz="900" b="0">
+                <a:solidFill>
+                  <a:srgbClr val="8A929A"/>
+                </a:solidFill>
+                <a:latin typeface="Arial"/>
+              </a:rPr>
+              <a:t>Газар чөлөөлөлт, нөхөх олговрын нэгдсэн систем  ·  Техникийн тайлан</a:t>
+            </a:r>
+          </a:p>
+        </p:txBody>
+      </p:sp>
+      <p:sp>
+        <p:nvSpPr>
+          <p:cNvPr id="9" name="TextBox 8"/>
+          <p:cNvSpPr txBox="1"/>
+          <p:nvPr/>
+        </p:nvSpPr>
+        <p:spPr>
+          <a:xfrm>
+            <a:off x="10972800" y="6492240"/>
+            <a:ext cx="731520" cy="320040"/>
+          </a:xfrm>
+          <a:prstGeom prst="rect">
+            <a:avLst/>
+          </a:prstGeom>
+          <a:noFill/>
+        </p:spPr>
+        <p:txBody>
+          <a:bodyPr wrap="square">
+            <a:spAutoFit/>
+          </a:bodyPr>
+          <a:lstStyle/>
+          <a:p>
+            <a:pPr algn="r">
+              <a:spcAft>
+                <a:spcPts val="400"/>
+              </a:spcAft>
+            </a:pPr>
+            <a:r>
+              <a:rPr sz="1000" b="1">
+                <a:solidFill>
+                  <a:srgbClr val="0E2440"/>
+                </a:solidFill>
+                <a:latin typeface="Arial"/>
+              </a:rPr>
+              <a:t>21</a:t>
+            </a:r>
+          </a:p>
+        </p:txBody>
+      </p:sp>
+      <p:sp>
+        <p:nvSpPr>
+          <p:cNvPr id="10" name="Rounded Rectangle 9"/>
+          <p:cNvSpPr/>
+          <p:nvPr/>
+        </p:nvSpPr>
+        <p:spPr>
+          <a:xfrm>
+            <a:off x="502920" y="1481328"/>
+            <a:ext cx="5486400" cy="4709160"/>
+          </a:xfrm>
+          <a:prstGeom prst="roundRect">
+            <a:avLst>
+              <a:gd name="adj" fmla="val 4000"/>
+            </a:avLst>
+          </a:prstGeom>
+          <a:solidFill>
+            <a:srgbClr val="FFFFFF"/>
+          </a:solidFill>
+          <a:ln w="9525">
+            <a:solidFill>
+              <a:srgbClr val="DDE3E9"/>
+            </a:solidFill>
+          </a:ln>
+          <a:effectLst/>
+        </p:spPr>
+        <p:style>
+          <a:lnRef idx="1">
+            <a:schemeClr val="accent1"/>
+          </a:lnRef>
+          <a:fillRef idx="3">
+            <a:schemeClr val="accent1"/>
+          </a:fillRef>
+          <a:effectRef idx="2">
+            <a:schemeClr val="accent1"/>
+          </a:effectRef>
+          <a:fontRef idx="minor">
+            <a:schemeClr val="lt1"/>
+          </a:fontRef>
+        </p:style>
+        <p:txBody>
+          <a:bodyPr rtlCol="0" anchor="ctr"/>
+          <a:lstStyle/>
+          <a:p>
+            <a:pPr algn="ctr"/>
+          </a:p>
+        </p:txBody>
+      </p:sp>
+      <p:sp>
+        <p:nvSpPr>
+          <p:cNvPr id="11" name="Rectangle 10"/>
+          <p:cNvSpPr/>
+          <p:nvPr/>
+        </p:nvSpPr>
+        <p:spPr>
+          <a:xfrm>
+            <a:off x="502920" y="1481328"/>
+            <a:ext cx="5486400" cy="50800"/>
+          </a:xfrm>
+          <a:prstGeom prst="rect">
+            <a:avLst/>
+          </a:prstGeom>
+          <a:solidFill>
+            <a:srgbClr val="2A78D6"/>
+          </a:solidFill>
+          <a:ln>
+            <a:noFill/>
+          </a:ln>
+          <a:effectLst/>
+        </p:spPr>
+        <p:style>
+          <a:lnRef idx="1">
+            <a:schemeClr val="accent1"/>
+          </a:lnRef>
+          <a:fillRef idx="3">
+            <a:schemeClr val="accent1"/>
+          </a:fillRef>
+          <a:effectRef idx="2">
+            <a:schemeClr val="accent1"/>
+          </a:effectRef>
+          <a:fontRef idx="minor">
+            <a:schemeClr val="lt1"/>
+          </a:fontRef>
+        </p:style>
+        <p:txBody>
+          <a:bodyPr rtlCol="0" anchor="ctr"/>
+          <a:lstStyle/>
+          <a:p>
+            <a:pPr algn="ctr"/>
+          </a:p>
+        </p:txBody>
+      </p:sp>
+      <p:sp>
+        <p:nvSpPr>
+          <p:cNvPr id="12" name="TextBox 11"/>
+          <p:cNvSpPr txBox="1"/>
+          <p:nvPr/>
+        </p:nvSpPr>
+        <p:spPr>
+          <a:xfrm>
+            <a:off x="749808" y="1664208"/>
+            <a:ext cx="5029200" cy="4389120"/>
+          </a:xfrm>
+          <a:prstGeom prst="rect">
+            <a:avLst/>
+          </a:prstGeom>
+          <a:noFill/>
+        </p:spPr>
+        <p:txBody>
+          <a:bodyPr wrap="square">
+            <a:spAutoFit/>
+          </a:bodyPr>
+          <a:lstStyle/>
+          <a:p>
+            <a:pPr algn="l">
+              <a:spcAft>
+                <a:spcPts val="1500"/>
+              </a:spcAft>
+            </a:pPr>
+            <a:r>
+              <a:rPr sz="1150" b="1">
+                <a:solidFill>
+                  <a:srgbClr val="2A78D6"/>
+                </a:solidFill>
+                <a:latin typeface="Arial"/>
+              </a:rPr>
+              <a:t>СИСТЕМ ХИЙГДСЭНЭЭР ГАРСАН ҮР ДҮН</a:t>
+            </a:r>
+          </a:p>
+          <a:p>
+            <a:pPr algn="l">
+              <a:spcAft>
+                <a:spcPts val="1300"/>
+              </a:spcAft>
+            </a:pPr>
+            <a:r>
+              <a:rPr sz="1300" b="1">
+                <a:solidFill>
+                  <a:srgbClr val="2A78D6"/>
+                </a:solidFill>
+                <a:latin typeface="Arial"/>
+              </a:rPr>
+              <a:t>▪ </a:t>
+            </a:r>
+            <a:r>
+              <a:rPr sz="1300">
+                <a:solidFill>
+                  <a:srgbClr val="4A5560"/>
+                </a:solidFill>
+                <a:latin typeface="Arial"/>
+              </a:rPr>
+              <a:t>Бүх үе шат цаасан бус, нэгдсэн цахим урсгалд шилжсэн</a:t>
+            </a:r>
+          </a:p>
+          <a:p>
+            <a:pPr algn="l">
+              <a:spcAft>
+                <a:spcPts val="1300"/>
+              </a:spcAft>
+            </a:pPr>
+            <a:r>
+              <a:rPr sz="1300" b="1">
+                <a:solidFill>
+                  <a:srgbClr val="2A78D6"/>
+                </a:solidFill>
+                <a:latin typeface="Arial"/>
+              </a:rPr>
+              <a:t>▪ </a:t>
+            </a:r>
+            <a:r>
+              <a:rPr sz="1300">
+                <a:solidFill>
+                  <a:srgbClr val="4A5560"/>
+                </a:solidFill>
+                <a:latin typeface="Arial"/>
+              </a:rPr>
+              <a:t>3 бие даасан үнэлгээ зэрэгцээ, workflow-оор баталгааждаг</a:t>
+            </a:r>
+          </a:p>
+          <a:p>
+            <a:pPr algn="l">
+              <a:spcAft>
+                <a:spcPts val="1300"/>
+              </a:spcAft>
+            </a:pPr>
+            <a:r>
+              <a:rPr sz="1300" b="1">
+                <a:solidFill>
+                  <a:srgbClr val="2A78D6"/>
+                </a:solidFill>
+                <a:latin typeface="Arial"/>
+              </a:rPr>
+              <a:t>▪ </a:t>
+            </a:r>
+            <a:r>
+              <a:rPr sz="1300">
+                <a:solidFill>
+                  <a:srgbClr val="4A5560"/>
+                </a:solidFill>
+                <a:latin typeface="Arial"/>
+              </a:rPr>
+              <a:t>Орон зайн тооцоолол автоматжиж, зурган дээр бодит хугацаанд харагдана</a:t>
+            </a:r>
+          </a:p>
+          <a:p>
+            <a:pPr algn="l">
+              <a:spcAft>
+                <a:spcPts val="1300"/>
+              </a:spcAft>
+            </a:pPr>
+            <a:r>
+              <a:rPr sz="1300" b="1">
+                <a:solidFill>
+                  <a:srgbClr val="2A78D6"/>
+                </a:solidFill>
+                <a:latin typeface="Arial"/>
+              </a:rPr>
+              <a:t>▪ </a:t>
+            </a:r>
+            <a:r>
+              <a:rPr sz="1300">
+                <a:solidFill>
+                  <a:srgbClr val="4A5560"/>
+                </a:solidFill>
+                <a:latin typeface="Arial"/>
+              </a:rPr>
+              <a:t>Гадны байгууллагууд тусгаарлагдсан порталтай</a:t>
+            </a:r>
+          </a:p>
+          <a:p>
+            <a:pPr algn="l">
+              <a:spcAft>
+                <a:spcPts val="1300"/>
+              </a:spcAft>
+            </a:pPr>
+            <a:r>
+              <a:rPr sz="1300" b="1">
+                <a:solidFill>
+                  <a:srgbClr val="2A78D6"/>
+                </a:solidFill>
+                <a:latin typeface="Arial"/>
+              </a:rPr>
+              <a:t>▪ </a:t>
+            </a:r>
+            <a:r>
+              <a:rPr sz="1300">
+                <a:solidFill>
+                  <a:srgbClr val="4A5560"/>
+                </a:solidFill>
+                <a:latin typeface="Arial"/>
+              </a:rPr>
+              <a:t>9 төрлийн албан баримт, Excel тайлан автоматаар үүсдэг</a:t>
+            </a:r>
+          </a:p>
+        </p:txBody>
+      </p:sp>
+      <p:sp>
+        <p:nvSpPr>
+          <p:cNvPr id="13" name="Rounded Rectangle 12"/>
+          <p:cNvSpPr/>
+          <p:nvPr/>
+        </p:nvSpPr>
+        <p:spPr>
+          <a:xfrm>
+            <a:off x="6199632" y="1481328"/>
+            <a:ext cx="5486400" cy="4709160"/>
+          </a:xfrm>
+          <a:prstGeom prst="roundRect">
+            <a:avLst>
+              <a:gd name="adj" fmla="val 4000"/>
+            </a:avLst>
+          </a:prstGeom>
+          <a:solidFill>
+            <a:srgbClr val="FFFFFF"/>
+          </a:solidFill>
+          <a:ln w="9525">
+            <a:solidFill>
+              <a:srgbClr val="DDE3E9"/>
+            </a:solidFill>
+          </a:ln>
+          <a:effectLst/>
+        </p:spPr>
+        <p:style>
+          <a:lnRef idx="1">
+            <a:schemeClr val="accent1"/>
+          </a:lnRef>
+          <a:fillRef idx="3">
+            <a:schemeClr val="accent1"/>
+          </a:fillRef>
+          <a:effectRef idx="2">
+            <a:schemeClr val="accent1"/>
+          </a:effectRef>
+          <a:fontRef idx="minor">
+            <a:schemeClr val="lt1"/>
+          </a:fontRef>
+        </p:style>
+        <p:txBody>
+          <a:bodyPr rtlCol="0" anchor="ctr"/>
+          <a:lstStyle/>
+          <a:p>
+            <a:pPr algn="ctr"/>
+          </a:p>
+        </p:txBody>
+      </p:sp>
+      <p:sp>
+        <p:nvSpPr>
+          <p:cNvPr id="14" name="Rectangle 13"/>
+          <p:cNvSpPr/>
+          <p:nvPr/>
+        </p:nvSpPr>
+        <p:spPr>
+          <a:xfrm>
+            <a:off x="6199632" y="1481328"/>
+            <a:ext cx="5486400" cy="50800"/>
+          </a:xfrm>
+          <a:prstGeom prst="rect">
+            <a:avLst/>
+          </a:prstGeom>
+          <a:solidFill>
+            <a:srgbClr val="0E8345"/>
+          </a:solidFill>
+          <a:ln>
+            <a:noFill/>
+          </a:ln>
+          <a:effectLst/>
+        </p:spPr>
+        <p:style>
+          <a:lnRef idx="1">
+            <a:schemeClr val="accent1"/>
+          </a:lnRef>
+          <a:fillRef idx="3">
+            <a:schemeClr val="accent1"/>
+          </a:fillRef>
+          <a:effectRef idx="2">
+            <a:schemeClr val="accent1"/>
+          </a:effectRef>
+          <a:fontRef idx="minor">
+            <a:schemeClr val="lt1"/>
+          </a:fontRef>
+        </p:style>
+        <p:txBody>
+          <a:bodyPr rtlCol="0" anchor="ctr"/>
+          <a:lstStyle/>
+          <a:p>
+            <a:pPr algn="ctr"/>
+          </a:p>
+        </p:txBody>
+      </p:sp>
+      <p:sp>
+        <p:nvSpPr>
+          <p:cNvPr id="15" name="TextBox 14"/>
+          <p:cNvSpPr txBox="1"/>
+          <p:nvPr/>
+        </p:nvSpPr>
+        <p:spPr>
+          <a:xfrm>
+            <a:off x="6446520" y="1664208"/>
+            <a:ext cx="5029200" cy="4389120"/>
+          </a:xfrm>
+          <a:prstGeom prst="rect">
+            <a:avLst/>
+          </a:prstGeom>
+          <a:noFill/>
+        </p:spPr>
+        <p:txBody>
+          <a:bodyPr wrap="square">
+            <a:spAutoFit/>
+          </a:bodyPr>
+          <a:lstStyle/>
+          <a:p>
+            <a:pPr algn="l">
+              <a:spcAft>
+                <a:spcPts val="1500"/>
+              </a:spcAft>
+            </a:pPr>
+            <a:r>
+              <a:rPr sz="1150" b="1">
+                <a:solidFill>
+                  <a:srgbClr val="0E8345"/>
+                </a:solidFill>
+                <a:latin typeface="Arial"/>
+              </a:rPr>
+              <a:t>ДАВУУ ТАЛУУД</a:t>
+            </a:r>
+          </a:p>
+          <a:p>
+            <a:pPr algn="l">
+              <a:spcAft>
+                <a:spcPts val="1300"/>
+              </a:spcAft>
+            </a:pPr>
+            <a:r>
+              <a:rPr sz="1300" b="1">
+                <a:solidFill>
+                  <a:srgbClr val="0E8345"/>
+                </a:solidFill>
+                <a:latin typeface="Arial"/>
+              </a:rPr>
+              <a:t>▪ </a:t>
+            </a:r>
+            <a:r>
+              <a:rPr sz="1300">
+                <a:solidFill>
+                  <a:srgbClr val="4A5560"/>
+                </a:solidFill>
+                <a:latin typeface="Arial"/>
+              </a:rPr>
+              <a:t>Цэвэр давхаргажилт — өргөтгөлд тэсвэртэй, тестлэгдэхүйц</a:t>
+            </a:r>
+          </a:p>
+          <a:p>
+            <a:pPr algn="l">
+              <a:spcAft>
+                <a:spcPts val="1300"/>
+              </a:spcAft>
+            </a:pPr>
+            <a:r>
+              <a:rPr sz="1300" b="1">
+                <a:solidFill>
+                  <a:srgbClr val="0E8345"/>
+                </a:solidFill>
+                <a:latin typeface="Arial"/>
+              </a:rPr>
+              <a:t>▪ </a:t>
+            </a:r>
+            <a:r>
+              <a:rPr sz="1300">
+                <a:solidFill>
+                  <a:srgbClr val="4A5560"/>
+                </a:solidFill>
+                <a:latin typeface="Arial"/>
+              </a:rPr>
+              <a:t>Гүн хамгаалалт — 4 давхар эрхийн шалгалт</a:t>
+            </a:r>
+          </a:p>
+          <a:p>
+            <a:pPr algn="l">
+              <a:spcAft>
+                <a:spcPts val="1300"/>
+              </a:spcAft>
+            </a:pPr>
+            <a:r>
+              <a:rPr sz="1300" b="1">
+                <a:solidFill>
+                  <a:srgbClr val="0E8345"/>
+                </a:solidFill>
+                <a:latin typeface="Arial"/>
+              </a:rPr>
+              <a:t>▪ </a:t>
+            </a:r>
+            <a:r>
+              <a:rPr sz="1300">
+                <a:solidFill>
+                  <a:srgbClr val="4A5560"/>
+                </a:solidFill>
+                <a:latin typeface="Arial"/>
+              </a:rPr>
+              <a:t>Workflow тохиргоогоор — процесс өөрчлөгдөхөд код засалтгүй</a:t>
+            </a:r>
+          </a:p>
+          <a:p>
+            <a:pPr algn="l">
+              <a:spcAft>
+                <a:spcPts val="1300"/>
+              </a:spcAft>
+            </a:pPr>
+            <a:r>
+              <a:rPr sz="1300" b="1">
+                <a:solidFill>
+                  <a:srgbClr val="0E8345"/>
+                </a:solidFill>
+                <a:latin typeface="Arial"/>
+              </a:rPr>
+              <a:t>▪ </a:t>
+            </a:r>
+            <a:r>
+              <a:rPr sz="1300">
+                <a:solidFill>
+                  <a:srgbClr val="4A5560"/>
+                </a:solidFill>
+                <a:latin typeface="Arial"/>
+              </a:rPr>
+              <a:t>Бүрэн аудитын мөр — өөрчлөлт бүр түүхтэй</a:t>
+            </a:r>
+          </a:p>
+          <a:p>
+            <a:pPr algn="l">
+              <a:spcAft>
+                <a:spcPts val="1300"/>
+              </a:spcAft>
+            </a:pPr>
+            <a:r>
+              <a:rPr sz="1300" b="1">
+                <a:solidFill>
+                  <a:srgbClr val="0E8345"/>
+                </a:solidFill>
+                <a:latin typeface="Arial"/>
+              </a:rPr>
+              <a:t>▪ </a:t>
+            </a:r>
+            <a:r>
+              <a:rPr sz="1300">
+                <a:solidFill>
+                  <a:srgbClr val="4A5560"/>
+                </a:solidFill>
+                <a:latin typeface="Arial"/>
+              </a:rPr>
+              <a:t>Нээлттэй эхийн стек — лицензийн зардалгүй</a:t>
+            </a:r>
+          </a:p>
+        </p:txBody>
+      </p:sp>
+    </p:spTree>
+  </p:cSld>
+  <p:clrMapOvr>
+    <a:masterClrMapping/>
+  </p:clrMapOvr>
+</p:sld>
+</file>
+
+<file path=ppt/slides/slide23.xml><?xml version="1.0" encoding="utf-8"?>
+<p:sld xmlns:a="http://schemas.openxmlformats.org/drawingml/2006/main" xmlns:p="http://schemas.openxmlformats.org/presentationml/2006/main" xmlns:r="http://schemas.openxmlformats.org/officeDocument/2006/relationships">
+  <p:cSld>
+    <p:spTree>
+      <p:nvGrpSpPr>
+        <p:cNvPr id="1" name=""/>
+        <p:cNvGrpSpPr/>
+        <p:nvPr/>
+      </p:nvGrpSpPr>
+      <p:grpSpPr/>
+      <p:sp>
+        <p:nvSpPr>
+          <p:cNvPr id="2" name="Rectangle 1"/>
+          <p:cNvSpPr/>
+          <p:nvPr/>
+        </p:nvSpPr>
+        <p:spPr>
+          <a:xfrm>
+            <a:off x="0" y="0"/>
+            <a:ext cx="12191695" cy="6858000"/>
+          </a:xfrm>
+          <a:prstGeom prst="rect">
+            <a:avLst/>
+          </a:prstGeom>
+          <a:solidFill>
+            <a:srgbClr val="F7F9FB"/>
+          </a:solidFill>
+          <a:ln>
+            <a:noFill/>
+          </a:ln>
+          <a:effectLst/>
+        </p:spPr>
+        <p:style>
+          <a:lnRef idx="1">
+            <a:schemeClr val="accent1"/>
+          </a:lnRef>
+          <a:fillRef idx="3">
+            <a:schemeClr val="accent1"/>
+          </a:fillRef>
+          <a:effectRef idx="2">
+            <a:schemeClr val="accent1"/>
+          </a:effectRef>
+          <a:fontRef idx="minor">
+            <a:schemeClr val="lt1"/>
+          </a:fontRef>
+        </p:style>
+        <p:txBody>
+          <a:bodyPr rtlCol="0" anchor="ctr"/>
+          <a:lstStyle/>
+          <a:p>
+            <a:pPr algn="ctr"/>
+          </a:p>
+        </p:txBody>
+      </p:sp>
+      <p:sp>
+        <p:nvSpPr>
+          <p:cNvPr id="3" name="Rounded Rectangle 2"/>
+          <p:cNvSpPr/>
+          <p:nvPr/>
+        </p:nvSpPr>
+        <p:spPr>
+          <a:xfrm>
+            <a:off x="502920" y="384048"/>
+            <a:ext cx="658368" cy="658368"/>
+          </a:xfrm>
+          <a:prstGeom prst="roundRect">
+            <a:avLst>
+              <a:gd name="adj" fmla="val 18000"/>
+            </a:avLst>
+          </a:prstGeom>
+          <a:solidFill>
+            <a:srgbClr val="0E2440"/>
+          </a:solidFill>
+          <a:ln>
+            <a:noFill/>
+          </a:ln>
+          <a:effectLst/>
+        </p:spPr>
+        <p:style>
+          <a:lnRef idx="1">
+            <a:schemeClr val="accent1"/>
+          </a:lnRef>
+          <a:fillRef idx="3">
+            <a:schemeClr val="accent1"/>
+          </a:fillRef>
+          <a:effectRef idx="2">
+            <a:schemeClr val="accent1"/>
+          </a:effectRef>
+          <a:fontRef idx="minor">
+            <a:schemeClr val="lt1"/>
+          </a:fontRef>
+        </p:style>
+        <p:txBody>
+          <a:bodyPr rtlCol="0" anchor="ctr" lIns="0" rIns="0" tIns="0" bIns="0"/>
+          <a:lstStyle/>
+          <a:p>
+            <a:pPr algn="ctr">
+              <a:spcAft>
+                <a:spcPts val="400"/>
+              </a:spcAft>
+            </a:pPr>
+            <a:r>
+              <a:rPr sz="1500" b="1">
+                <a:solidFill>
+                  <a:srgbClr val="FFFFFF"/>
+                </a:solidFill>
+                <a:latin typeface="Arial"/>
+              </a:rPr>
+              <a:t>14</a:t>
+            </a:r>
+          </a:p>
+        </p:txBody>
+      </p:sp>
+      <p:sp>
+        <p:nvSpPr>
+          <p:cNvPr id="4" name="TextBox 3"/>
+          <p:cNvSpPr txBox="1"/>
+          <p:nvPr/>
+        </p:nvSpPr>
+        <p:spPr>
+          <a:xfrm>
+            <a:off x="1353312" y="310896"/>
+            <a:ext cx="10332720" cy="1005840"/>
+          </a:xfrm>
+          <a:prstGeom prst="rect">
+            <a:avLst/>
+          </a:prstGeom>
+          <a:noFill/>
+        </p:spPr>
+        <p:txBody>
+          <a:bodyPr wrap="square">
+            <a:spAutoFit/>
+          </a:bodyPr>
+          <a:lstStyle/>
+          <a:p>
+            <a:pPr algn="l">
+              <a:spcAft>
+                <a:spcPts val="200"/>
+              </a:spcAft>
+            </a:pPr>
+            <a:r>
+              <a:rPr sz="2400" b="1">
+                <a:solidFill>
+                  <a:srgbClr val="0E2440"/>
+                </a:solidFill>
+                <a:latin typeface="Arial"/>
+              </a:rPr>
+              <a:t>Нэмэгдэх боломжууд — эрэмбэлсэн санал</a:t>
+            </a:r>
+          </a:p>
+        </p:txBody>
+      </p:sp>
+      <p:sp>
+        <p:nvSpPr>
+          <p:cNvPr id="5" name="Rectangle 4"/>
+          <p:cNvSpPr/>
+          <p:nvPr/>
+        </p:nvSpPr>
+        <p:spPr>
+          <a:xfrm>
+            <a:off x="502920" y="1261872"/>
+            <a:ext cx="11183112" cy="20320"/>
+          </a:xfrm>
+          <a:prstGeom prst="rect">
+            <a:avLst/>
+          </a:prstGeom>
+          <a:solidFill>
+            <a:srgbClr val="DDE3E9"/>
+          </a:solidFill>
+          <a:ln>
+            <a:noFill/>
+          </a:ln>
+          <a:effectLst/>
+        </p:spPr>
+        <p:style>
+          <a:lnRef idx="1">
+            <a:schemeClr val="accent1"/>
+          </a:lnRef>
+          <a:fillRef idx="3">
+            <a:schemeClr val="accent1"/>
+          </a:fillRef>
+          <a:effectRef idx="2">
+            <a:schemeClr val="accent1"/>
+          </a:effectRef>
+          <a:fontRef idx="minor">
+            <a:schemeClr val="lt1"/>
+          </a:fontRef>
+        </p:style>
+        <p:txBody>
+          <a:bodyPr rtlCol="0" anchor="ctr"/>
+          <a:lstStyle/>
+          <a:p>
+            <a:pPr algn="ctr"/>
+          </a:p>
+        </p:txBody>
+      </p:sp>
+      <p:sp>
+        <p:nvSpPr>
+          <p:cNvPr id="6" name="Rectangle 5"/>
+          <p:cNvSpPr/>
+          <p:nvPr/>
+        </p:nvSpPr>
+        <p:spPr>
+          <a:xfrm>
+            <a:off x="502920" y="1243584"/>
+            <a:ext cx="822960" cy="35560"/>
+          </a:xfrm>
+          <a:prstGeom prst="rect">
+            <a:avLst/>
+          </a:prstGeom>
+          <a:solidFill>
+            <a:srgbClr val="02C0CE"/>
+          </a:solidFill>
+          <a:ln>
+            <a:noFill/>
+          </a:ln>
+          <a:effectLst/>
+        </p:spPr>
+        <p:style>
+          <a:lnRef idx="1">
+            <a:schemeClr val="accent1"/>
+          </a:lnRef>
+          <a:fillRef idx="3">
+            <a:schemeClr val="accent1"/>
+          </a:fillRef>
+          <a:effectRef idx="2">
+            <a:schemeClr val="accent1"/>
+          </a:effectRef>
+          <a:fontRef idx="minor">
+            <a:schemeClr val="lt1"/>
+          </a:fontRef>
+        </p:style>
+        <p:txBody>
+          <a:bodyPr rtlCol="0" anchor="ctr"/>
+          <a:lstStyle/>
+          <a:p>
+            <a:pPr algn="ctr"/>
+          </a:p>
+        </p:txBody>
+      </p:sp>
+      <p:sp>
+        <p:nvSpPr>
+          <p:cNvPr id="7" name="Rectangle 6"/>
+          <p:cNvSpPr/>
+          <p:nvPr/>
+        </p:nvSpPr>
+        <p:spPr>
+          <a:xfrm>
+            <a:off x="502920" y="6455664"/>
+            <a:ext cx="11183112" cy="12700"/>
+          </a:xfrm>
+          <a:prstGeom prst="rect">
+            <a:avLst/>
+          </a:prstGeom>
+          <a:solidFill>
+            <a:srgbClr val="DDE3E9"/>
+          </a:solidFill>
+          <a:ln>
+            <a:noFill/>
+          </a:ln>
+          <a:effectLst/>
+        </p:spPr>
+        <p:style>
+          <a:lnRef idx="1">
+            <a:schemeClr val="accent1"/>
+          </a:lnRef>
+          <a:fillRef idx="3">
+            <a:schemeClr val="accent1"/>
+          </a:fillRef>
+          <a:effectRef idx="2">
+            <a:schemeClr val="accent1"/>
+          </a:effectRef>
+          <a:fontRef idx="minor">
+            <a:schemeClr val="lt1"/>
+          </a:fontRef>
+        </p:style>
+        <p:txBody>
+          <a:bodyPr rtlCol="0" anchor="ctr"/>
+          <a:lstStyle/>
+          <a:p>
+            <a:pPr algn="ctr"/>
+          </a:p>
+        </p:txBody>
+      </p:sp>
+      <p:sp>
+        <p:nvSpPr>
+          <p:cNvPr id="8" name="TextBox 7"/>
+          <p:cNvSpPr txBox="1"/>
+          <p:nvPr/>
+        </p:nvSpPr>
+        <p:spPr>
+          <a:xfrm>
+            <a:off x="502920" y="6492240"/>
+            <a:ext cx="8229600" cy="320040"/>
+          </a:xfrm>
+          <a:prstGeom prst="rect">
+            <a:avLst/>
+          </a:prstGeom>
+          <a:noFill/>
+        </p:spPr>
+        <p:txBody>
+          <a:bodyPr wrap="square">
+            <a:spAutoFit/>
+          </a:bodyPr>
+          <a:lstStyle/>
+          <a:p>
+            <a:pPr algn="l">
+              <a:spcAft>
+                <a:spcPts val="400"/>
+              </a:spcAft>
+            </a:pPr>
+            <a:r>
+              <a:rPr sz="900" b="0">
+                <a:solidFill>
+                  <a:srgbClr val="8A929A"/>
+                </a:solidFill>
+                <a:latin typeface="Arial"/>
+              </a:rPr>
+              <a:t>Газар чөлөөлөлт, нөхөх олговрын нэгдсэн систем  ·  Техникийн тайлан</a:t>
+            </a:r>
+          </a:p>
+        </p:txBody>
+      </p:sp>
+      <p:sp>
+        <p:nvSpPr>
+          <p:cNvPr id="9" name="TextBox 8"/>
+          <p:cNvSpPr txBox="1"/>
+          <p:nvPr/>
+        </p:nvSpPr>
+        <p:spPr>
+          <a:xfrm>
+            <a:off x="10972800" y="6492240"/>
+            <a:ext cx="731520" cy="320040"/>
+          </a:xfrm>
+          <a:prstGeom prst="rect">
+            <a:avLst/>
+          </a:prstGeom>
+          <a:noFill/>
+        </p:spPr>
+        <p:txBody>
+          <a:bodyPr wrap="square">
+            <a:spAutoFit/>
+          </a:bodyPr>
+          <a:lstStyle/>
+          <a:p>
+            <a:pPr algn="r">
+              <a:spcAft>
+                <a:spcPts val="400"/>
+              </a:spcAft>
+            </a:pPr>
+            <a:r>
+              <a:rPr sz="1000" b="1">
+                <a:solidFill>
+                  <a:srgbClr val="0E2440"/>
+                </a:solidFill>
+                <a:latin typeface="Arial"/>
+              </a:rPr>
+              <a:t>22</a:t>
             </a:r>
           </a:p>
         </p:txBody>
@@ -25121,7 +28345,7 @@
 </p:sld>
 </file>
 
-<file path=ppt/slides/slide22.xml><?xml version="1.0" encoding="utf-8"?>
+<file path=ppt/slides/slide24.xml><?xml version="1.0" encoding="utf-8"?>
 <p:sld xmlns:a="http://schemas.openxmlformats.org/drawingml/2006/main" xmlns:p="http://schemas.openxmlformats.org/presentationml/2006/main" xmlns:r="http://schemas.openxmlformats.org/officeDocument/2006/relationships">
   <p:cSld>
     <p:spTree>

--- a/system-tailan.pptx
+++ b/system-tailan.pptx
@@ -17597,7 +17597,7 @@
         <p:spPr>
           <a:xfrm>
             <a:off x="502920" y="1554480"/>
-            <a:ext cx="2644902" cy="1234440"/>
+            <a:ext cx="2075688" cy="1234440"/>
           </a:xfrm>
           <a:prstGeom prst="roundRect">
             <a:avLst>
@@ -17689,7 +17689,7 @@
         <p:spPr>
           <a:xfrm>
             <a:off x="630936" y="1773936"/>
-            <a:ext cx="2370582" cy="960120"/>
+            <a:ext cx="1801368" cy="960120"/>
           </a:xfrm>
           <a:prstGeom prst="rect">
             <a:avLst/>
@@ -17708,7 +17708,7 @@
               </a:spcAft>
             </a:pPr>
             <a:r>
-              <a:rPr sz="2800" b="1">
+              <a:rPr sz="2400" b="1">
                 <a:solidFill>
                   <a:srgbClr val="0E2440"/>
                 </a:solidFill>
@@ -17743,8 +17743,8 @@
         </p:nvSpPr>
         <p:spPr>
           <a:xfrm>
-            <a:off x="3348990" y="1554480"/>
-            <a:ext cx="2644902" cy="1234440"/>
+            <a:off x="2779776" y="1554480"/>
+            <a:ext cx="2075688" cy="1234440"/>
           </a:xfrm>
           <a:prstGeom prst="roundRect">
             <a:avLst>
@@ -17791,7 +17791,7 @@
         </p:nvSpPr>
         <p:spPr>
           <a:xfrm>
-            <a:off x="3495294" y="1700784"/>
+            <a:off x="2926080" y="1700784"/>
             <a:ext cx="457200" cy="38100"/>
           </a:xfrm>
           <a:prstGeom prst="rect">
@@ -17835,8 +17835,8 @@
         </p:nvSpPr>
         <p:spPr>
           <a:xfrm>
-            <a:off x="3477006" y="1773936"/>
-            <a:ext cx="2370582" cy="960120"/>
+            <a:off x="2907792" y="1773936"/>
+            <a:ext cx="1801368" cy="960120"/>
           </a:xfrm>
           <a:prstGeom prst="rect">
             <a:avLst/>
@@ -17855,13 +17855,13 @@
               </a:spcAft>
             </a:pPr>
             <a:r>
-              <a:rPr sz="2800" b="1">
+              <a:rPr sz="2400" b="1">
                 <a:solidFill>
                   <a:srgbClr val="0E2440"/>
                 </a:solidFill>
                 <a:latin typeface="Arial"/>
               </a:rPr>
-              <a:t>13</a:t>
+              <a:t>14</a:t>
             </a:r>
           </a:p>
           <a:p>
@@ -17877,7 +17877,7 @@
                 </a:solidFill>
                 <a:latin typeface="Arial"/>
               </a:rPr>
-              <a:t>Бүрэн хийгдсэн (26%)</a:t>
+              <a:t>Бүрэн хийгдсэн (28%)</a:t>
             </a:r>
           </a:p>
         </p:txBody>
@@ -17890,8 +17890,8 @@
         </p:nvSpPr>
         <p:spPr>
           <a:xfrm>
-            <a:off x="6195060" y="1554480"/>
-            <a:ext cx="2644902" cy="1234440"/>
+            <a:off x="5056632" y="1554480"/>
+            <a:ext cx="2075688" cy="1234440"/>
           </a:xfrm>
           <a:prstGeom prst="roundRect">
             <a:avLst>
@@ -17938,7 +17938,7 @@
         </p:nvSpPr>
         <p:spPr>
           <a:xfrm>
-            <a:off x="6341364" y="1700784"/>
+            <a:off x="5202936" y="1700784"/>
             <a:ext cx="457200" cy="38100"/>
           </a:xfrm>
           <a:prstGeom prst="rect">
@@ -17982,8 +17982,8 @@
         </p:nvSpPr>
         <p:spPr>
           <a:xfrm>
-            <a:off x="6323076" y="1773936"/>
-            <a:ext cx="2370582" cy="960120"/>
+            <a:off x="5184648" y="1773936"/>
+            <a:ext cx="1801368" cy="960120"/>
           </a:xfrm>
           <a:prstGeom prst="rect">
             <a:avLst/>
@@ -18002,7 +18002,7 @@
               </a:spcAft>
             </a:pPr>
             <a:r>
-              <a:rPr sz="2800" b="1">
+              <a:rPr sz="2400" b="1">
                 <a:solidFill>
                   <a:srgbClr val="0E2440"/>
                 </a:solidFill>
@@ -18037,8 +18037,8 @@
         </p:nvSpPr>
         <p:spPr>
           <a:xfrm>
-            <a:off x="9041130" y="1554480"/>
-            <a:ext cx="2644902" cy="1234440"/>
+            <a:off x="7333488" y="1554480"/>
+            <a:ext cx="2075688" cy="1234440"/>
           </a:xfrm>
           <a:prstGeom prst="roundRect">
             <a:avLst>
@@ -18085,7 +18085,7 @@
         </p:nvSpPr>
         <p:spPr>
           <a:xfrm>
-            <a:off x="9187434" y="1700784"/>
+            <a:off x="7479792" y="1700784"/>
             <a:ext cx="457200" cy="38100"/>
           </a:xfrm>
           <a:prstGeom prst="rect">
@@ -18129,8 +18129,8 @@
         </p:nvSpPr>
         <p:spPr>
           <a:xfrm>
-            <a:off x="9169146" y="1773936"/>
-            <a:ext cx="2370582" cy="960120"/>
+            <a:off x="7461504" y="1773936"/>
+            <a:ext cx="1801368" cy="960120"/>
           </a:xfrm>
           <a:prstGeom prst="rect">
             <a:avLst/>
@@ -18149,13 +18149,13 @@
               </a:spcAft>
             </a:pPr>
             <a:r>
-              <a:rPr sz="2800" b="1">
+              <a:rPr sz="2400" b="1">
                 <a:solidFill>
                   <a:srgbClr val="0E2440"/>
                 </a:solidFill>
                 <a:latin typeface="Arial"/>
               </a:rPr>
-              <a:t>10</a:t>
+              <a:t>4</a:t>
             </a:r>
           </a:p>
           <a:p>
@@ -18171,21 +18171,168 @@
                 </a:solidFill>
                 <a:latin typeface="Arial"/>
               </a:rPr>
-              <a:t>Хүлээгдэж байгаа (20%)</a:t>
-            </a:r>
-          </a:p>
-        </p:txBody>
-      </p:sp>
-      <p:sp>
-        <p:nvSpPr>
-          <p:cNvPr id="22" name="Rectangle 21"/>
+              <a:t>ГУС-аас хамааралтай хүлээгдэж (8%)</a:t>
+            </a:r>
+          </a:p>
+        </p:txBody>
+      </p:sp>
+      <p:sp>
+        <p:nvSpPr>
+          <p:cNvPr id="22" name="Rounded Rectangle 21"/>
           <p:cNvSpPr/>
           <p:nvPr/>
         </p:nvSpPr>
         <p:spPr>
           <a:xfrm>
-            <a:off x="649224" y="1700784"/>
+            <a:off x="9610344" y="1554480"/>
+            <a:ext cx="2075688" cy="1234440"/>
+          </a:xfrm>
+          <a:prstGeom prst="roundRect">
+            <a:avLst>
+              <a:gd name="adj" fmla="val 8000"/>
+            </a:avLst>
+          </a:prstGeom>
+          <a:solidFill>
+            <a:srgbClr val="FFFFFF"/>
+          </a:solidFill>
+          <a:ln w="9525">
+            <a:solidFill>
+              <a:srgbClr val="DDE3E9"/>
+            </a:solidFill>
+          </a:ln>
+          <a:effectLst/>
+        </p:spPr>
+        <p:style>
+          <a:lnRef idx="1">
+            <a:schemeClr val="accent1"/>
+          </a:lnRef>
+          <a:fillRef idx="3">
+            <a:schemeClr val="accent1"/>
+          </a:fillRef>
+          <a:effectRef idx="2">
+            <a:schemeClr val="accent1"/>
+          </a:effectRef>
+          <a:fontRef idx="minor">
+            <a:schemeClr val="lt1"/>
+          </a:fontRef>
+        </p:style>
+        <p:txBody>
+          <a:bodyPr rtlCol="0" anchor="ctr"/>
+          <a:lstStyle/>
+          <a:p>
+            <a:pPr algn="ctr"/>
+          </a:p>
+        </p:txBody>
+      </p:sp>
+      <p:sp>
+        <p:nvSpPr>
+          <p:cNvPr id="23" name="Rectangle 22"/>
+          <p:cNvSpPr/>
+          <p:nvPr/>
+        </p:nvSpPr>
+        <p:spPr>
+          <a:xfrm>
+            <a:off x="9756648" y="1700784"/>
             <a:ext cx="457200" cy="38100"/>
+          </a:xfrm>
+          <a:prstGeom prst="rect">
+            <a:avLst/>
+          </a:prstGeom>
+          <a:solidFill>
+            <a:srgbClr val="02C0CE"/>
+          </a:solidFill>
+          <a:ln>
+            <a:noFill/>
+          </a:ln>
+          <a:effectLst/>
+        </p:spPr>
+        <p:style>
+          <a:lnRef idx="1">
+            <a:schemeClr val="accent1"/>
+          </a:lnRef>
+          <a:fillRef idx="3">
+            <a:schemeClr val="accent1"/>
+          </a:fillRef>
+          <a:effectRef idx="2">
+            <a:schemeClr val="accent1"/>
+          </a:effectRef>
+          <a:fontRef idx="minor">
+            <a:schemeClr val="lt1"/>
+          </a:fontRef>
+        </p:style>
+        <p:txBody>
+          <a:bodyPr rtlCol="0" anchor="ctr"/>
+          <a:lstStyle/>
+          <a:p>
+            <a:pPr algn="ctr"/>
+          </a:p>
+        </p:txBody>
+      </p:sp>
+      <p:sp>
+        <p:nvSpPr>
+          <p:cNvPr id="24" name="TextBox 23"/>
+          <p:cNvSpPr txBox="1"/>
+          <p:nvPr/>
+        </p:nvSpPr>
+        <p:spPr>
+          <a:xfrm>
+            <a:off x="9738360" y="1773936"/>
+            <a:ext cx="1801368" cy="960120"/>
+          </a:xfrm>
+          <a:prstGeom prst="rect">
+            <a:avLst/>
+          </a:prstGeom>
+          <a:noFill/>
+        </p:spPr>
+        <p:txBody>
+          <a:bodyPr wrap="square">
+            <a:spAutoFit/>
+          </a:bodyPr>
+          <a:lstStyle/>
+          <a:p>
+            <a:pPr algn="l">
+              <a:spcAft>
+                <a:spcPts val="300"/>
+              </a:spcAft>
+            </a:pPr>
+            <a:r>
+              <a:rPr sz="2400" b="1">
+                <a:solidFill>
+                  <a:srgbClr val="0E2440"/>
+                </a:solidFill>
+                <a:latin typeface="Arial"/>
+              </a:rPr>
+              <a:t>5</a:t>
+            </a:r>
+          </a:p>
+          <a:p>
+            <a:pPr algn="l">
+              <a:spcAft>
+                <a:spcPts val="400"/>
+              </a:spcAft>
+            </a:pPr>
+            <a:r>
+              <a:rPr sz="1150" b="0">
+                <a:solidFill>
+                  <a:srgbClr val="4A5560"/>
+                </a:solidFill>
+                <a:latin typeface="Arial"/>
+              </a:rPr>
+              <a:t>Бусад хүлээгдэж байгаа (10%)</a:t>
+            </a:r>
+          </a:p>
+        </p:txBody>
+      </p:sp>
+      <p:sp>
+        <p:nvSpPr>
+          <p:cNvPr id="25" name="Rectangle 24"/>
+          <p:cNvSpPr/>
+          <p:nvPr/>
+        </p:nvSpPr>
+        <p:spPr>
+          <a:xfrm>
+            <a:off x="630936" y="1700784"/>
+            <a:ext cx="365760" cy="38100"/>
           </a:xfrm>
           <a:prstGeom prst="rect">
             <a:avLst/>
@@ -18222,14 +18369,14 @@
       </p:sp>
       <p:sp>
         <p:nvSpPr>
-          <p:cNvPr id="23" name="Rectangle 22"/>
+          <p:cNvPr id="26" name="Rectangle 25"/>
           <p:cNvSpPr/>
           <p:nvPr/>
         </p:nvSpPr>
         <p:spPr>
           <a:xfrm>
-            <a:off x="3495294" y="1700784"/>
-            <a:ext cx="457200" cy="38100"/>
+            <a:off x="2900476" y="1700784"/>
+            <a:ext cx="365760" cy="38100"/>
           </a:xfrm>
           <a:prstGeom prst="rect">
             <a:avLst/>
@@ -18266,14 +18413,14 @@
       </p:sp>
       <p:sp>
         <p:nvSpPr>
-          <p:cNvPr id="24" name="Rectangle 23"/>
+          <p:cNvPr id="27" name="Rectangle 26"/>
           <p:cNvSpPr/>
           <p:nvPr/>
         </p:nvSpPr>
         <p:spPr>
           <a:xfrm>
-            <a:off x="6341364" y="1700784"/>
-            <a:ext cx="457200" cy="38100"/>
+            <a:off x="5170017" y="1700784"/>
+            <a:ext cx="365760" cy="38100"/>
           </a:xfrm>
           <a:prstGeom prst="rect">
             <a:avLst/>
@@ -18310,14 +18457,58 @@
       </p:sp>
       <p:sp>
         <p:nvSpPr>
-          <p:cNvPr id="25" name="Rectangle 24"/>
+          <p:cNvPr id="28" name="Rectangle 27"/>
           <p:cNvSpPr/>
           <p:nvPr/>
         </p:nvSpPr>
         <p:spPr>
           <a:xfrm>
-            <a:off x="9187434" y="1700784"/>
-            <a:ext cx="457200" cy="38100"/>
+            <a:off x="7439558" y="1700784"/>
+            <a:ext cx="365760" cy="38100"/>
+          </a:xfrm>
+          <a:prstGeom prst="rect">
+            <a:avLst/>
+          </a:prstGeom>
+          <a:solidFill>
+            <a:srgbClr val="2A78D6"/>
+          </a:solidFill>
+          <a:ln>
+            <a:noFill/>
+          </a:ln>
+          <a:effectLst/>
+        </p:spPr>
+        <p:style>
+          <a:lnRef idx="1">
+            <a:schemeClr val="accent1"/>
+          </a:lnRef>
+          <a:fillRef idx="3">
+            <a:schemeClr val="accent1"/>
+          </a:fillRef>
+          <a:effectRef idx="2">
+            <a:schemeClr val="accent1"/>
+          </a:effectRef>
+          <a:fontRef idx="minor">
+            <a:schemeClr val="lt1"/>
+          </a:fontRef>
+        </p:style>
+        <p:txBody>
+          <a:bodyPr rtlCol="0" anchor="ctr"/>
+          <a:lstStyle/>
+          <a:p>
+            <a:pPr algn="ctr"/>
+          </a:p>
+        </p:txBody>
+      </p:sp>
+      <p:sp>
+        <p:nvSpPr>
+          <p:cNvPr id="29" name="Rectangle 28"/>
+          <p:cNvSpPr/>
+          <p:nvPr/>
+        </p:nvSpPr>
+        <p:spPr>
+          <a:xfrm>
+            <a:off x="9709099" y="1700784"/>
+            <a:ext cx="365760" cy="38100"/>
           </a:xfrm>
           <a:prstGeom prst="rect">
             <a:avLst/>
@@ -18354,7 +18545,7 @@
       </p:sp>
       <p:sp>
         <p:nvSpPr>
-          <p:cNvPr id="26" name="TextBox 25"/>
+          <p:cNvPr id="30" name="TextBox 29"/>
           <p:cNvSpPr txBox="1"/>
           <p:nvPr/>
         </p:nvSpPr>
@@ -18393,13 +18584,13 @@
       </p:sp>
       <p:sp>
         <p:nvSpPr>
-          <p:cNvPr id="27" name="Rounded Rectangle 26"/>
+          <p:cNvPr id="31" name="Rounded Rectangle 30"/>
           <p:cNvSpPr/>
           <p:nvPr/>
         </p:nvSpPr>
         <p:spPr>
           <a:xfrm>
-            <a:off x="3840480" y="3145536"/>
+            <a:off x="2103120" y="3145536"/>
             <a:ext cx="146304" cy="146304"/>
           </a:xfrm>
           <a:prstGeom prst="roundRect">
@@ -18439,14 +18630,14 @@
       </p:sp>
       <p:sp>
         <p:nvSpPr>
-          <p:cNvPr id="28" name="TextBox 27"/>
+          <p:cNvPr id="32" name="TextBox 31"/>
           <p:cNvSpPr txBox="1"/>
           <p:nvPr/>
         </p:nvSpPr>
         <p:spPr>
           <a:xfrm>
-            <a:off x="4059936" y="3063240"/>
-            <a:ext cx="2377440" cy="320040"/>
+            <a:off x="2322576" y="3063240"/>
+            <a:ext cx="2286000" cy="320040"/>
           </a:xfrm>
           <a:prstGeom prst="rect">
             <a:avLst/>
@@ -18465,7 +18656,7 @@
               </a:spcAft>
             </a:pPr>
             <a:r>
-              <a:rPr sz="1050" b="0">
+              <a:rPr sz="950" b="0">
                 <a:solidFill>
                   <a:srgbClr val="4A5560"/>
                 </a:solidFill>
@@ -18478,13 +18669,13 @@
       </p:sp>
       <p:sp>
         <p:nvSpPr>
-          <p:cNvPr id="29" name="Rounded Rectangle 28"/>
+          <p:cNvPr id="33" name="Rounded Rectangle 32"/>
           <p:cNvSpPr/>
           <p:nvPr/>
         </p:nvSpPr>
         <p:spPr>
           <a:xfrm>
-            <a:off x="6492240" y="3145536"/>
+            <a:off x="4434840" y="3145536"/>
             <a:ext cx="146304" cy="146304"/>
           </a:xfrm>
           <a:prstGeom prst="roundRect">
@@ -18524,14 +18715,14 @@
       </p:sp>
       <p:sp>
         <p:nvSpPr>
-          <p:cNvPr id="30" name="TextBox 29"/>
+          <p:cNvPr id="34" name="TextBox 33"/>
           <p:cNvSpPr txBox="1"/>
           <p:nvPr/>
         </p:nvSpPr>
         <p:spPr>
           <a:xfrm>
-            <a:off x="6711696" y="3063240"/>
-            <a:ext cx="2377440" cy="320040"/>
+            <a:off x="4654296" y="3063240"/>
+            <a:ext cx="2286000" cy="320040"/>
           </a:xfrm>
           <a:prstGeom prst="rect">
             <a:avLst/>
@@ -18550,7 +18741,7 @@
               </a:spcAft>
             </a:pPr>
             <a:r>
-              <a:rPr sz="1050" b="0">
+              <a:rPr sz="950" b="0">
                 <a:solidFill>
                   <a:srgbClr val="4A5560"/>
                 </a:solidFill>
@@ -18563,13 +18754,98 @@
       </p:sp>
       <p:sp>
         <p:nvSpPr>
-          <p:cNvPr id="31" name="Rounded Rectangle 30"/>
+          <p:cNvPr id="35" name="Rounded Rectangle 34"/>
           <p:cNvSpPr/>
           <p:nvPr/>
         </p:nvSpPr>
         <p:spPr>
           <a:xfrm>
-            <a:off x="9144000" y="3145536"/>
+            <a:off x="6766560" y="3145536"/>
+            <a:ext cx="146304" cy="146304"/>
+          </a:xfrm>
+          <a:prstGeom prst="roundRect">
+            <a:avLst>
+              <a:gd name="adj" fmla="val 30000"/>
+            </a:avLst>
+          </a:prstGeom>
+          <a:solidFill>
+            <a:srgbClr val="2A78D6"/>
+          </a:solidFill>
+          <a:ln>
+            <a:noFill/>
+          </a:ln>
+          <a:effectLst/>
+        </p:spPr>
+        <p:style>
+          <a:lnRef idx="1">
+            <a:schemeClr val="accent1"/>
+          </a:lnRef>
+          <a:fillRef idx="3">
+            <a:schemeClr val="accent1"/>
+          </a:fillRef>
+          <a:effectRef idx="2">
+            <a:schemeClr val="accent1"/>
+          </a:effectRef>
+          <a:fontRef idx="minor">
+            <a:schemeClr val="lt1"/>
+          </a:fontRef>
+        </p:style>
+        <p:txBody>
+          <a:bodyPr rtlCol="0" anchor="ctr"/>
+          <a:lstStyle/>
+          <a:p>
+            <a:pPr algn="ctr"/>
+          </a:p>
+        </p:txBody>
+      </p:sp>
+      <p:sp>
+        <p:nvSpPr>
+          <p:cNvPr id="36" name="TextBox 35"/>
+          <p:cNvSpPr txBox="1"/>
+          <p:nvPr/>
+        </p:nvSpPr>
+        <p:spPr>
+          <a:xfrm>
+            <a:off x="6986016" y="3063240"/>
+            <a:ext cx="2286000" cy="320040"/>
+          </a:xfrm>
+          <a:prstGeom prst="rect">
+            <a:avLst/>
+          </a:prstGeom>
+          <a:noFill/>
+        </p:spPr>
+        <p:txBody>
+          <a:bodyPr wrap="square">
+            <a:spAutoFit/>
+          </a:bodyPr>
+          <a:lstStyle/>
+          <a:p>
+            <a:pPr algn="l">
+              <a:spcAft>
+                <a:spcPts val="400"/>
+              </a:spcAft>
+            </a:pPr>
+            <a:r>
+              <a:rPr sz="950" b="0">
+                <a:solidFill>
+                  <a:srgbClr val="4A5560"/>
+                </a:solidFill>
+                <a:latin typeface="Arial"/>
+              </a:rPr>
+              <a:t>ГУС-аас хамааралтай хүлээгдэж</a:t>
+            </a:r>
+          </a:p>
+        </p:txBody>
+      </p:sp>
+      <p:sp>
+        <p:nvSpPr>
+          <p:cNvPr id="37" name="Rounded Rectangle 36"/>
+          <p:cNvSpPr/>
+          <p:nvPr/>
+        </p:nvSpPr>
+        <p:spPr>
+          <a:xfrm>
+            <a:off x="9098280" y="3145536"/>
             <a:ext cx="146304" cy="146304"/>
           </a:xfrm>
           <a:prstGeom prst="roundRect">
@@ -18609,14 +18885,14 @@
       </p:sp>
       <p:sp>
         <p:nvSpPr>
-          <p:cNvPr id="32" name="TextBox 31"/>
+          <p:cNvPr id="38" name="TextBox 37"/>
           <p:cNvSpPr txBox="1"/>
           <p:nvPr/>
         </p:nvSpPr>
         <p:spPr>
           <a:xfrm>
-            <a:off x="9363456" y="3063240"/>
-            <a:ext cx="2377440" cy="320040"/>
+            <a:off x="9317736" y="3063240"/>
+            <a:ext cx="2286000" cy="320040"/>
           </a:xfrm>
           <a:prstGeom prst="rect">
             <a:avLst/>
@@ -18635,20 +18911,20 @@
               </a:spcAft>
             </a:pPr>
             <a:r>
-              <a:rPr sz="1050" b="0">
+              <a:rPr sz="950" b="0">
                 <a:solidFill>
                   <a:srgbClr val="4A5560"/>
                 </a:solidFill>
                 <a:latin typeface="Arial"/>
               </a:rPr>
-              <a:t>Хүлээгдэж байгаа</a:t>
-            </a:r>
-          </a:p>
-        </p:txBody>
-      </p:sp>
-      <p:sp>
-        <p:nvSpPr>
-          <p:cNvPr id="33" name="TextBox 32"/>
+              <a:t>Бусад хүлээгдэж байгаа</a:t>
+            </a:r>
+          </a:p>
+        </p:txBody>
+      </p:sp>
+      <p:sp>
+        <p:nvSpPr>
+          <p:cNvPr id="39" name="TextBox 38"/>
           <p:cNvSpPr txBox="1"/>
           <p:nvPr/>
         </p:nvSpPr>
@@ -18687,7 +18963,7 @@
       </p:sp>
       <p:sp>
         <p:nvSpPr>
-          <p:cNvPr id="34" name="Rounded Rectangle 33"/>
+          <p:cNvPr id="40" name="Rounded Rectangle 39"/>
           <p:cNvSpPr/>
           <p:nvPr/>
         </p:nvSpPr>
@@ -18746,7 +19022,7 @@
       </p:sp>
       <p:sp>
         <p:nvSpPr>
-          <p:cNvPr id="35" name="TextBox 34"/>
+          <p:cNvPr id="41" name="TextBox 40"/>
           <p:cNvSpPr txBox="1"/>
           <p:nvPr/>
         </p:nvSpPr>
@@ -18785,7 +19061,7 @@
       </p:sp>
       <p:sp>
         <p:nvSpPr>
-          <p:cNvPr id="36" name="TextBox 35"/>
+          <p:cNvPr id="42" name="TextBox 41"/>
           <p:cNvSpPr txBox="1"/>
           <p:nvPr/>
         </p:nvSpPr>
@@ -18824,14 +19100,14 @@
       </p:sp>
       <p:sp>
         <p:nvSpPr>
-          <p:cNvPr id="37" name="Rounded Rectangle 36"/>
+          <p:cNvPr id="43" name="Rounded Rectangle 42"/>
           <p:cNvSpPr/>
           <p:nvPr/>
         </p:nvSpPr>
         <p:spPr>
           <a:xfrm>
             <a:off x="3291840" y="4178808"/>
-            <a:ext cx="1572580" cy="384048"/>
+            <a:ext cx="1717360" cy="384048"/>
           </a:xfrm>
           <a:prstGeom prst="roundRect">
             <a:avLst>
@@ -18876,20 +19152,20 @@
                 </a:solidFill>
                 <a:latin typeface="Arial"/>
               </a:rPr>
-              <a:t>11</a:t>
-            </a:r>
-          </a:p>
-        </p:txBody>
-      </p:sp>
-      <p:sp>
-        <p:nvSpPr>
-          <p:cNvPr id="38" name="Rounded Rectangle 37"/>
+              <a:t>12</a:t>
+            </a:r>
+          </a:p>
+        </p:txBody>
+      </p:sp>
+      <p:sp>
+        <p:nvSpPr>
+          <p:cNvPr id="44" name="Rounded Rectangle 43"/>
           <p:cNvSpPr/>
           <p:nvPr/>
         </p:nvSpPr>
         <p:spPr>
           <a:xfrm>
-            <a:off x="4884420" y="4178808"/>
+            <a:off x="5029200" y="4178808"/>
             <a:ext cx="3889060" cy="384048"/>
           </a:xfrm>
           <a:prstGeom prst="roundRect">
@@ -18942,14 +19218,73 @@
       </p:sp>
       <p:sp>
         <p:nvSpPr>
-          <p:cNvPr id="39" name="Rounded Rectangle 38"/>
+          <p:cNvPr id="45" name="Rounded Rectangle 44"/>
           <p:cNvSpPr/>
           <p:nvPr/>
         </p:nvSpPr>
         <p:spPr>
           <a:xfrm>
-            <a:off x="8793480" y="4178808"/>
-            <a:ext cx="1427800" cy="384048"/>
+            <a:off x="8938260" y="4178808"/>
+            <a:ext cx="559120" cy="384048"/>
+          </a:xfrm>
+          <a:prstGeom prst="roundRect">
+            <a:avLst>
+              <a:gd name="adj" fmla="val 18000"/>
+            </a:avLst>
+          </a:prstGeom>
+          <a:solidFill>
+            <a:srgbClr val="2A78D6"/>
+          </a:solidFill>
+          <a:ln>
+            <a:noFill/>
+          </a:ln>
+          <a:effectLst/>
+        </p:spPr>
+        <p:style>
+          <a:lnRef idx="1">
+            <a:schemeClr val="accent1"/>
+          </a:lnRef>
+          <a:fillRef idx="3">
+            <a:schemeClr val="accent1"/>
+          </a:fillRef>
+          <a:effectRef idx="2">
+            <a:schemeClr val="accent1"/>
+          </a:effectRef>
+          <a:fontRef idx="minor">
+            <a:schemeClr val="lt1"/>
+          </a:fontRef>
+        </p:style>
+        <p:txBody>
+          <a:bodyPr rtlCol="0" anchor="ctr"/>
+          <a:lstStyle/>
+          <a:p>
+            <a:pPr algn="ctr">
+              <a:spcAft>
+                <a:spcPts val="400"/>
+              </a:spcAft>
+            </a:pPr>
+            <a:r>
+              <a:rPr sz="1100" b="1">
+                <a:solidFill>
+                  <a:srgbClr val="FFFFFF"/>
+                </a:solidFill>
+                <a:latin typeface="Arial"/>
+              </a:rPr>
+              <a:t>4</a:t>
+            </a:r>
+          </a:p>
+        </p:txBody>
+      </p:sp>
+      <p:sp>
+        <p:nvSpPr>
+          <p:cNvPr id="46" name="Rounded Rectangle 45"/>
+          <p:cNvSpPr/>
+          <p:nvPr/>
+        </p:nvSpPr>
+        <p:spPr>
+          <a:xfrm>
+            <a:off x="9517380" y="4178808"/>
+            <a:ext cx="703900" cy="384048"/>
           </a:xfrm>
           <a:prstGeom prst="roundRect">
             <a:avLst>
@@ -18994,14 +19329,14 @@
                 </a:solidFill>
                 <a:latin typeface="Arial"/>
               </a:rPr>
-              <a:t>10</a:t>
-            </a:r>
-          </a:p>
-        </p:txBody>
-      </p:sp>
-      <p:sp>
-        <p:nvSpPr>
-          <p:cNvPr id="40" name="TextBox 39"/>
+              <a:t>5</a:t>
+            </a:r>
+          </a:p>
+        </p:txBody>
+      </p:sp>
+      <p:sp>
+        <p:nvSpPr>
+          <p:cNvPr id="47" name="TextBox 46"/>
           <p:cNvSpPr txBox="1"/>
           <p:nvPr/>
         </p:nvSpPr>
@@ -19040,7 +19375,7 @@
       </p:sp>
       <p:sp>
         <p:nvSpPr>
-          <p:cNvPr id="41" name="Rounded Rectangle 40"/>
+          <p:cNvPr id="48" name="Rounded Rectangle 47"/>
           <p:cNvSpPr/>
           <p:nvPr/>
         </p:nvSpPr>
@@ -19086,7 +19421,7 @@
       </p:sp>
       <p:sp>
         <p:nvSpPr>
-          <p:cNvPr id="42" name="TextBox 41"/>
+          <p:cNvPr id="49" name="TextBox 48"/>
           <p:cNvSpPr txBox="1"/>
           <p:nvPr/>
         </p:nvSpPr>
@@ -19122,14 +19457,14 @@
                 </a:solidFill>
                 <a:latin typeface="Arial"/>
               </a:rPr>
-              <a:t>40 / 50 ажил (80%) — 13 бүрэн, 27 нь ГУС-ийн холболт нээгдэхийг хүлээж байна</a:t>
-            </a:r>
-          </a:p>
-        </p:txBody>
-      </p:sp>
-      <p:sp>
-        <p:nvSpPr>
-          <p:cNvPr id="43" name="TextBox 42"/>
+              <a:t>41 / 50 ажил (82%) — 14 бүрэн, 27 нь ГУС-ийн холболт нээгдэхийг хүлээж байна</a:t>
+            </a:r>
+          </a:p>
+        </p:txBody>
+      </p:sp>
+      <p:sp>
+        <p:nvSpPr>
+          <p:cNvPr id="50" name="TextBox 49"/>
           <p:cNvSpPr txBox="1"/>
           <p:nvPr/>
         </p:nvSpPr>
@@ -19161,7 +19496,7 @@
                 </a:solidFill>
                 <a:latin typeface="Arial"/>
               </a:rPr>
-              <a:t>Төлөв: ногоон = бүрэн хийгдсэн · шар = хийгдсэн боловч Газрын удирдлагын системтэй (ГУС) холбогдох хөгжүүлэлт хүлээгдэж буй · саарал = хүлээгдэж байгаа</a:t>
+              <a:t>Төлөв: ногоон = бүрэн хийгдсэн · шар = хийгдсэн боловч Газрын удирдлагын системтэй (ГУС) холбогдох хөгжүүлэлт хүлээгдэж буй · цэнхэр = ГУС-аас хамааралтай (дараа хийгдэх боломжтой) · саарал = бусад хүлээгдэж байгаа</a:t>
             </a:r>
           </a:p>
         </p:txBody>
@@ -25563,11 +25898,11 @@
         <p:spPr>
           <a:xfrm>
             <a:off x="502920" y="1481328"/>
-            <a:ext cx="6309360" cy="4709160"/>
+            <a:ext cx="3611880" cy="4709160"/>
           </a:xfrm>
           <a:prstGeom prst="roundRect">
             <a:avLst>
-              <a:gd name="adj" fmla="val 4000"/>
+              <a:gd name="adj" fmla="val 4500"/>
             </a:avLst>
           </a:prstGeom>
           <a:solidFill>
@@ -25611,13 +25946,13 @@
         <p:spPr>
           <a:xfrm>
             <a:off x="502920" y="1481328"/>
-            <a:ext cx="6309360" cy="50800"/>
+            <a:ext cx="3611880" cy="50800"/>
           </a:xfrm>
           <a:prstGeom prst="rect">
             <a:avLst/>
           </a:prstGeom>
           <a:solidFill>
-            <a:srgbClr val="C4C5BE"/>
+            <a:srgbClr val="2A78D6"/>
           </a:solidFill>
           <a:ln>
             <a:noFill/>
@@ -25648,282 +25983,18 @@
       </p:sp>
       <p:sp>
         <p:nvSpPr>
-          <p:cNvPr id="12" name="TextBox 11"/>
-          <p:cNvSpPr txBox="1"/>
-          <p:nvPr/>
-        </p:nvSpPr>
-        <p:spPr>
-          <a:xfrm>
-            <a:off x="749808" y="1664208"/>
-            <a:ext cx="5852160" cy="4389120"/>
-          </a:xfrm>
-          <a:prstGeom prst="rect">
-            <a:avLst/>
-          </a:prstGeom>
-          <a:noFill/>
-        </p:spPr>
-        <p:txBody>
-          <a:bodyPr wrap="square">
-            <a:spAutoFit/>
-          </a:bodyPr>
-          <a:lstStyle/>
-          <a:p>
-            <a:pPr algn="l">
-              <a:spcAft>
-                <a:spcPts val="1000"/>
-              </a:spcAft>
-            </a:pPr>
-            <a:r>
-              <a:rPr sz="1000" b="1">
-                <a:solidFill>
-                  <a:srgbClr val="4A5560"/>
-                </a:solidFill>
-                <a:latin typeface="Arial"/>
-              </a:rPr>
-              <a:t>ХҮЛЭЭГДЭЖ БАЙГАА 10 АЖИЛ</a:t>
-            </a:r>
-          </a:p>
-          <a:p>
-            <a:pPr algn="l">
-              <a:spcAft>
-                <a:spcPts val="800"/>
-              </a:spcAft>
-            </a:pPr>
-            <a:r>
-              <a:rPr sz="1150" b="1">
-                <a:solidFill>
-                  <a:srgbClr val="C4C5BE"/>
-                </a:solidFill>
-                <a:latin typeface="Arial"/>
-              </a:rPr>
-              <a:t>▪ </a:t>
-            </a:r>
-            <a:r>
-              <a:rPr sz="1150">
-                <a:solidFill>
-                  <a:srgbClr val="4A5560"/>
-                </a:solidFill>
-                <a:latin typeface="Arial"/>
-              </a:rPr>
-              <a:t>Зураг төслийн түүхэн өөрчлөлтийг харуулах (2.2.2.2)</a:t>
-            </a:r>
-          </a:p>
-          <a:p>
-            <a:pPr algn="l">
-              <a:spcAft>
-                <a:spcPts val="800"/>
-              </a:spcAft>
-            </a:pPr>
-            <a:r>
-              <a:rPr sz="1150" b="1">
-                <a:solidFill>
-                  <a:srgbClr val="C4C5BE"/>
-                </a:solidFill>
-                <a:latin typeface="Arial"/>
-              </a:rPr>
-              <a:t>▪ </a:t>
-            </a:r>
-            <a:r>
-              <a:rPr sz="1150">
-                <a:solidFill>
-                  <a:srgbClr val="4A5560"/>
-                </a:solidFill>
-                <a:latin typeface="Arial"/>
-              </a:rPr>
-              <a:t>НЭЗ судалгааг цахимаар авах (2.4.2.1)</a:t>
-            </a:r>
-          </a:p>
-          <a:p>
-            <a:pPr algn="l">
-              <a:spcAft>
-                <a:spcPts val="800"/>
-              </a:spcAft>
-            </a:pPr>
-            <a:r>
-              <a:rPr sz="1150" b="1">
-                <a:solidFill>
-                  <a:srgbClr val="C4C5BE"/>
-                </a:solidFill>
-                <a:latin typeface="Arial"/>
-              </a:rPr>
-              <a:t>▪ </a:t>
-            </a:r>
-            <a:r>
-              <a:rPr sz="1150">
-                <a:solidFill>
-                  <a:srgbClr val="4A5560"/>
-                </a:solidFill>
-                <a:latin typeface="Arial"/>
-              </a:rPr>
-              <a:t>Мэдэгдэх хуудас цахимаар хүргүүлэх (2.4.2.2)</a:t>
-            </a:r>
-          </a:p>
-          <a:p>
-            <a:pPr algn="l">
-              <a:spcAft>
-                <a:spcPts val="800"/>
-              </a:spcAft>
-            </a:pPr>
-            <a:r>
-              <a:rPr sz="1150" b="1">
-                <a:solidFill>
-                  <a:srgbClr val="C4C5BE"/>
-                </a:solidFill>
-                <a:latin typeface="Arial"/>
-              </a:rPr>
-              <a:t>▪ </a:t>
-            </a:r>
-            <a:r>
-              <a:rPr sz="1150">
-                <a:solidFill>
-                  <a:srgbClr val="4A5560"/>
-                </a:solidFill>
-                <a:latin typeface="Arial"/>
-              </a:rPr>
-              <a:t>Албан бичиг хүргүүлэх (2.4.2.3)</a:t>
-            </a:r>
-          </a:p>
-          <a:p>
-            <a:pPr algn="l">
-              <a:spcAft>
-                <a:spcPts val="800"/>
-              </a:spcAft>
-            </a:pPr>
-            <a:r>
-              <a:rPr sz="1150" b="1">
-                <a:solidFill>
-                  <a:srgbClr val="C4C5BE"/>
-                </a:solidFill>
-                <a:latin typeface="Arial"/>
-              </a:rPr>
-              <a:t>▪ </a:t>
-            </a:r>
-            <a:r>
-              <a:rPr sz="1150">
-                <a:solidFill>
-                  <a:srgbClr val="4A5560"/>
-                </a:solidFill>
-                <a:latin typeface="Arial"/>
-              </a:rPr>
-              <a:t>Тооцооллын журам, аргачлал, үнийн бүртгэл (2.4.3.2)</a:t>
-            </a:r>
-          </a:p>
-          <a:p>
-            <a:pPr algn="l">
-              <a:spcAft>
-                <a:spcPts val="800"/>
-              </a:spcAft>
-            </a:pPr>
-            <a:r>
-              <a:rPr sz="1150" b="1">
-                <a:solidFill>
-                  <a:srgbClr val="C4C5BE"/>
-                </a:solidFill>
-                <a:latin typeface="Arial"/>
-              </a:rPr>
-              <a:t>▪ </a:t>
-            </a:r>
-            <a:r>
-              <a:rPr sz="1150">
-                <a:solidFill>
-                  <a:srgbClr val="4A5560"/>
-                </a:solidFill>
-                <a:latin typeface="Arial"/>
-              </a:rPr>
-              <a:t>Гэрээг цахим системээр хэвлэх (2.4.4.2)</a:t>
-            </a:r>
-          </a:p>
-          <a:p>
-            <a:pPr algn="l">
-              <a:spcAft>
-                <a:spcPts val="800"/>
-              </a:spcAft>
-            </a:pPr>
-            <a:r>
-              <a:rPr sz="1150" b="1">
-                <a:solidFill>
-                  <a:srgbClr val="C4C5BE"/>
-                </a:solidFill>
-                <a:latin typeface="Arial"/>
-              </a:rPr>
-              <a:t>▪ </a:t>
-            </a:r>
-            <a:r>
-              <a:rPr sz="1150">
-                <a:solidFill>
-                  <a:srgbClr val="4A5560"/>
-                </a:solidFill>
-                <a:latin typeface="Arial"/>
-              </a:rPr>
-              <a:t>Чөлөөлсөн тухай акт үйлдэх (2.4.4.4)</a:t>
-            </a:r>
-          </a:p>
-          <a:p>
-            <a:pPr algn="l">
-              <a:spcAft>
-                <a:spcPts val="800"/>
-              </a:spcAft>
-            </a:pPr>
-            <a:r>
-              <a:rPr sz="1150" b="1">
-                <a:solidFill>
-                  <a:srgbClr val="C4C5BE"/>
-                </a:solidFill>
-                <a:latin typeface="Arial"/>
-              </a:rPr>
-              <a:t>▪ </a:t>
-            </a:r>
-            <a:r>
-              <a:rPr sz="1150">
-                <a:solidFill>
-                  <a:srgbClr val="4A5560"/>
-                </a:solidFill>
-                <a:latin typeface="Arial"/>
-              </a:rPr>
-              <a:t>Агаар сансрын зураг шинэчлэх (2.6.1) · дроны мэдээлэл (2.6.2)</a:t>
-            </a:r>
-          </a:p>
-          <a:p>
-            <a:pPr algn="l">
-              <a:spcAft>
-                <a:spcPts val="800"/>
-              </a:spcAft>
-            </a:pPr>
-            <a:r>
-              <a:rPr sz="1150" b="1">
-                <a:solidFill>
-                  <a:srgbClr val="C4C5BE"/>
-                </a:solidFill>
-                <a:latin typeface="Arial"/>
-              </a:rPr>
-              <a:t>▪ </a:t>
-            </a:r>
-            <a:r>
-              <a:rPr sz="1150">
-                <a:solidFill>
-                  <a:srgbClr val="4A5560"/>
-                </a:solidFill>
-                <a:latin typeface="Arial"/>
-              </a:rPr>
-              <a:t>2010–2025 оны түүхэн өгөгдөл нөхөж оруулах (2.7.1)</a:t>
-            </a:r>
-          </a:p>
-        </p:txBody>
-      </p:sp>
-      <p:sp>
-        <p:nvSpPr>
-          <p:cNvPr id="13" name="Rounded Rectangle 12"/>
+          <p:cNvPr id="12" name="Rounded Rectangle 11"/>
           <p:cNvSpPr/>
           <p:nvPr/>
         </p:nvSpPr>
         <p:spPr>
           <a:xfrm>
-            <a:off x="7022592" y="1481328"/>
-            <a:ext cx="4663440" cy="4709160"/>
+            <a:off x="4288536" y="1481328"/>
+            <a:ext cx="3611880" cy="4709160"/>
           </a:xfrm>
           <a:prstGeom prst="roundRect">
             <a:avLst>
-              <a:gd name="adj" fmla="val 4000"/>
+              <a:gd name="adj" fmla="val 4500"/>
             </a:avLst>
           </a:prstGeom>
           <a:solidFill>
@@ -25960,14 +26031,106 @@
       </p:sp>
       <p:sp>
         <p:nvSpPr>
-          <p:cNvPr id="14" name="Rectangle 13"/>
+          <p:cNvPr id="13" name="Rectangle 12"/>
           <p:cNvSpPr/>
           <p:nvPr/>
         </p:nvSpPr>
         <p:spPr>
           <a:xfrm>
-            <a:off x="7022592" y="1481328"/>
-            <a:ext cx="4663440" cy="50800"/>
+            <a:off x="4288536" y="1481328"/>
+            <a:ext cx="3611880" cy="50800"/>
+          </a:xfrm>
+          <a:prstGeom prst="rect">
+            <a:avLst/>
+          </a:prstGeom>
+          <a:solidFill>
+            <a:srgbClr val="C4C5BE"/>
+          </a:solidFill>
+          <a:ln>
+            <a:noFill/>
+          </a:ln>
+          <a:effectLst/>
+        </p:spPr>
+        <p:style>
+          <a:lnRef idx="1">
+            <a:schemeClr val="accent1"/>
+          </a:lnRef>
+          <a:fillRef idx="3">
+            <a:schemeClr val="accent1"/>
+          </a:fillRef>
+          <a:effectRef idx="2">
+            <a:schemeClr val="accent1"/>
+          </a:effectRef>
+          <a:fontRef idx="minor">
+            <a:schemeClr val="lt1"/>
+          </a:fontRef>
+        </p:style>
+        <p:txBody>
+          <a:bodyPr rtlCol="0" anchor="ctr"/>
+          <a:lstStyle/>
+          <a:p>
+            <a:pPr algn="ctr"/>
+          </a:p>
+        </p:txBody>
+      </p:sp>
+      <p:sp>
+        <p:nvSpPr>
+          <p:cNvPr id="14" name="Rounded Rectangle 13"/>
+          <p:cNvSpPr/>
+          <p:nvPr/>
+        </p:nvSpPr>
+        <p:spPr>
+          <a:xfrm>
+            <a:off x="8074152" y="1481328"/>
+            <a:ext cx="3611880" cy="4709160"/>
+          </a:xfrm>
+          <a:prstGeom prst="roundRect">
+            <a:avLst>
+              <a:gd name="adj" fmla="val 4500"/>
+            </a:avLst>
+          </a:prstGeom>
+          <a:solidFill>
+            <a:srgbClr val="FFFFFF"/>
+          </a:solidFill>
+          <a:ln w="9525">
+            <a:solidFill>
+              <a:srgbClr val="DDE3E9"/>
+            </a:solidFill>
+          </a:ln>
+          <a:effectLst/>
+        </p:spPr>
+        <p:style>
+          <a:lnRef idx="1">
+            <a:schemeClr val="accent1"/>
+          </a:lnRef>
+          <a:fillRef idx="3">
+            <a:schemeClr val="accent1"/>
+          </a:fillRef>
+          <a:effectRef idx="2">
+            <a:schemeClr val="accent1"/>
+          </a:effectRef>
+          <a:fontRef idx="minor">
+            <a:schemeClr val="lt1"/>
+          </a:fontRef>
+        </p:style>
+        <p:txBody>
+          <a:bodyPr rtlCol="0" anchor="ctr"/>
+          <a:lstStyle/>
+          <a:p>
+            <a:pPr algn="ctr"/>
+          </a:p>
+        </p:txBody>
+      </p:sp>
+      <p:sp>
+        <p:nvSpPr>
+          <p:cNvPr id="15" name="Rectangle 14"/>
+          <p:cNvSpPr/>
+          <p:nvPr/>
+        </p:nvSpPr>
+        <p:spPr>
+          <a:xfrm>
+            <a:off x="8074152" y="1481328"/>
+            <a:ext cx="3611880" cy="50800"/>
           </a:xfrm>
           <a:prstGeom prst="rect">
             <a:avLst/>
@@ -26004,14 +26167,14 @@
       </p:sp>
       <p:sp>
         <p:nvSpPr>
-          <p:cNvPr id="15" name="TextBox 14"/>
+          <p:cNvPr id="16" name="TextBox 15"/>
           <p:cNvSpPr txBox="1"/>
           <p:nvPr/>
         </p:nvSpPr>
         <p:spPr>
           <a:xfrm>
-            <a:off x="7269480" y="1664208"/>
-            <a:ext cx="4206240" cy="4389120"/>
+            <a:off x="704088" y="1664208"/>
+            <a:ext cx="3209544" cy="4389120"/>
           </a:xfrm>
           <a:prstGeom prst="rect">
             <a:avLst/>
@@ -26026,181 +26189,484 @@
           <a:p>
             <a:pPr algn="l">
               <a:spcAft>
-                <a:spcPts val="1200"/>
+                <a:spcPts val="1100"/>
               </a:spcAft>
             </a:pPr>
             <a:r>
-              <a:rPr sz="1000" b="1">
-                <a:solidFill>
-                  <a:srgbClr val="0E8345"/>
-                </a:solidFill>
-                <a:latin typeface="Arial"/>
-              </a:rPr>
-              <a:t>ИЖ БҮРДЭЛД ОРООГҮЙ БОЛОВЧ ХЭРЭГЖСЭН 5 АЖИЛ</a:t>
+              <a:rPr sz="900" b="1">
+                <a:solidFill>
+                  <a:srgbClr val="2A78D6"/>
+                </a:solidFill>
+                <a:latin typeface="Arial"/>
+              </a:rPr>
+              <a:t>ГУС-ААС ХАМААРАЛТАЙ — ДАРАА ХИЙГДЭХ БОЛОМЖТОЙ (4)</a:t>
             </a:r>
           </a:p>
           <a:p>
             <a:pPr algn="l">
               <a:spcAft>
-                <a:spcPts val="1000"/>
+                <a:spcPts val="900"/>
               </a:spcAft>
             </a:pPr>
             <a:r>
-              <a:rPr sz="1150" b="1">
-                <a:solidFill>
-                  <a:srgbClr val="0E8345"/>
+              <a:rPr sz="1050" b="1">
+                <a:solidFill>
+                  <a:srgbClr val="2A78D6"/>
                 </a:solidFill>
                 <a:latin typeface="Arial"/>
               </a:rPr>
               <a:t>▪ </a:t>
             </a:r>
             <a:r>
-              <a:rPr sz="1150" b="1">
-                <a:solidFill>
-                  <a:srgbClr val="16202B"/>
-                </a:solidFill>
-                <a:latin typeface="Arial"/>
-              </a:rPr>
-              <a:t>Excel-ээс үнэлгээ импортлох</a:t>
-            </a:r>
-            <a:r>
-              <a:rPr sz="1150">
+              <a:rPr sz="1050">
                 <a:solidFill>
                   <a:srgbClr val="4A5560"/>
                 </a:solidFill>
                 <a:latin typeface="Arial"/>
               </a:rPr>
-              <a:t> — SHA-256 давхардлын хамгаалалттай</a:t>
+              <a:t>НЭЗ судалгааг цахимаар авах (2.4.2.1)</a:t>
             </a:r>
           </a:p>
           <a:p>
             <a:pPr algn="l">
               <a:spcAft>
-                <a:spcPts val="1000"/>
+                <a:spcPts val="900"/>
               </a:spcAft>
             </a:pPr>
             <a:r>
-              <a:rPr sz="1150" b="1">
-                <a:solidFill>
-                  <a:srgbClr val="0E8345"/>
+              <a:rPr sz="1050" b="1">
+                <a:solidFill>
+                  <a:srgbClr val="2A78D6"/>
                 </a:solidFill>
                 <a:latin typeface="Arial"/>
               </a:rPr>
               <a:t>▪ </a:t>
             </a:r>
             <a:r>
-              <a:rPr sz="1150" b="1">
-                <a:solidFill>
-                  <a:srgbClr val="16202B"/>
-                </a:solidFill>
-                <a:latin typeface="Arial"/>
-              </a:rPr>
-              <a:t>Мэрг. байгууллагын портал</a:t>
-            </a:r>
-            <a:r>
-              <a:rPr sz="1150">
+              <a:rPr sz="1050">
                 <a:solidFill>
                   <a:srgbClr val="4A5560"/>
                 </a:solidFill>
                 <a:latin typeface="Arial"/>
               </a:rPr>
-              <a:t> — тусгаарлагдсан 43 endpoint</a:t>
+              <a:t>Мэдэгдэх хуудас хүргүүлэх (2.4.2.2)</a:t>
             </a:r>
           </a:p>
           <a:p>
             <a:pPr algn="l">
               <a:spcAft>
-                <a:spcPts val="1000"/>
+                <a:spcPts val="900"/>
               </a:spcAft>
             </a:pPr>
             <a:r>
-              <a:rPr sz="1150" b="1">
-                <a:solidFill>
-                  <a:srgbClr val="0E8345"/>
+              <a:rPr sz="1050" b="1">
+                <a:solidFill>
+                  <a:srgbClr val="2A78D6"/>
                 </a:solidFill>
                 <a:latin typeface="Arial"/>
               </a:rPr>
               <a:t>▪ </a:t>
             </a:r>
             <a:r>
-              <a:rPr sz="1150" b="1">
-                <a:solidFill>
-                  <a:srgbClr val="16202B"/>
-                </a:solidFill>
-                <a:latin typeface="Arial"/>
-              </a:rPr>
-              <a:t>Бүрэн түүхжүүлэлт</a:t>
-            </a:r>
-            <a:r>
-              <a:rPr sz="1150">
+              <a:rPr sz="1050">
                 <a:solidFill>
                   <a:srgbClr val="4A5560"/>
                 </a:solidFill>
                 <a:latin typeface="Arial"/>
               </a:rPr>
-              <a:t> — өөрчлөлт бүр түүхтэй</a:t>
+              <a:t>Албан бичиг хүргүүлэх (2.4.2.3)</a:t>
             </a:r>
           </a:p>
           <a:p>
             <a:pPr algn="l">
               <a:spcAft>
-                <a:spcPts val="1000"/>
+                <a:spcPts val="900"/>
               </a:spcAft>
             </a:pPr>
             <a:r>
-              <a:rPr sz="1150" b="1">
-                <a:solidFill>
-                  <a:srgbClr val="0E8345"/>
+              <a:rPr sz="1050" b="1">
+                <a:solidFill>
+                  <a:srgbClr val="2A78D6"/>
                 </a:solidFill>
                 <a:latin typeface="Arial"/>
               </a:rPr>
               <a:t>▪ </a:t>
             </a:r>
             <a:r>
-              <a:rPr sz="1150" b="1">
-                <a:solidFill>
-                  <a:srgbClr val="16202B"/>
-                </a:solidFill>
-                <a:latin typeface="Arial"/>
-              </a:rPr>
-              <a:t>Аюулгүй байдлын өргөтгөлүүд</a:t>
-            </a:r>
-            <a:r>
-              <a:rPr sz="1150">
+              <a:rPr sz="1050">
                 <a:solidFill>
                   <a:srgbClr val="4A5560"/>
                 </a:solidFill>
                 <a:latin typeface="Arial"/>
               </a:rPr>
-              <a:t> — token хүчингүйжүүлэлт, 4 давхар хамгаалалт</a:t>
-            </a:r>
-          </a:p>
+              <a:t>2010–2025 оны түүхэн өгөгдөл нөхөж оруулах (2.7.1)</a:t>
+            </a:r>
+          </a:p>
+        </p:txBody>
+      </p:sp>
+      <p:sp>
+        <p:nvSpPr>
+          <p:cNvPr id="17" name="TextBox 16"/>
+          <p:cNvSpPr txBox="1"/>
+          <p:nvPr/>
+        </p:nvSpPr>
+        <p:spPr>
+          <a:xfrm>
+            <a:off x="4489704" y="1664208"/>
+            <a:ext cx="3209544" cy="4389120"/>
+          </a:xfrm>
+          <a:prstGeom prst="rect">
+            <a:avLst/>
+          </a:prstGeom>
+          <a:noFill/>
+        </p:spPr>
+        <p:txBody>
+          <a:bodyPr wrap="square">
+            <a:spAutoFit/>
+          </a:bodyPr>
+          <a:lstStyle/>
           <a:p>
             <a:pPr algn="l">
               <a:spcAft>
-                <a:spcPts val="1000"/>
+                <a:spcPts val="1100"/>
               </a:spcAft>
             </a:pPr>
             <a:r>
-              <a:rPr sz="1150" b="1">
+              <a:rPr sz="900" b="1">
+                <a:solidFill>
+                  <a:srgbClr val="4A5560"/>
+                </a:solidFill>
+                <a:latin typeface="Arial"/>
+              </a:rPr>
+              <a:t>БУСАД ХҮЛЭЭГДЭЖ БАЙГАА (5)</a:t>
+            </a:r>
+          </a:p>
+          <a:p>
+            <a:pPr algn="l">
+              <a:spcAft>
+                <a:spcPts val="900"/>
+              </a:spcAft>
+            </a:pPr>
+            <a:r>
+              <a:rPr sz="1050" b="1">
+                <a:solidFill>
+                  <a:srgbClr val="C4C5BE"/>
+                </a:solidFill>
+                <a:latin typeface="Arial"/>
+              </a:rPr>
+              <a:t>▪ </a:t>
+            </a:r>
+            <a:r>
+              <a:rPr sz="1050">
+                <a:solidFill>
+                  <a:srgbClr val="4A5560"/>
+                </a:solidFill>
+                <a:latin typeface="Arial"/>
+              </a:rPr>
+              <a:t>Зураг төслийн түүхэн өөрчлөлтийг харуулах (2.2.2.2)</a:t>
+            </a:r>
+          </a:p>
+          <a:p>
+            <a:pPr algn="l">
+              <a:spcAft>
+                <a:spcPts val="900"/>
+              </a:spcAft>
+            </a:pPr>
+            <a:r>
+              <a:rPr sz="1050" b="1">
+                <a:solidFill>
+                  <a:srgbClr val="C4C5BE"/>
+                </a:solidFill>
+                <a:latin typeface="Arial"/>
+              </a:rPr>
+              <a:t>▪ </a:t>
+            </a:r>
+            <a:r>
+              <a:rPr sz="1050">
+                <a:solidFill>
+                  <a:srgbClr val="4A5560"/>
+                </a:solidFill>
+                <a:latin typeface="Arial"/>
+              </a:rPr>
+              <a:t>Тооцооллын журам, аргачлал, үнийн бүртгэл (2.4.3.2)</a:t>
+            </a:r>
+          </a:p>
+          <a:p>
+            <a:pPr algn="l">
+              <a:spcAft>
+                <a:spcPts val="900"/>
+              </a:spcAft>
+            </a:pPr>
+            <a:r>
+              <a:rPr sz="1050" b="1">
+                <a:solidFill>
+                  <a:srgbClr val="C4C5BE"/>
+                </a:solidFill>
+                <a:latin typeface="Arial"/>
+              </a:rPr>
+              <a:t>▪ </a:t>
+            </a:r>
+            <a:r>
+              <a:rPr sz="1050">
+                <a:solidFill>
+                  <a:srgbClr val="4A5560"/>
+                </a:solidFill>
+                <a:latin typeface="Arial"/>
+              </a:rPr>
+              <a:t>Гэрээг цахим системээр хэвлэх (2.4.4.2)</a:t>
+            </a:r>
+          </a:p>
+          <a:p>
+            <a:pPr algn="l">
+              <a:spcAft>
+                <a:spcPts val="900"/>
+              </a:spcAft>
+            </a:pPr>
+            <a:r>
+              <a:rPr sz="1050" b="1">
+                <a:solidFill>
+                  <a:srgbClr val="C4C5BE"/>
+                </a:solidFill>
+                <a:latin typeface="Arial"/>
+              </a:rPr>
+              <a:t>▪ </a:t>
+            </a:r>
+            <a:r>
+              <a:rPr sz="1050">
+                <a:solidFill>
+                  <a:srgbClr val="4A5560"/>
+                </a:solidFill>
+                <a:latin typeface="Arial"/>
+              </a:rPr>
+              <a:t>Агаар сансрын зураг шинэчлэх (2.6.1)</a:t>
+            </a:r>
+          </a:p>
+          <a:p>
+            <a:pPr algn="l">
+              <a:spcAft>
+                <a:spcPts val="900"/>
+              </a:spcAft>
+            </a:pPr>
+            <a:r>
+              <a:rPr sz="1050" b="1">
+                <a:solidFill>
+                  <a:srgbClr val="C4C5BE"/>
+                </a:solidFill>
+                <a:latin typeface="Arial"/>
+              </a:rPr>
+              <a:t>▪ </a:t>
+            </a:r>
+            <a:r>
+              <a:rPr sz="1050">
+                <a:solidFill>
+                  <a:srgbClr val="4A5560"/>
+                </a:solidFill>
+                <a:latin typeface="Arial"/>
+              </a:rPr>
+              <a:t>Дроны мэдээлэл (2.6.2)</a:t>
+            </a:r>
+          </a:p>
+        </p:txBody>
+      </p:sp>
+      <p:sp>
+        <p:nvSpPr>
+          <p:cNvPr id="18" name="TextBox 17"/>
+          <p:cNvSpPr txBox="1"/>
+          <p:nvPr/>
+        </p:nvSpPr>
+        <p:spPr>
+          <a:xfrm>
+            <a:off x="8275320" y="1664208"/>
+            <a:ext cx="3209544" cy="4389120"/>
+          </a:xfrm>
+          <a:prstGeom prst="rect">
+            <a:avLst/>
+          </a:prstGeom>
+          <a:noFill/>
+        </p:spPr>
+        <p:txBody>
+          <a:bodyPr wrap="square">
+            <a:spAutoFit/>
+          </a:bodyPr>
+          <a:lstStyle/>
+          <a:p>
+            <a:pPr algn="l">
+              <a:spcAft>
+                <a:spcPts val="1100"/>
+              </a:spcAft>
+            </a:pPr>
+            <a:r>
+              <a:rPr sz="900" b="1">
                 <a:solidFill>
                   <a:srgbClr val="0E8345"/>
                 </a:solidFill>
                 <a:latin typeface="Arial"/>
               </a:rPr>
+              <a:t>ИЖ БҮРДЭЛД ОРООГҮЙ БОЛОВЧ ХЭРЭГЖСЭН (5)</a:t>
+            </a:r>
+          </a:p>
+          <a:p>
+            <a:pPr algn="l">
+              <a:spcAft>
+                <a:spcPts val="900"/>
+              </a:spcAft>
+            </a:pPr>
+            <a:r>
+              <a:rPr sz="1050" b="1">
+                <a:solidFill>
+                  <a:srgbClr val="0E8345"/>
+                </a:solidFill>
+                <a:latin typeface="Arial"/>
+              </a:rPr>
               <a:t>▪ </a:t>
             </a:r>
             <a:r>
-              <a:rPr sz="1150" b="1">
+              <a:rPr sz="1050" b="1">
                 <a:solidFill>
                   <a:srgbClr val="16202B"/>
                 </a:solidFill>
                 <a:latin typeface="Arial"/>
               </a:rPr>
+              <a:t>Excel-ээс үнэлгээ импортлох</a:t>
+            </a:r>
+            <a:r>
+              <a:rPr sz="1050">
+                <a:solidFill>
+                  <a:srgbClr val="4A5560"/>
+                </a:solidFill>
+                <a:latin typeface="Arial"/>
+              </a:rPr>
+              <a:t> — SHA-256 давхардлын хамгаалалттай</a:t>
+            </a:r>
+          </a:p>
+          <a:p>
+            <a:pPr algn="l">
+              <a:spcAft>
+                <a:spcPts val="900"/>
+              </a:spcAft>
+            </a:pPr>
+            <a:r>
+              <a:rPr sz="1050" b="1">
+                <a:solidFill>
+                  <a:srgbClr val="0E8345"/>
+                </a:solidFill>
+                <a:latin typeface="Arial"/>
+              </a:rPr>
+              <a:t>▪ </a:t>
+            </a:r>
+            <a:r>
+              <a:rPr sz="1050" b="1">
+                <a:solidFill>
+                  <a:srgbClr val="16202B"/>
+                </a:solidFill>
+                <a:latin typeface="Arial"/>
+              </a:rPr>
+              <a:t>Мэрг. байгууллагын портал</a:t>
+            </a:r>
+            <a:r>
+              <a:rPr sz="1050">
+                <a:solidFill>
+                  <a:srgbClr val="4A5560"/>
+                </a:solidFill>
+                <a:latin typeface="Arial"/>
+              </a:rPr>
+              <a:t> — тусгаарлагдсан 43 endpoint</a:t>
+            </a:r>
+          </a:p>
+          <a:p>
+            <a:pPr algn="l">
+              <a:spcAft>
+                <a:spcPts val="900"/>
+              </a:spcAft>
+            </a:pPr>
+            <a:r>
+              <a:rPr sz="1050" b="1">
+                <a:solidFill>
+                  <a:srgbClr val="0E8345"/>
+                </a:solidFill>
+                <a:latin typeface="Arial"/>
+              </a:rPr>
+              <a:t>▪ </a:t>
+            </a:r>
+            <a:r>
+              <a:rPr sz="1050" b="1">
+                <a:solidFill>
+                  <a:srgbClr val="16202B"/>
+                </a:solidFill>
+                <a:latin typeface="Arial"/>
+              </a:rPr>
+              <a:t>Бүрэн түүхжүүлэлт</a:t>
+            </a:r>
+            <a:r>
+              <a:rPr sz="1050">
+                <a:solidFill>
+                  <a:srgbClr val="4A5560"/>
+                </a:solidFill>
+                <a:latin typeface="Arial"/>
+              </a:rPr>
+              <a:t> — өөрчлөлт бүр түүхтэй</a:t>
+            </a:r>
+          </a:p>
+          <a:p>
+            <a:pPr algn="l">
+              <a:spcAft>
+                <a:spcPts val="900"/>
+              </a:spcAft>
+            </a:pPr>
+            <a:r>
+              <a:rPr sz="1050" b="1">
+                <a:solidFill>
+                  <a:srgbClr val="0E8345"/>
+                </a:solidFill>
+                <a:latin typeface="Arial"/>
+              </a:rPr>
+              <a:t>▪ </a:t>
+            </a:r>
+            <a:r>
+              <a:rPr sz="1050" b="1">
+                <a:solidFill>
+                  <a:srgbClr val="16202B"/>
+                </a:solidFill>
+                <a:latin typeface="Arial"/>
+              </a:rPr>
+              <a:t>Аюулгүй байдлын өргөтгөлүүд</a:t>
+            </a:r>
+            <a:r>
+              <a:rPr sz="1050">
+                <a:solidFill>
+                  <a:srgbClr val="4A5560"/>
+                </a:solidFill>
+                <a:latin typeface="Arial"/>
+              </a:rPr>
+              <a:t> — token хүчингүйжүүлэлт, 4 давхар хамгаалалт</a:t>
+            </a:r>
+          </a:p>
+          <a:p>
+            <a:pPr algn="l">
+              <a:spcAft>
+                <a:spcPts val="900"/>
+              </a:spcAft>
+            </a:pPr>
+            <a:r>
+              <a:rPr sz="1050" b="1">
+                <a:solidFill>
+                  <a:srgbClr val="0E8345"/>
+                </a:solidFill>
+                <a:latin typeface="Arial"/>
+              </a:rPr>
+              <a:t>▪ </a:t>
+            </a:r>
+            <a:r>
+              <a:rPr sz="1050" b="1">
+                <a:solidFill>
+                  <a:srgbClr val="16202B"/>
+                </a:solidFill>
+                <a:latin typeface="Arial"/>
+              </a:rPr>
               <a:t>Бодит цагийн мэдэгдэл</a:t>
             </a:r>
             <a:r>
-              <a:rPr sz="1150">
+              <a:rPr sz="1050">
                 <a:solidFill>
                   <a:srgbClr val="4A5560"/>
                 </a:solidFill>
